--- a/25g-notes/Week 1/02.ML - Data Preparation.pptx
+++ b/25g-notes/Week 1/02.ML - Data Preparation.pptx
@@ -6,71 +6,70 @@
     <p:sldMasterId id="2147483660" r:id="rId2"/>
   </p:sldMasterIdLst>
   <p:notesMasterIdLst>
-    <p:notesMasterId r:id="rId34"/>
+    <p:notesMasterId r:id="rId33"/>
   </p:notesMasterIdLst>
   <p:sldIdLst>
     <p:sldId id="256" r:id="rId3"/>
-    <p:sldId id="280" r:id="rId4"/>
-    <p:sldId id="257" r:id="rId5"/>
-    <p:sldId id="258" r:id="rId6"/>
-    <p:sldId id="279" r:id="rId7"/>
-    <p:sldId id="260" r:id="rId8"/>
-    <p:sldId id="261" r:id="rId9"/>
-    <p:sldId id="262" r:id="rId10"/>
-    <p:sldId id="263" r:id="rId11"/>
-    <p:sldId id="292" r:id="rId12"/>
-    <p:sldId id="264" r:id="rId13"/>
-    <p:sldId id="265" r:id="rId14"/>
-    <p:sldId id="281" r:id="rId15"/>
-    <p:sldId id="270" r:id="rId16"/>
-    <p:sldId id="271" r:id="rId17"/>
-    <p:sldId id="272" r:id="rId18"/>
-    <p:sldId id="293" r:id="rId19"/>
-    <p:sldId id="274" r:id="rId20"/>
-    <p:sldId id="275" r:id="rId21"/>
-    <p:sldId id="276" r:id="rId22"/>
-    <p:sldId id="291" r:id="rId23"/>
-    <p:sldId id="282" r:id="rId24"/>
-    <p:sldId id="277" r:id="rId25"/>
-    <p:sldId id="286" r:id="rId26"/>
-    <p:sldId id="283" r:id="rId27"/>
-    <p:sldId id="285" r:id="rId28"/>
-    <p:sldId id="290" r:id="rId29"/>
-    <p:sldId id="288" r:id="rId30"/>
-    <p:sldId id="289" r:id="rId31"/>
-    <p:sldId id="287" r:id="rId32"/>
-    <p:sldId id="284" r:id="rId33"/>
+    <p:sldId id="257" r:id="rId4"/>
+    <p:sldId id="258" r:id="rId5"/>
+    <p:sldId id="279" r:id="rId6"/>
+    <p:sldId id="260" r:id="rId7"/>
+    <p:sldId id="261" r:id="rId8"/>
+    <p:sldId id="262" r:id="rId9"/>
+    <p:sldId id="263" r:id="rId10"/>
+    <p:sldId id="292" r:id="rId11"/>
+    <p:sldId id="264" r:id="rId12"/>
+    <p:sldId id="265" r:id="rId13"/>
+    <p:sldId id="281" r:id="rId14"/>
+    <p:sldId id="270" r:id="rId15"/>
+    <p:sldId id="271" r:id="rId16"/>
+    <p:sldId id="272" r:id="rId17"/>
+    <p:sldId id="293" r:id="rId18"/>
+    <p:sldId id="274" r:id="rId19"/>
+    <p:sldId id="275" r:id="rId20"/>
+    <p:sldId id="276" r:id="rId21"/>
+    <p:sldId id="291" r:id="rId22"/>
+    <p:sldId id="282" r:id="rId23"/>
+    <p:sldId id="277" r:id="rId24"/>
+    <p:sldId id="286" r:id="rId25"/>
+    <p:sldId id="283" r:id="rId26"/>
+    <p:sldId id="285" r:id="rId27"/>
+    <p:sldId id="290" r:id="rId28"/>
+    <p:sldId id="288" r:id="rId29"/>
+    <p:sldId id="289" r:id="rId30"/>
+    <p:sldId id="287" r:id="rId31"/>
+    <p:sldId id="284" r:id="rId32"/>
   </p:sldIdLst>
   <p:sldSz cx="9144000" cy="5143500" type="screen16x9"/>
   <p:notesSz cx="6858000" cy="9144000"/>
   <p:embeddedFontLst>
     <p:embeddedFont>
       <p:font typeface="Aptos Narrow" panose="020B0004020202020204" pitchFamily="34" charset="0"/>
-      <p:regular r:id="rId35"/>
-      <p:bold r:id="rId36"/>
-      <p:italic r:id="rId37"/>
-      <p:boldItalic r:id="rId38"/>
+      <p:regular r:id="rId34"/>
+      <p:bold r:id="rId35"/>
+      <p:italic r:id="rId36"/>
+      <p:boldItalic r:id="rId37"/>
     </p:embeddedFont>
     <p:embeddedFont>
       <p:font typeface="Lato" panose="020F0502020204030203" pitchFamily="34" charset="0"/>
-      <p:regular r:id="rId39"/>
-      <p:bold r:id="rId40"/>
-      <p:italic r:id="rId41"/>
-      <p:boldItalic r:id="rId42"/>
+      <p:regular r:id="rId38"/>
+      <p:bold r:id="rId39"/>
+      <p:italic r:id="rId40"/>
+      <p:boldItalic r:id="rId41"/>
     </p:embeddedFont>
     <p:embeddedFont>
       <p:font typeface="Open Sans" panose="020B0606030504020204" pitchFamily="34" charset="0"/>
-      <p:regular r:id="rId43"/>
-      <p:bold r:id="rId44"/>
-      <p:italic r:id="rId45"/>
-      <p:boldItalic r:id="rId46"/>
+      <p:regular r:id="rId42"/>
+      <p:bold r:id="rId43"/>
+      <p:italic r:id="rId44"/>
+      <p:boldItalic r:id="rId45"/>
     </p:embeddedFont>
     <p:embeddedFont>
       <p:font typeface="Raleway" pitchFamily="2" charset="0"/>
-      <p:regular r:id="rId47"/>
-      <p:bold r:id="rId48"/>
-      <p:italic r:id="rId49"/>
-      <p:boldItalic r:id="rId50"/>
+      <p:regular r:id="rId46"/>
+      <p:bold r:id="rId47"/>
+      <p:italic r:id="rId48"/>
+      <p:boldItalic r:id="rId49"/>
     </p:embeddedFont>
   </p:embeddedFontLst>
   <p:defaultTextStyle>
@@ -324,7 +323,7 @@
 <file path=ppt/revisionInfo.xml><?xml version="1.0" encoding="utf-8"?>
 <p1510:revInfo xmlns:a="http://schemas.openxmlformats.org/drawingml/2006/main" xmlns:r="http://schemas.openxmlformats.org/officeDocument/2006/relationships" xmlns:p1510="http://schemas.microsoft.com/office/powerpoint/2015/10/main">
   <p1510:revLst>
-    <p1510:client id="{8151F9AB-E0AF-4A22-B7F4-E2F8999B8F1B}" v="23" dt="2025-07-09T04:35:10.836"/>
+    <p1510:client id="{3E66C125-C966-4613-A1FE-F812CCBDD351}" v="25" dt="2025-08-26T16:21:01.259"/>
   </p1510:revLst>
 </p1510:revInfo>
 </file>
@@ -344,14 +343,6 @@
           <pc:docMk/>
           <pc:sldMk cId="0" sldId="256"/>
         </pc:sldMkLst>
-        <pc:inkChg chg="del">
-          <ac:chgData name="Christopher Aloo" userId="81d139e4-1a74-45bd-a04a-64f94c7d37c9" providerId="ADAL" clId="{8151F9AB-E0AF-4A22-B7F4-E2F8999B8F1B}" dt="2025-07-08T17:22:04.539" v="0" actId="478"/>
-          <ac:inkMkLst>
-            <pc:docMk/>
-            <pc:sldMk cId="0" sldId="256"/>
-            <ac:inkMk id="4" creationId="{56590D2E-5053-2124-7255-53BAF8B1AA88}"/>
-          </ac:inkMkLst>
-        </pc:inkChg>
       </pc:sldChg>
       <pc:sldChg chg="delSp mod">
         <pc:chgData name="Christopher Aloo" userId="81d139e4-1a74-45bd-a04a-64f94c7d37c9" providerId="ADAL" clId="{8151F9AB-E0AF-4A22-B7F4-E2F8999B8F1B}" dt="2025-07-08T17:22:11.260" v="1" actId="478"/>
@@ -359,14 +350,6 @@
           <pc:docMk/>
           <pc:sldMk cId="0" sldId="257"/>
         </pc:sldMkLst>
-        <pc:inkChg chg="del">
-          <ac:chgData name="Christopher Aloo" userId="81d139e4-1a74-45bd-a04a-64f94c7d37c9" providerId="ADAL" clId="{8151F9AB-E0AF-4A22-B7F4-E2F8999B8F1B}" dt="2025-07-08T17:22:11.260" v="1" actId="478"/>
-          <ac:inkMkLst>
-            <pc:docMk/>
-            <pc:sldMk cId="0" sldId="257"/>
-            <ac:inkMk id="4" creationId="{C3596134-B603-764F-13B8-93A595171139}"/>
-          </ac:inkMkLst>
-        </pc:inkChg>
       </pc:sldChg>
       <pc:sldChg chg="delSp mod">
         <pc:chgData name="Christopher Aloo" userId="81d139e4-1a74-45bd-a04a-64f94c7d37c9" providerId="ADAL" clId="{8151F9AB-E0AF-4A22-B7F4-E2F8999B8F1B}" dt="2025-07-08T17:22:16.224" v="2" actId="478"/>
@@ -374,14 +357,6 @@
           <pc:docMk/>
           <pc:sldMk cId="0" sldId="258"/>
         </pc:sldMkLst>
-        <pc:inkChg chg="del">
-          <ac:chgData name="Christopher Aloo" userId="81d139e4-1a74-45bd-a04a-64f94c7d37c9" providerId="ADAL" clId="{8151F9AB-E0AF-4A22-B7F4-E2F8999B8F1B}" dt="2025-07-08T17:22:16.224" v="2" actId="478"/>
-          <ac:inkMkLst>
-            <pc:docMk/>
-            <pc:sldMk cId="0" sldId="258"/>
-            <ac:inkMk id="2" creationId="{6E99D1AF-9328-8EE1-7CE3-664C235FAACF}"/>
-          </ac:inkMkLst>
-        </pc:inkChg>
       </pc:sldChg>
       <pc:sldChg chg="delSp mod">
         <pc:chgData name="Christopher Aloo" userId="81d139e4-1a74-45bd-a04a-64f94c7d37c9" providerId="ADAL" clId="{8151F9AB-E0AF-4A22-B7F4-E2F8999B8F1B}" dt="2025-07-08T17:22:19.894" v="3" actId="478"/>
@@ -389,14 +364,6 @@
           <pc:docMk/>
           <pc:sldMk cId="0" sldId="260"/>
         </pc:sldMkLst>
-        <pc:inkChg chg="del">
-          <ac:chgData name="Christopher Aloo" userId="81d139e4-1a74-45bd-a04a-64f94c7d37c9" providerId="ADAL" clId="{8151F9AB-E0AF-4A22-B7F4-E2F8999B8F1B}" dt="2025-07-08T17:22:19.894" v="3" actId="478"/>
-          <ac:inkMkLst>
-            <pc:docMk/>
-            <pc:sldMk cId="0" sldId="260"/>
-            <ac:inkMk id="2" creationId="{6AB2DA6D-3CF6-DB89-9838-B07E95FE2E2A}"/>
-          </ac:inkMkLst>
-        </pc:inkChg>
       </pc:sldChg>
       <pc:sldChg chg="addSp delSp modSp mod">
         <pc:chgData name="Christopher Aloo" userId="81d139e4-1a74-45bd-a04a-64f94c7d37c9" providerId="ADAL" clId="{8151F9AB-E0AF-4A22-B7F4-E2F8999B8F1B}" dt="2025-07-08T17:38:46.346" v="87" actId="478"/>
@@ -410,94 +377,6 @@
             <pc:docMk/>
             <pc:sldMk cId="0" sldId="261"/>
             <ac:grpSpMk id="8" creationId="{1D15FC55-F85B-C6DC-E3F2-A53D65945E9D}"/>
-          </ac:grpSpMkLst>
-        </pc:grpChg>
-        <pc:grpChg chg="del mod">
-          <ac:chgData name="Christopher Aloo" userId="81d139e4-1a74-45bd-a04a-64f94c7d37c9" providerId="ADAL" clId="{8151F9AB-E0AF-4A22-B7F4-E2F8999B8F1B}" dt="2025-07-08T17:38:35.785" v="80" actId="478"/>
-          <ac:grpSpMkLst>
-            <pc:docMk/>
-            <pc:sldMk cId="0" sldId="261"/>
-            <ac:grpSpMk id="32" creationId="{CDCBD715-FA0A-1EFF-1155-521F8DA0A670}"/>
-          </ac:grpSpMkLst>
-        </pc:grpChg>
-        <pc:grpChg chg="del mod">
-          <ac:chgData name="Christopher Aloo" userId="81d139e4-1a74-45bd-a04a-64f94c7d37c9" providerId="ADAL" clId="{8151F9AB-E0AF-4A22-B7F4-E2F8999B8F1B}" dt="2025-07-08T17:38:37.379" v="81" actId="478"/>
-          <ac:grpSpMkLst>
-            <pc:docMk/>
-            <pc:sldMk cId="0" sldId="261"/>
-            <ac:grpSpMk id="33" creationId="{399C693A-6BF5-7DC0-BE25-17D229240353}"/>
-          </ac:grpSpMkLst>
-        </pc:grpChg>
-        <pc:grpChg chg="del mod">
-          <ac:chgData name="Christopher Aloo" userId="81d139e4-1a74-45bd-a04a-64f94c7d37c9" providerId="ADAL" clId="{8151F9AB-E0AF-4A22-B7F4-E2F8999B8F1B}" dt="2025-07-08T17:38:38.485" v="82" actId="478"/>
-          <ac:grpSpMkLst>
-            <pc:docMk/>
-            <pc:sldMk cId="0" sldId="261"/>
-            <ac:grpSpMk id="34" creationId="{26984A5B-CB2B-6845-ECE6-CFEF659977AD}"/>
-          </ac:grpSpMkLst>
-        </pc:grpChg>
-        <pc:grpChg chg="del mod">
-          <ac:chgData name="Christopher Aloo" userId="81d139e4-1a74-45bd-a04a-64f94c7d37c9" providerId="ADAL" clId="{8151F9AB-E0AF-4A22-B7F4-E2F8999B8F1B}" dt="2025-07-08T17:38:42.166" v="83" actId="478"/>
-          <ac:grpSpMkLst>
-            <pc:docMk/>
-            <pc:sldMk cId="0" sldId="261"/>
-            <ac:grpSpMk id="35" creationId="{FB4E1905-1399-03AE-FFE1-74480446DEAD}"/>
-          </ac:grpSpMkLst>
-        </pc:grpChg>
-        <pc:grpChg chg="del mod">
-          <ac:chgData name="Christopher Aloo" userId="81d139e4-1a74-45bd-a04a-64f94c7d37c9" providerId="ADAL" clId="{8151F9AB-E0AF-4A22-B7F4-E2F8999B8F1B}" dt="2025-07-08T17:38:43.102" v="84" actId="478"/>
-          <ac:grpSpMkLst>
-            <pc:docMk/>
-            <pc:sldMk cId="0" sldId="261"/>
-            <ac:grpSpMk id="36" creationId="{260630A0-9BA6-9DF6-A13B-84904A8DB46A}"/>
-          </ac:grpSpMkLst>
-        </pc:grpChg>
-        <pc:grpChg chg="del mod">
-          <ac:chgData name="Christopher Aloo" userId="81d139e4-1a74-45bd-a04a-64f94c7d37c9" providerId="ADAL" clId="{8151F9AB-E0AF-4A22-B7F4-E2F8999B8F1B}" dt="2025-07-08T17:38:44.206" v="85" actId="478"/>
-          <ac:grpSpMkLst>
-            <pc:docMk/>
-            <pc:sldMk cId="0" sldId="261"/>
-            <ac:grpSpMk id="37" creationId="{B389264E-0284-0A76-EB7C-940D85EC7128}"/>
-          </ac:grpSpMkLst>
-        </pc:grpChg>
-        <pc:grpChg chg="del mod">
-          <ac:chgData name="Christopher Aloo" userId="81d139e4-1a74-45bd-a04a-64f94c7d37c9" providerId="ADAL" clId="{8151F9AB-E0AF-4A22-B7F4-E2F8999B8F1B}" dt="2025-07-08T17:38:45.174" v="86" actId="478"/>
-          <ac:grpSpMkLst>
-            <pc:docMk/>
-            <pc:sldMk cId="0" sldId="261"/>
-            <ac:grpSpMk id="38" creationId="{77DF6B3A-9CB6-DDF8-7A92-643635AEB2A6}"/>
-          </ac:grpSpMkLst>
-        </pc:grpChg>
-        <pc:grpChg chg="del mod">
-          <ac:chgData name="Christopher Aloo" userId="81d139e4-1a74-45bd-a04a-64f94c7d37c9" providerId="ADAL" clId="{8151F9AB-E0AF-4A22-B7F4-E2F8999B8F1B}" dt="2025-07-08T17:36:06.614" v="67"/>
-          <ac:grpSpMkLst>
-            <pc:docMk/>
-            <pc:sldMk cId="0" sldId="261"/>
-            <ac:grpSpMk id="42" creationId="{8B085CEE-E9EE-0FD9-44C9-F5CAC8D256F9}"/>
-          </ac:grpSpMkLst>
-        </pc:grpChg>
-        <pc:grpChg chg="del mod">
-          <ac:chgData name="Christopher Aloo" userId="81d139e4-1a74-45bd-a04a-64f94c7d37c9" providerId="ADAL" clId="{8151F9AB-E0AF-4A22-B7F4-E2F8999B8F1B}" dt="2025-07-08T17:36:07.846" v="71"/>
-          <ac:grpSpMkLst>
-            <pc:docMk/>
-            <pc:sldMk cId="0" sldId="261"/>
-            <ac:grpSpMk id="46" creationId="{FCBC09D4-FC32-7C40-495D-08A7A108663F}"/>
-          </ac:grpSpMkLst>
-        </pc:grpChg>
-        <pc:grpChg chg="del mod">
-          <ac:chgData name="Christopher Aloo" userId="81d139e4-1a74-45bd-a04a-64f94c7d37c9" providerId="ADAL" clId="{8151F9AB-E0AF-4A22-B7F4-E2F8999B8F1B}" dt="2025-07-08T17:36:12.340" v="79"/>
-          <ac:grpSpMkLst>
-            <pc:docMk/>
-            <pc:sldMk cId="0" sldId="261"/>
-            <ac:grpSpMk id="50" creationId="{D4A22E11-33AA-0016-1981-37D6D5E5FC05}"/>
-          </ac:grpSpMkLst>
-        </pc:grpChg>
-        <pc:grpChg chg="del mod">
-          <ac:chgData name="Christopher Aloo" userId="81d139e4-1a74-45bd-a04a-64f94c7d37c9" providerId="ADAL" clId="{8151F9AB-E0AF-4A22-B7F4-E2F8999B8F1B}" dt="2025-07-08T17:38:46.346" v="87" actId="478"/>
-          <ac:grpSpMkLst>
-            <pc:docMk/>
-            <pc:sldMk cId="0" sldId="261"/>
-            <ac:grpSpMk id="58" creationId="{F3699015-36FD-7717-2B39-9351AAC03853}"/>
           </ac:grpSpMkLst>
         </pc:grpChg>
         <pc:inkChg chg="add mod">
@@ -516,326 +395,6 @@
             <ac:inkMk id="5" creationId="{8B42FFCC-B561-37DE-1BAC-351CB705F36F}"/>
           </ac:inkMkLst>
         </pc:inkChg>
-        <pc:inkChg chg="del">
-          <ac:chgData name="Christopher Aloo" userId="81d139e4-1a74-45bd-a04a-64f94c7d37c9" providerId="ADAL" clId="{8151F9AB-E0AF-4A22-B7F4-E2F8999B8F1B}" dt="2025-07-08T17:22:25.120" v="4" actId="478"/>
-          <ac:inkMkLst>
-            <pc:docMk/>
-            <pc:sldMk cId="0" sldId="261"/>
-            <ac:inkMk id="7" creationId="{C9EA48E1-32DF-91CE-D55C-9B697CCC870F}"/>
-          </ac:inkMkLst>
-        </pc:inkChg>
-        <pc:inkChg chg="add">
-          <ac:chgData name="Christopher Aloo" userId="81d139e4-1a74-45bd-a04a-64f94c7d37c9" providerId="ADAL" clId="{8151F9AB-E0AF-4A22-B7F4-E2F8999B8F1B}" dt="2025-07-08T17:35:44.608" v="36" actId="9405"/>
-          <ac:inkMkLst>
-            <pc:docMk/>
-            <pc:sldMk cId="0" sldId="261"/>
-            <ac:inkMk id="9" creationId="{D642260B-8EC5-83BD-3C55-67C91116B800}"/>
-          </ac:inkMkLst>
-        </pc:inkChg>
-        <pc:inkChg chg="add">
-          <ac:chgData name="Christopher Aloo" userId="81d139e4-1a74-45bd-a04a-64f94c7d37c9" providerId="ADAL" clId="{8151F9AB-E0AF-4A22-B7F4-E2F8999B8F1B}" dt="2025-07-08T17:35:44.922" v="37" actId="9405"/>
-          <ac:inkMkLst>
-            <pc:docMk/>
-            <pc:sldMk cId="0" sldId="261"/>
-            <ac:inkMk id="10" creationId="{D0262738-1B8E-4952-99D9-0AF28CCE5E5F}"/>
-          </ac:inkMkLst>
-        </pc:inkChg>
-        <pc:inkChg chg="add mod">
-          <ac:chgData name="Christopher Aloo" userId="81d139e4-1a74-45bd-a04a-64f94c7d37c9" providerId="ADAL" clId="{8151F9AB-E0AF-4A22-B7F4-E2F8999B8F1B}" dt="2025-07-08T17:35:56.071" v="59"/>
-          <ac:inkMkLst>
-            <pc:docMk/>
-            <pc:sldMk cId="0" sldId="261"/>
-            <ac:inkMk id="11" creationId="{56D1358D-A99F-117A-A474-6F87940214E9}"/>
-          </ac:inkMkLst>
-        </pc:inkChg>
-        <pc:inkChg chg="add">
-          <ac:chgData name="Christopher Aloo" userId="81d139e4-1a74-45bd-a04a-64f94c7d37c9" providerId="ADAL" clId="{8151F9AB-E0AF-4A22-B7F4-E2F8999B8F1B}" dt="2025-07-08T17:35:46.121" v="39" actId="9405"/>
-          <ac:inkMkLst>
-            <pc:docMk/>
-            <pc:sldMk cId="0" sldId="261"/>
-            <ac:inkMk id="12" creationId="{B37E62B3-D20C-FE4A-E8BA-4A51289D97FD}"/>
-          </ac:inkMkLst>
-        </pc:inkChg>
-        <pc:inkChg chg="add">
-          <ac:chgData name="Christopher Aloo" userId="81d139e4-1a74-45bd-a04a-64f94c7d37c9" providerId="ADAL" clId="{8151F9AB-E0AF-4A22-B7F4-E2F8999B8F1B}" dt="2025-07-08T17:35:46.383" v="40" actId="9405"/>
-          <ac:inkMkLst>
-            <pc:docMk/>
-            <pc:sldMk cId="0" sldId="261"/>
-            <ac:inkMk id="13" creationId="{D0B2A3E1-048E-1416-BBF4-C2FCD35C709C}"/>
-          </ac:inkMkLst>
-        </pc:inkChg>
-        <pc:inkChg chg="add">
-          <ac:chgData name="Christopher Aloo" userId="81d139e4-1a74-45bd-a04a-64f94c7d37c9" providerId="ADAL" clId="{8151F9AB-E0AF-4A22-B7F4-E2F8999B8F1B}" dt="2025-07-08T17:35:46.881" v="41" actId="9405"/>
-          <ac:inkMkLst>
-            <pc:docMk/>
-            <pc:sldMk cId="0" sldId="261"/>
-            <ac:inkMk id="14" creationId="{AAD3B814-90BA-D76B-1AE1-71C6BDD10CCE}"/>
-          </ac:inkMkLst>
-        </pc:inkChg>
-        <pc:inkChg chg="add">
-          <ac:chgData name="Christopher Aloo" userId="81d139e4-1a74-45bd-a04a-64f94c7d37c9" providerId="ADAL" clId="{8151F9AB-E0AF-4A22-B7F4-E2F8999B8F1B}" dt="2025-07-08T17:35:47.401" v="42" actId="9405"/>
-          <ac:inkMkLst>
-            <pc:docMk/>
-            <pc:sldMk cId="0" sldId="261"/>
-            <ac:inkMk id="15" creationId="{95555729-F840-B876-4AC5-02AC6AE23683}"/>
-          </ac:inkMkLst>
-        </pc:inkChg>
-        <pc:inkChg chg="add">
-          <ac:chgData name="Christopher Aloo" userId="81d139e4-1a74-45bd-a04a-64f94c7d37c9" providerId="ADAL" clId="{8151F9AB-E0AF-4A22-B7F4-E2F8999B8F1B}" dt="2025-07-08T17:35:47.634" v="43" actId="9405"/>
-          <ac:inkMkLst>
-            <pc:docMk/>
-            <pc:sldMk cId="0" sldId="261"/>
-            <ac:inkMk id="16" creationId="{41CF0A0F-503F-C335-CCE0-A8674E927046}"/>
-          </ac:inkMkLst>
-        </pc:inkChg>
-        <pc:inkChg chg="add">
-          <ac:chgData name="Christopher Aloo" userId="81d139e4-1a74-45bd-a04a-64f94c7d37c9" providerId="ADAL" clId="{8151F9AB-E0AF-4A22-B7F4-E2F8999B8F1B}" dt="2025-07-08T17:35:48.225" v="44" actId="9405"/>
-          <ac:inkMkLst>
-            <pc:docMk/>
-            <pc:sldMk cId="0" sldId="261"/>
-            <ac:inkMk id="17" creationId="{AE0D5C32-9FA6-3099-AF87-CA4DBEDB5158}"/>
-          </ac:inkMkLst>
-        </pc:inkChg>
-        <pc:inkChg chg="add">
-          <ac:chgData name="Christopher Aloo" userId="81d139e4-1a74-45bd-a04a-64f94c7d37c9" providerId="ADAL" clId="{8151F9AB-E0AF-4A22-B7F4-E2F8999B8F1B}" dt="2025-07-08T17:35:48.958" v="45" actId="9405"/>
-          <ac:inkMkLst>
-            <pc:docMk/>
-            <pc:sldMk cId="0" sldId="261"/>
-            <ac:inkMk id="18" creationId="{43D6D65C-7EFA-CB7B-271C-5475DC341D15}"/>
-          </ac:inkMkLst>
-        </pc:inkChg>
-        <pc:inkChg chg="add">
-          <ac:chgData name="Christopher Aloo" userId="81d139e4-1a74-45bd-a04a-64f94c7d37c9" providerId="ADAL" clId="{8151F9AB-E0AF-4A22-B7F4-E2F8999B8F1B}" dt="2025-07-08T17:35:49.200" v="46" actId="9405"/>
-          <ac:inkMkLst>
-            <pc:docMk/>
-            <pc:sldMk cId="0" sldId="261"/>
-            <ac:inkMk id="19" creationId="{ED718221-71C2-30E5-50AA-1E98C554EA15}"/>
-          </ac:inkMkLst>
-        </pc:inkChg>
-        <pc:inkChg chg="add">
-          <ac:chgData name="Christopher Aloo" userId="81d139e4-1a74-45bd-a04a-64f94c7d37c9" providerId="ADAL" clId="{8151F9AB-E0AF-4A22-B7F4-E2F8999B8F1B}" dt="2025-07-08T17:35:49.655" v="47" actId="9405"/>
-          <ac:inkMkLst>
-            <pc:docMk/>
-            <pc:sldMk cId="0" sldId="261"/>
-            <ac:inkMk id="20" creationId="{DBA3BB0E-131F-B8AB-65BC-F15ED2924305}"/>
-          </ac:inkMkLst>
-        </pc:inkChg>
-        <pc:inkChg chg="add mod">
-          <ac:chgData name="Christopher Aloo" userId="81d139e4-1a74-45bd-a04a-64f94c7d37c9" providerId="ADAL" clId="{8151F9AB-E0AF-4A22-B7F4-E2F8999B8F1B}" dt="2025-07-08T17:35:56.071" v="59"/>
-          <ac:inkMkLst>
-            <pc:docMk/>
-            <pc:sldMk cId="0" sldId="261"/>
-            <ac:inkMk id="21" creationId="{F6613407-32EF-CEAD-AA60-4B6A9373CDE7}"/>
-          </ac:inkMkLst>
-        </pc:inkChg>
-        <pc:inkChg chg="add">
-          <ac:chgData name="Christopher Aloo" userId="81d139e4-1a74-45bd-a04a-64f94c7d37c9" providerId="ADAL" clId="{8151F9AB-E0AF-4A22-B7F4-E2F8999B8F1B}" dt="2025-07-08T17:35:50.546" v="49" actId="9405"/>
-          <ac:inkMkLst>
-            <pc:docMk/>
-            <pc:sldMk cId="0" sldId="261"/>
-            <ac:inkMk id="22" creationId="{45083359-9AEA-E387-3212-BF22E64F05A0}"/>
-          </ac:inkMkLst>
-        </pc:inkChg>
-        <pc:inkChg chg="add">
-          <ac:chgData name="Christopher Aloo" userId="81d139e4-1a74-45bd-a04a-64f94c7d37c9" providerId="ADAL" clId="{8151F9AB-E0AF-4A22-B7F4-E2F8999B8F1B}" dt="2025-07-08T17:35:50.926" v="50" actId="9405"/>
-          <ac:inkMkLst>
-            <pc:docMk/>
-            <pc:sldMk cId="0" sldId="261"/>
-            <ac:inkMk id="23" creationId="{7593678E-98CA-7C84-70E4-84349BD40EEC}"/>
-          </ac:inkMkLst>
-        </pc:inkChg>
-        <pc:inkChg chg="add">
-          <ac:chgData name="Christopher Aloo" userId="81d139e4-1a74-45bd-a04a-64f94c7d37c9" providerId="ADAL" clId="{8151F9AB-E0AF-4A22-B7F4-E2F8999B8F1B}" dt="2025-07-08T17:35:51.227" v="51" actId="9405"/>
-          <ac:inkMkLst>
-            <pc:docMk/>
-            <pc:sldMk cId="0" sldId="261"/>
-            <ac:inkMk id="24" creationId="{7ABCB816-6978-FC90-5067-EA47B0A958FF}"/>
-          </ac:inkMkLst>
-        </pc:inkChg>
-        <pc:inkChg chg="add">
-          <ac:chgData name="Christopher Aloo" userId="81d139e4-1a74-45bd-a04a-64f94c7d37c9" providerId="ADAL" clId="{8151F9AB-E0AF-4A22-B7F4-E2F8999B8F1B}" dt="2025-07-08T17:35:51.632" v="52" actId="9405"/>
-          <ac:inkMkLst>
-            <pc:docMk/>
-            <pc:sldMk cId="0" sldId="261"/>
-            <ac:inkMk id="25" creationId="{A10FECDD-20D5-44CE-DE1E-8182D0EE0A42}"/>
-          </ac:inkMkLst>
-        </pc:inkChg>
-        <pc:inkChg chg="add">
-          <ac:chgData name="Christopher Aloo" userId="81d139e4-1a74-45bd-a04a-64f94c7d37c9" providerId="ADAL" clId="{8151F9AB-E0AF-4A22-B7F4-E2F8999B8F1B}" dt="2025-07-08T17:35:51.908" v="53" actId="9405"/>
-          <ac:inkMkLst>
-            <pc:docMk/>
-            <pc:sldMk cId="0" sldId="261"/>
-            <ac:inkMk id="26" creationId="{93C79694-535B-3295-7B2D-D67B44770600}"/>
-          </ac:inkMkLst>
-        </pc:inkChg>
-        <pc:inkChg chg="add">
-          <ac:chgData name="Christopher Aloo" userId="81d139e4-1a74-45bd-a04a-64f94c7d37c9" providerId="ADAL" clId="{8151F9AB-E0AF-4A22-B7F4-E2F8999B8F1B}" dt="2025-07-08T17:35:52.673" v="54" actId="9405"/>
-          <ac:inkMkLst>
-            <pc:docMk/>
-            <pc:sldMk cId="0" sldId="261"/>
-            <ac:inkMk id="27" creationId="{27366749-2258-0113-298D-EE87308F6A3C}"/>
-          </ac:inkMkLst>
-        </pc:inkChg>
-        <pc:inkChg chg="add">
-          <ac:chgData name="Christopher Aloo" userId="81d139e4-1a74-45bd-a04a-64f94c7d37c9" providerId="ADAL" clId="{8151F9AB-E0AF-4A22-B7F4-E2F8999B8F1B}" dt="2025-07-08T17:35:53.597" v="55" actId="9405"/>
-          <ac:inkMkLst>
-            <pc:docMk/>
-            <pc:sldMk cId="0" sldId="261"/>
-            <ac:inkMk id="28" creationId="{2A131533-6D8E-2D89-950B-7C16182CCAD5}"/>
-          </ac:inkMkLst>
-        </pc:inkChg>
-        <pc:inkChg chg="add mod">
-          <ac:chgData name="Christopher Aloo" userId="81d139e4-1a74-45bd-a04a-64f94c7d37c9" providerId="ADAL" clId="{8151F9AB-E0AF-4A22-B7F4-E2F8999B8F1B}" dt="2025-07-08T17:35:56.071" v="59"/>
-          <ac:inkMkLst>
-            <pc:docMk/>
-            <pc:sldMk cId="0" sldId="261"/>
-            <ac:inkMk id="29" creationId="{5AD1356E-E894-F399-37D8-3179E666B718}"/>
-          </ac:inkMkLst>
-        </pc:inkChg>
-        <pc:inkChg chg="add">
-          <ac:chgData name="Christopher Aloo" userId="81d139e4-1a74-45bd-a04a-64f94c7d37c9" providerId="ADAL" clId="{8151F9AB-E0AF-4A22-B7F4-E2F8999B8F1B}" dt="2025-07-08T17:35:54.217" v="57" actId="9405"/>
-          <ac:inkMkLst>
-            <pc:docMk/>
-            <pc:sldMk cId="0" sldId="261"/>
-            <ac:inkMk id="30" creationId="{6E0A43EB-B083-52B4-60B2-42CEAB0C1ACA}"/>
-          </ac:inkMkLst>
-        </pc:inkChg>
-        <pc:inkChg chg="add">
-          <ac:chgData name="Christopher Aloo" userId="81d139e4-1a74-45bd-a04a-64f94c7d37c9" providerId="ADAL" clId="{8151F9AB-E0AF-4A22-B7F4-E2F8999B8F1B}" dt="2025-07-08T17:35:55.302" v="58" actId="9405"/>
-          <ac:inkMkLst>
-            <pc:docMk/>
-            <pc:sldMk cId="0" sldId="261"/>
-            <ac:inkMk id="31" creationId="{151B817D-E5A9-634F-05B8-8FF85AE6147D}"/>
-          </ac:inkMkLst>
-        </pc:inkChg>
-        <pc:inkChg chg="add mod">
-          <ac:chgData name="Christopher Aloo" userId="81d139e4-1a74-45bd-a04a-64f94c7d37c9" providerId="ADAL" clId="{8151F9AB-E0AF-4A22-B7F4-E2F8999B8F1B}" dt="2025-07-08T17:36:12.340" v="79"/>
-          <ac:inkMkLst>
-            <pc:docMk/>
-            <pc:sldMk cId="0" sldId="261"/>
-            <ac:inkMk id="39" creationId="{799E9696-7292-1E4E-6665-1D1A280A9078}"/>
-          </ac:inkMkLst>
-        </pc:inkChg>
-        <pc:inkChg chg="add mod">
-          <ac:chgData name="Christopher Aloo" userId="81d139e4-1a74-45bd-a04a-64f94c7d37c9" providerId="ADAL" clId="{8151F9AB-E0AF-4A22-B7F4-E2F8999B8F1B}" dt="2025-07-08T17:36:07.846" v="71"/>
-          <ac:inkMkLst>
-            <pc:docMk/>
-            <pc:sldMk cId="0" sldId="261"/>
-            <ac:inkMk id="40" creationId="{56847258-8B26-3A6C-1F61-E8BEFBCD43DC}"/>
-          </ac:inkMkLst>
-        </pc:inkChg>
-        <pc:inkChg chg="add mod">
-          <ac:chgData name="Christopher Aloo" userId="81d139e4-1a74-45bd-a04a-64f94c7d37c9" providerId="ADAL" clId="{8151F9AB-E0AF-4A22-B7F4-E2F8999B8F1B}" dt="2025-07-08T17:36:12.340" v="79"/>
-          <ac:inkMkLst>
-            <pc:docMk/>
-            <pc:sldMk cId="0" sldId="261"/>
-            <ac:inkMk id="41" creationId="{2D2B5820-FA4C-2AF5-C52B-CDA5E8F318B6}"/>
-          </ac:inkMkLst>
-        </pc:inkChg>
-        <pc:inkChg chg="add mod">
-          <ac:chgData name="Christopher Aloo" userId="81d139e4-1a74-45bd-a04a-64f94c7d37c9" providerId="ADAL" clId="{8151F9AB-E0AF-4A22-B7F4-E2F8999B8F1B}" dt="2025-07-08T17:36:12.340" v="79"/>
-          <ac:inkMkLst>
-            <pc:docMk/>
-            <pc:sldMk cId="0" sldId="261"/>
-            <ac:inkMk id="43" creationId="{47331955-9A54-F79E-0BB0-452E5B2C9258}"/>
-          </ac:inkMkLst>
-        </pc:inkChg>
-        <pc:inkChg chg="add mod">
-          <ac:chgData name="Christopher Aloo" userId="81d139e4-1a74-45bd-a04a-64f94c7d37c9" providerId="ADAL" clId="{8151F9AB-E0AF-4A22-B7F4-E2F8999B8F1B}" dt="2025-07-08T17:36:07.846" v="71"/>
-          <ac:inkMkLst>
-            <pc:docMk/>
-            <pc:sldMk cId="0" sldId="261"/>
-            <ac:inkMk id="44" creationId="{314BA927-E51C-58E0-70AD-3EBC4D3597E0}"/>
-          </ac:inkMkLst>
-        </pc:inkChg>
-        <pc:inkChg chg="add mod">
-          <ac:chgData name="Christopher Aloo" userId="81d139e4-1a74-45bd-a04a-64f94c7d37c9" providerId="ADAL" clId="{8151F9AB-E0AF-4A22-B7F4-E2F8999B8F1B}" dt="2025-07-08T17:36:12.340" v="79"/>
-          <ac:inkMkLst>
-            <pc:docMk/>
-            <pc:sldMk cId="0" sldId="261"/>
-            <ac:inkMk id="45" creationId="{68D0D6E6-305E-D502-6419-887BC3B6CED7}"/>
-          </ac:inkMkLst>
-        </pc:inkChg>
-        <pc:inkChg chg="add mod">
-          <ac:chgData name="Christopher Aloo" userId="81d139e4-1a74-45bd-a04a-64f94c7d37c9" providerId="ADAL" clId="{8151F9AB-E0AF-4A22-B7F4-E2F8999B8F1B}" dt="2025-07-08T17:36:07.846" v="71"/>
-          <ac:inkMkLst>
-            <pc:docMk/>
-            <pc:sldMk cId="0" sldId="261"/>
-            <ac:inkMk id="47" creationId="{E8210F7B-A2E7-73B9-8EDB-6CC2230DBCF1}"/>
-          </ac:inkMkLst>
-        </pc:inkChg>
-        <pc:inkChg chg="add mod">
-          <ac:chgData name="Christopher Aloo" userId="81d139e4-1a74-45bd-a04a-64f94c7d37c9" providerId="ADAL" clId="{8151F9AB-E0AF-4A22-B7F4-E2F8999B8F1B}" dt="2025-07-08T17:36:07.846" v="71"/>
-          <ac:inkMkLst>
-            <pc:docMk/>
-            <pc:sldMk cId="0" sldId="261"/>
-            <ac:inkMk id="48" creationId="{3E90FD16-F905-11DB-300B-7D6439B933D4}"/>
-          </ac:inkMkLst>
-        </pc:inkChg>
-        <pc:inkChg chg="add mod">
-          <ac:chgData name="Christopher Aloo" userId="81d139e4-1a74-45bd-a04a-64f94c7d37c9" providerId="ADAL" clId="{8151F9AB-E0AF-4A22-B7F4-E2F8999B8F1B}" dt="2025-07-08T17:36:07.846" v="71"/>
-          <ac:inkMkLst>
-            <pc:docMk/>
-            <pc:sldMk cId="0" sldId="261"/>
-            <ac:inkMk id="49" creationId="{DB3AB6D1-B83F-E1CD-0109-F4BD781E9D35}"/>
-          </ac:inkMkLst>
-        </pc:inkChg>
-        <pc:inkChg chg="add">
-          <ac:chgData name="Christopher Aloo" userId="81d139e4-1a74-45bd-a04a-64f94c7d37c9" providerId="ADAL" clId="{8151F9AB-E0AF-4A22-B7F4-E2F8999B8F1B}" dt="2025-07-08T17:36:08.315" v="72" actId="9405"/>
-          <ac:inkMkLst>
-            <pc:docMk/>
-            <pc:sldMk cId="0" sldId="261"/>
-            <ac:inkMk id="51" creationId="{8FCC7E50-7F4B-6CF8-9232-BAE49E8D1A1E}"/>
-          </ac:inkMkLst>
-        </pc:inkChg>
-        <pc:inkChg chg="add">
-          <ac:chgData name="Christopher Aloo" userId="81d139e4-1a74-45bd-a04a-64f94c7d37c9" providerId="ADAL" clId="{8151F9AB-E0AF-4A22-B7F4-E2F8999B8F1B}" dt="2025-07-08T17:36:08.575" v="73" actId="9405"/>
-          <ac:inkMkLst>
-            <pc:docMk/>
-            <pc:sldMk cId="0" sldId="261"/>
-            <ac:inkMk id="52" creationId="{1C597A72-81D2-B1B9-E730-D7B8B8F98142}"/>
-          </ac:inkMkLst>
-        </pc:inkChg>
-        <pc:inkChg chg="add mod">
-          <ac:chgData name="Christopher Aloo" userId="81d139e4-1a74-45bd-a04a-64f94c7d37c9" providerId="ADAL" clId="{8151F9AB-E0AF-4A22-B7F4-E2F8999B8F1B}" dt="2025-07-08T17:36:12.340" v="79"/>
-          <ac:inkMkLst>
-            <pc:docMk/>
-            <pc:sldMk cId="0" sldId="261"/>
-            <ac:inkMk id="53" creationId="{354B7F9E-C110-CB45-5B4E-AFABC68C7B27}"/>
-          </ac:inkMkLst>
-        </pc:inkChg>
-        <pc:inkChg chg="add mod">
-          <ac:chgData name="Christopher Aloo" userId="81d139e4-1a74-45bd-a04a-64f94c7d37c9" providerId="ADAL" clId="{8151F9AB-E0AF-4A22-B7F4-E2F8999B8F1B}" dt="2025-07-08T17:36:12.340" v="79"/>
-          <ac:inkMkLst>
-            <pc:docMk/>
-            <pc:sldMk cId="0" sldId="261"/>
-            <ac:inkMk id="54" creationId="{F9425B8A-2130-E738-22FF-469A15C5E2BF}"/>
-          </ac:inkMkLst>
-        </pc:inkChg>
-        <pc:inkChg chg="add mod">
-          <ac:chgData name="Christopher Aloo" userId="81d139e4-1a74-45bd-a04a-64f94c7d37c9" providerId="ADAL" clId="{8151F9AB-E0AF-4A22-B7F4-E2F8999B8F1B}" dt="2025-07-08T17:36:12.340" v="79"/>
-          <ac:inkMkLst>
-            <pc:docMk/>
-            <pc:sldMk cId="0" sldId="261"/>
-            <ac:inkMk id="55" creationId="{315C4A4A-0ACE-CE77-CC00-B516AD5E8A7A}"/>
-          </ac:inkMkLst>
-        </pc:inkChg>
-        <pc:inkChg chg="add">
-          <ac:chgData name="Christopher Aloo" userId="81d139e4-1a74-45bd-a04a-64f94c7d37c9" providerId="ADAL" clId="{8151F9AB-E0AF-4A22-B7F4-E2F8999B8F1B}" dt="2025-07-08T17:36:10.244" v="77" actId="9405"/>
-          <ac:inkMkLst>
-            <pc:docMk/>
-            <pc:sldMk cId="0" sldId="261"/>
-            <ac:inkMk id="56" creationId="{0C8D5F30-A279-3DFD-BAFF-87AB02B9C3F4}"/>
-          </ac:inkMkLst>
-        </pc:inkChg>
-        <pc:inkChg chg="add mod">
-          <ac:chgData name="Christopher Aloo" userId="81d139e4-1a74-45bd-a04a-64f94c7d37c9" providerId="ADAL" clId="{8151F9AB-E0AF-4A22-B7F4-E2F8999B8F1B}" dt="2025-07-08T17:36:12.340" v="79"/>
-          <ac:inkMkLst>
-            <pc:docMk/>
-            <pc:sldMk cId="0" sldId="261"/>
-            <ac:inkMk id="57" creationId="{33A0C833-F254-4B89-331D-52147B4841EB}"/>
-          </ac:inkMkLst>
-        </pc:inkChg>
       </pc:sldChg>
       <pc:sldChg chg="delSp mod">
         <pc:chgData name="Christopher Aloo" userId="81d139e4-1a74-45bd-a04a-64f94c7d37c9" providerId="ADAL" clId="{8151F9AB-E0AF-4A22-B7F4-E2F8999B8F1B}" dt="2025-07-08T17:22:27.523" v="5" actId="478"/>
@@ -843,14 +402,6 @@
           <pc:docMk/>
           <pc:sldMk cId="0" sldId="263"/>
         </pc:sldMkLst>
-        <pc:inkChg chg="del">
-          <ac:chgData name="Christopher Aloo" userId="81d139e4-1a74-45bd-a04a-64f94c7d37c9" providerId="ADAL" clId="{8151F9AB-E0AF-4A22-B7F4-E2F8999B8F1B}" dt="2025-07-08T17:22:27.523" v="5" actId="478"/>
-          <ac:inkMkLst>
-            <pc:docMk/>
-            <pc:sldMk cId="0" sldId="263"/>
-            <ac:inkMk id="2" creationId="{AA3CD281-7DE9-8D10-EEB8-1287AABCE6B0}"/>
-          </ac:inkMkLst>
-        </pc:inkChg>
       </pc:sldChg>
       <pc:sldChg chg="addSp delSp modSp mod">
         <pc:chgData name="Christopher Aloo" userId="81d139e4-1a74-45bd-a04a-64f94c7d37c9" providerId="ADAL" clId="{8151F9AB-E0AF-4A22-B7F4-E2F8999B8F1B}" dt="2025-07-09T04:35:25.939" v="533" actId="478"/>
@@ -858,110 +409,6 @@
           <pc:docMk/>
           <pc:sldMk cId="0" sldId="265"/>
         </pc:sldMkLst>
-        <pc:grpChg chg="del mod">
-          <ac:chgData name="Christopher Aloo" userId="81d139e4-1a74-45bd-a04a-64f94c7d37c9" providerId="ADAL" clId="{8151F9AB-E0AF-4A22-B7F4-E2F8999B8F1B}" dt="2025-07-08T17:55:19.245" v="94"/>
-          <ac:grpSpMkLst>
-            <pc:docMk/>
-            <pc:sldMk cId="0" sldId="265"/>
-            <ac:grpSpMk id="5" creationId="{DE86A969-EC0F-4855-36E7-7D89204E5EDD}"/>
-          </ac:grpSpMkLst>
-        </pc:grpChg>
-        <pc:grpChg chg="del mod">
-          <ac:chgData name="Christopher Aloo" userId="81d139e4-1a74-45bd-a04a-64f94c7d37c9" providerId="ADAL" clId="{8151F9AB-E0AF-4A22-B7F4-E2F8999B8F1B}" dt="2025-07-08T17:55:24.318" v="99"/>
-          <ac:grpSpMkLst>
-            <pc:docMk/>
-            <pc:sldMk cId="0" sldId="265"/>
-            <ac:grpSpMk id="9" creationId="{A0779655-A355-9751-947F-A7D70509887F}"/>
-          </ac:grpSpMkLst>
-        </pc:grpChg>
-        <pc:grpChg chg="del mod">
-          <ac:chgData name="Christopher Aloo" userId="81d139e4-1a74-45bd-a04a-64f94c7d37c9" providerId="ADAL" clId="{8151F9AB-E0AF-4A22-B7F4-E2F8999B8F1B}" dt="2025-07-09T04:35:25.939" v="533" actId="478"/>
-          <ac:grpSpMkLst>
-            <pc:docMk/>
-            <pc:sldMk cId="0" sldId="265"/>
-            <ac:grpSpMk id="14" creationId="{64B140E6-DD14-8027-868A-AE9A8848B262}"/>
-          </ac:grpSpMkLst>
-        </pc:grpChg>
-        <pc:inkChg chg="del">
-          <ac:chgData name="Christopher Aloo" userId="81d139e4-1a74-45bd-a04a-64f94c7d37c9" providerId="ADAL" clId="{8151F9AB-E0AF-4A22-B7F4-E2F8999B8F1B}" dt="2025-07-08T17:22:35.987" v="6" actId="478"/>
-          <ac:inkMkLst>
-            <pc:docMk/>
-            <pc:sldMk cId="0" sldId="265"/>
-            <ac:inkMk id="2" creationId="{922BC5FD-27D7-B4E6-14A9-16D75268861C}"/>
-          </ac:inkMkLst>
-        </pc:inkChg>
-        <pc:inkChg chg="add mod">
-          <ac:chgData name="Christopher Aloo" userId="81d139e4-1a74-45bd-a04a-64f94c7d37c9" providerId="ADAL" clId="{8151F9AB-E0AF-4A22-B7F4-E2F8999B8F1B}" dt="2025-07-08T17:55:24.318" v="99"/>
-          <ac:inkMkLst>
-            <pc:docMk/>
-            <pc:sldMk cId="0" sldId="265"/>
-            <ac:inkMk id="3" creationId="{0E71CCDF-9A90-65C4-B740-8F08160BB77A}"/>
-          </ac:inkMkLst>
-        </pc:inkChg>
-        <pc:inkChg chg="add mod">
-          <ac:chgData name="Christopher Aloo" userId="81d139e4-1a74-45bd-a04a-64f94c7d37c9" providerId="ADAL" clId="{8151F9AB-E0AF-4A22-B7F4-E2F8999B8F1B}" dt="2025-07-08T17:55:24.318" v="99"/>
-          <ac:inkMkLst>
-            <pc:docMk/>
-            <pc:sldMk cId="0" sldId="265"/>
-            <ac:inkMk id="4" creationId="{4D912657-041A-8338-1539-558A33F88778}"/>
-          </ac:inkMkLst>
-        </pc:inkChg>
-        <pc:inkChg chg="add mod">
-          <ac:chgData name="Christopher Aloo" userId="81d139e4-1a74-45bd-a04a-64f94c7d37c9" providerId="ADAL" clId="{8151F9AB-E0AF-4A22-B7F4-E2F8999B8F1B}" dt="2025-07-08T17:55:24.318" v="99"/>
-          <ac:inkMkLst>
-            <pc:docMk/>
-            <pc:sldMk cId="0" sldId="265"/>
-            <ac:inkMk id="6" creationId="{B622593F-2229-1BDE-F068-DC877182608F}"/>
-          </ac:inkMkLst>
-        </pc:inkChg>
-        <pc:inkChg chg="add del mod">
-          <ac:chgData name="Christopher Aloo" userId="81d139e4-1a74-45bd-a04a-64f94c7d37c9" providerId="ADAL" clId="{8151F9AB-E0AF-4A22-B7F4-E2F8999B8F1B}" dt="2025-07-08T17:56:02.644" v="103" actId="478"/>
-          <ac:inkMkLst>
-            <pc:docMk/>
-            <pc:sldMk cId="0" sldId="265"/>
-            <ac:inkMk id="7" creationId="{1F0E5361-756E-B42C-D865-3B3796F59CA1}"/>
-          </ac:inkMkLst>
-        </pc:inkChg>
-        <pc:inkChg chg="add del mod">
-          <ac:chgData name="Christopher Aloo" userId="81d139e4-1a74-45bd-a04a-64f94c7d37c9" providerId="ADAL" clId="{8151F9AB-E0AF-4A22-B7F4-E2F8999B8F1B}" dt="2025-07-08T17:55:59.354" v="102" actId="478"/>
-          <ac:inkMkLst>
-            <pc:docMk/>
-            <pc:sldMk cId="0" sldId="265"/>
-            <ac:inkMk id="8" creationId="{65AC6A31-F07C-2CC6-A219-CC930588A24E}"/>
-          </ac:inkMkLst>
-        </pc:inkChg>
-        <pc:inkChg chg="add mod">
-          <ac:chgData name="Christopher Aloo" userId="81d139e4-1a74-45bd-a04a-64f94c7d37c9" providerId="ADAL" clId="{8151F9AB-E0AF-4A22-B7F4-E2F8999B8F1B}" dt="2025-07-08T17:55:24.318" v="99"/>
-          <ac:inkMkLst>
-            <pc:docMk/>
-            <pc:sldMk cId="0" sldId="265"/>
-            <ac:inkMk id="10" creationId="{B84346C8-F033-E7F1-71DF-A84E59289B5A}"/>
-          </ac:inkMkLst>
-        </pc:inkChg>
-        <pc:inkChg chg="add del mod">
-          <ac:chgData name="Christopher Aloo" userId="81d139e4-1a74-45bd-a04a-64f94c7d37c9" providerId="ADAL" clId="{8151F9AB-E0AF-4A22-B7F4-E2F8999B8F1B}" dt="2025-07-08T17:55:49.450" v="101" actId="478"/>
-          <ac:inkMkLst>
-            <pc:docMk/>
-            <pc:sldMk cId="0" sldId="265"/>
-            <ac:inkMk id="11" creationId="{2B942FA9-518B-A54C-0465-D9E5F07BDD39}"/>
-          </ac:inkMkLst>
-        </pc:inkChg>
-        <pc:inkChg chg="add del mod">
-          <ac:chgData name="Christopher Aloo" userId="81d139e4-1a74-45bd-a04a-64f94c7d37c9" providerId="ADAL" clId="{8151F9AB-E0AF-4A22-B7F4-E2F8999B8F1B}" dt="2025-07-08T17:55:47.286" v="100" actId="478"/>
-          <ac:inkMkLst>
-            <pc:docMk/>
-            <pc:sldMk cId="0" sldId="265"/>
-            <ac:inkMk id="12" creationId="{329EADE2-AA42-56B7-787E-07966892F453}"/>
-          </ac:inkMkLst>
-        </pc:inkChg>
-        <pc:inkChg chg="add mod">
-          <ac:chgData name="Christopher Aloo" userId="81d139e4-1a74-45bd-a04a-64f94c7d37c9" providerId="ADAL" clId="{8151F9AB-E0AF-4A22-B7F4-E2F8999B8F1B}" dt="2025-07-08T17:55:24.318" v="99"/>
-          <ac:inkMkLst>
-            <pc:docMk/>
-            <pc:sldMk cId="0" sldId="265"/>
-            <ac:inkMk id="13" creationId="{B1474D4A-1423-3943-98C3-0E988FACD5E5}"/>
-          </ac:inkMkLst>
-        </pc:inkChg>
       </pc:sldChg>
       <pc:sldChg chg="delSp mod">
         <pc:chgData name="Christopher Aloo" userId="81d139e4-1a74-45bd-a04a-64f94c7d37c9" providerId="ADAL" clId="{8151F9AB-E0AF-4A22-B7F4-E2F8999B8F1B}" dt="2025-07-08T17:22:40.252" v="7" actId="478"/>
@@ -969,14 +416,6 @@
           <pc:docMk/>
           <pc:sldMk cId="1250749228" sldId="270"/>
         </pc:sldMkLst>
-        <pc:inkChg chg="del">
-          <ac:chgData name="Christopher Aloo" userId="81d139e4-1a74-45bd-a04a-64f94c7d37c9" providerId="ADAL" clId="{8151F9AB-E0AF-4A22-B7F4-E2F8999B8F1B}" dt="2025-07-08T17:22:40.252" v="7" actId="478"/>
-          <ac:inkMkLst>
-            <pc:docMk/>
-            <pc:sldMk cId="1250749228" sldId="270"/>
-            <ac:inkMk id="2" creationId="{E109300B-E66C-0EC7-358D-F2AEFA72F576}"/>
-          </ac:inkMkLst>
-        </pc:inkChg>
       </pc:sldChg>
       <pc:sldChg chg="delSp mod">
         <pc:chgData name="Christopher Aloo" userId="81d139e4-1a74-45bd-a04a-64f94c7d37c9" providerId="ADAL" clId="{8151F9AB-E0AF-4A22-B7F4-E2F8999B8F1B}" dt="2025-07-08T17:22:42.676" v="8" actId="478"/>
@@ -984,14 +423,6 @@
           <pc:docMk/>
           <pc:sldMk cId="2068144280" sldId="271"/>
         </pc:sldMkLst>
-        <pc:inkChg chg="del">
-          <ac:chgData name="Christopher Aloo" userId="81d139e4-1a74-45bd-a04a-64f94c7d37c9" providerId="ADAL" clId="{8151F9AB-E0AF-4A22-B7F4-E2F8999B8F1B}" dt="2025-07-08T17:22:42.676" v="8" actId="478"/>
-          <ac:inkMkLst>
-            <pc:docMk/>
-            <pc:sldMk cId="2068144280" sldId="271"/>
-            <ac:inkMk id="6" creationId="{91F92495-102E-20FF-EADB-27F1E5E32CE4}"/>
-          </ac:inkMkLst>
-        </pc:inkChg>
       </pc:sldChg>
       <pc:sldChg chg="addSp delSp modSp mod">
         <pc:chgData name="Christopher Aloo" userId="81d139e4-1a74-45bd-a04a-64f94c7d37c9" providerId="ADAL" clId="{8151F9AB-E0AF-4A22-B7F4-E2F8999B8F1B}" dt="2025-07-09T04:23:54.453" v="183" actId="207"/>
@@ -1023,14 +454,6 @@
             <ac:graphicFrameMk id="3" creationId="{9155044C-4ADF-E0EA-CDAE-1277270964F4}"/>
           </ac:graphicFrameMkLst>
         </pc:graphicFrameChg>
-        <pc:inkChg chg="del">
-          <ac:chgData name="Christopher Aloo" userId="81d139e4-1a74-45bd-a04a-64f94c7d37c9" providerId="ADAL" clId="{8151F9AB-E0AF-4A22-B7F4-E2F8999B8F1B}" dt="2025-07-09T04:21:53.358" v="105" actId="478"/>
-          <ac:inkMkLst>
-            <pc:docMk/>
-            <pc:sldMk cId="2656503465" sldId="272"/>
-            <ac:inkMk id="8" creationId="{7C1E1122-5175-FE5A-9BDB-C85A9AD3A2FB}"/>
-          </ac:inkMkLst>
-        </pc:inkChg>
         <pc:cxnChg chg="add">
           <ac:chgData name="Christopher Aloo" userId="81d139e4-1a74-45bd-a04a-64f94c7d37c9" providerId="ADAL" clId="{8151F9AB-E0AF-4A22-B7F4-E2F8999B8F1B}" dt="2025-07-09T04:23:30.423" v="178" actId="11529"/>
           <ac:cxnSpMkLst>
@@ -1085,14 +508,6 @@
             <ac:graphicFrameMk id="4" creationId="{82858EF3-0641-19C3-338B-DC614929E879}"/>
           </ac:graphicFrameMkLst>
         </pc:graphicFrameChg>
-        <pc:inkChg chg="del mod">
-          <ac:chgData name="Christopher Aloo" userId="81d139e4-1a74-45bd-a04a-64f94c7d37c9" providerId="ADAL" clId="{8151F9AB-E0AF-4A22-B7F4-E2F8999B8F1B}" dt="2025-07-09T04:26:38.296" v="262" actId="478"/>
-          <ac:inkMkLst>
-            <pc:docMk/>
-            <pc:sldMk cId="1627362100" sldId="274"/>
-            <ac:inkMk id="2" creationId="{63BF6F60-E8BB-D82A-7700-E55A91F2CEE7}"/>
-          </ac:inkMkLst>
-        </pc:inkChg>
         <pc:cxnChg chg="add mod">
           <ac:chgData name="Christopher Aloo" userId="81d139e4-1a74-45bd-a04a-64f94c7d37c9" providerId="ADAL" clId="{8151F9AB-E0AF-4A22-B7F4-E2F8999B8F1B}" dt="2025-07-09T04:29:17.451" v="412" actId="14100"/>
           <ac:cxnSpMkLst>
@@ -1140,14 +555,6 @@
             <ac:graphicFrameMk id="8" creationId="{0F702E71-73E0-0341-09A2-84234F759470}"/>
           </ac:graphicFrameMkLst>
         </pc:graphicFrameChg>
-        <pc:inkChg chg="del">
-          <ac:chgData name="Christopher Aloo" userId="81d139e4-1a74-45bd-a04a-64f94c7d37c9" providerId="ADAL" clId="{8151F9AB-E0AF-4A22-B7F4-E2F8999B8F1B}" dt="2025-07-09T04:29:37.911" v="415" actId="478"/>
-          <ac:inkMkLst>
-            <pc:docMk/>
-            <pc:sldMk cId="3314516014" sldId="275"/>
-            <ac:inkMk id="2" creationId="{F004A892-2652-CEDF-942E-23C161272540}"/>
-          </ac:inkMkLst>
-        </pc:inkChg>
         <pc:cxnChg chg="add mod">
           <ac:chgData name="Christopher Aloo" userId="81d139e4-1a74-45bd-a04a-64f94c7d37c9" providerId="ADAL" clId="{8151F9AB-E0AF-4A22-B7F4-E2F8999B8F1B}" dt="2025-07-09T04:34:41.746" v="518" actId="14100"/>
           <ac:cxnSpMkLst>
@@ -1171,14 +578,6 @@
           <pc:docMk/>
           <pc:sldMk cId="970380513" sldId="277"/>
         </pc:sldMkLst>
-        <pc:inkChg chg="del">
-          <ac:chgData name="Christopher Aloo" userId="81d139e4-1a74-45bd-a04a-64f94c7d37c9" providerId="ADAL" clId="{8151F9AB-E0AF-4A22-B7F4-E2F8999B8F1B}" dt="2025-07-09T04:35:33.259" v="534" actId="478"/>
-          <ac:inkMkLst>
-            <pc:docMk/>
-            <pc:sldMk cId="970380513" sldId="277"/>
-            <ac:inkMk id="4" creationId="{ADB82E6C-1A8B-DF2D-BC99-079C34AE579C}"/>
-          </ac:inkMkLst>
-        </pc:inkChg>
       </pc:sldChg>
       <pc:sldChg chg="delSp mod">
         <pc:chgData name="Christopher Aloo" userId="81d139e4-1a74-45bd-a04a-64f94c7d37c9" providerId="ADAL" clId="{8151F9AB-E0AF-4A22-B7F4-E2F8999B8F1B}" dt="2025-07-08T17:23:15.490" v="30" actId="478"/>
@@ -1186,14 +585,6 @@
           <pc:docMk/>
           <pc:sldMk cId="3380766645" sldId="285"/>
         </pc:sldMkLst>
-        <pc:inkChg chg="del">
-          <ac:chgData name="Christopher Aloo" userId="81d139e4-1a74-45bd-a04a-64f94c7d37c9" providerId="ADAL" clId="{8151F9AB-E0AF-4A22-B7F4-E2F8999B8F1B}" dt="2025-07-08T17:23:15.490" v="30" actId="478"/>
-          <ac:inkMkLst>
-            <pc:docMk/>
-            <pc:sldMk cId="3380766645" sldId="285"/>
-            <ac:inkMk id="20" creationId="{4B286623-B986-4205-DC75-FE4C2FDA4F06}"/>
-          </ac:inkMkLst>
-        </pc:inkChg>
       </pc:sldChg>
       <pc:sldChg chg="delSp mod modNotesTx">
         <pc:chgData name="Christopher Aloo" userId="81d139e4-1a74-45bd-a04a-64f94c7d37c9" providerId="ADAL" clId="{8151F9AB-E0AF-4A22-B7F4-E2F8999B8F1B}" dt="2025-07-08T17:23:07.659" v="29" actId="20577"/>
@@ -1201,14 +592,6 @@
           <pc:docMk/>
           <pc:sldMk cId="1331522900" sldId="286"/>
         </pc:sldMkLst>
-        <pc:grpChg chg="del">
-          <ac:chgData name="Christopher Aloo" userId="81d139e4-1a74-45bd-a04a-64f94c7d37c9" providerId="ADAL" clId="{8151F9AB-E0AF-4A22-B7F4-E2F8999B8F1B}" dt="2025-07-08T17:23:01.079" v="9" actId="478"/>
-          <ac:grpSpMkLst>
-            <pc:docMk/>
-            <pc:sldMk cId="1331522900" sldId="286"/>
-            <ac:grpSpMk id="44" creationId="{21E55806-28BF-1418-D7A2-0DCD4DF1392E}"/>
-          </ac:grpSpMkLst>
-        </pc:grpChg>
       </pc:sldChg>
       <pc:sldChg chg="delSp mod">
         <pc:chgData name="Christopher Aloo" userId="81d139e4-1a74-45bd-a04a-64f94c7d37c9" providerId="ADAL" clId="{8151F9AB-E0AF-4A22-B7F4-E2F8999B8F1B}" dt="2025-07-08T17:23:25.341" v="32" actId="478"/>
@@ -1216,14 +599,6 @@
           <pc:docMk/>
           <pc:sldMk cId="3590969146" sldId="289"/>
         </pc:sldMkLst>
-        <pc:inkChg chg="del">
-          <ac:chgData name="Christopher Aloo" userId="81d139e4-1a74-45bd-a04a-64f94c7d37c9" providerId="ADAL" clId="{8151F9AB-E0AF-4A22-B7F4-E2F8999B8F1B}" dt="2025-07-08T17:23:25.341" v="32" actId="478"/>
-          <ac:inkMkLst>
-            <pc:docMk/>
-            <pc:sldMk cId="3590969146" sldId="289"/>
-            <ac:inkMk id="2" creationId="{4D633588-4945-C53C-4A9A-EC5E01644323}"/>
-          </ac:inkMkLst>
-        </pc:inkChg>
       </pc:sldChg>
       <pc:sldChg chg="delSp mod">
         <pc:chgData name="Christopher Aloo" userId="81d139e4-1a74-45bd-a04a-64f94c7d37c9" providerId="ADAL" clId="{8151F9AB-E0AF-4A22-B7F4-E2F8999B8F1B}" dt="2025-07-08T17:23:20.663" v="31" actId="478"/>
@@ -1231,14 +606,6 @@
           <pc:docMk/>
           <pc:sldMk cId="2294123042" sldId="290"/>
         </pc:sldMkLst>
-        <pc:inkChg chg="del">
-          <ac:chgData name="Christopher Aloo" userId="81d139e4-1a74-45bd-a04a-64f94c7d37c9" providerId="ADAL" clId="{8151F9AB-E0AF-4A22-B7F4-E2F8999B8F1B}" dt="2025-07-08T17:23:20.663" v="31" actId="478"/>
-          <ac:inkMkLst>
-            <pc:docMk/>
-            <pc:sldMk cId="2294123042" sldId="290"/>
-            <ac:inkMk id="9" creationId="{5C81D522-E94A-C204-965D-5B7AF2AD1EBD}"/>
-          </ac:inkMkLst>
-        </pc:inkChg>
       </pc:sldChg>
       <pc:sldChg chg="add del">
         <pc:chgData name="Christopher Aloo" userId="81d139e4-1a74-45bd-a04a-64f94c7d37c9" providerId="ADAL" clId="{8151F9AB-E0AF-4A22-B7F4-E2F8999B8F1B}" dt="2025-07-09T04:24:01.773" v="184" actId="47"/>
@@ -1277,14 +644,6 @@
             <ac:graphicFrameMk id="4" creationId="{ED1AD406-6814-7213-C787-4D5B25305A09}"/>
           </ac:graphicFrameMkLst>
         </pc:graphicFrameChg>
-        <pc:inkChg chg="del">
-          <ac:chgData name="Christopher Aloo" userId="81d139e4-1a74-45bd-a04a-64f94c7d37c9" providerId="ADAL" clId="{8151F9AB-E0AF-4A22-B7F4-E2F8999B8F1B}" dt="2025-07-09T04:24:10.343" v="186" actId="478"/>
-          <ac:inkMkLst>
-            <pc:docMk/>
-            <pc:sldMk cId="3172714102" sldId="293"/>
-            <ac:inkMk id="2" creationId="{21CB8FD1-84F6-A32B-738D-ADD00C3557EB}"/>
-          </ac:inkMkLst>
-        </pc:inkChg>
         <pc:cxnChg chg="add mod">
           <ac:chgData name="Christopher Aloo" userId="81d139e4-1a74-45bd-a04a-64f94c7d37c9" providerId="ADAL" clId="{8151F9AB-E0AF-4A22-B7F4-E2F8999B8F1B}" dt="2025-07-09T04:25:59.773" v="259" actId="1076"/>
           <ac:cxnSpMkLst>
@@ -1310,40 +669,364 @@
       </pc:sldChg>
     </pc:docChg>
   </pc:docChgLst>
+  <pc:docChgLst>
+    <pc:chgData name="Christopher Aloo" userId="81d139e4-1a74-45bd-a04a-64f94c7d37c9" providerId="ADAL" clId="{3E66C125-C966-4613-A1FE-F812CCBDD351}"/>
+    <pc:docChg chg="custSel delSld modSld">
+      <pc:chgData name="Christopher Aloo" userId="81d139e4-1a74-45bd-a04a-64f94c7d37c9" providerId="ADAL" clId="{3E66C125-C966-4613-A1FE-F812CCBDD351}" dt="2025-08-26T16:21:01.259" v="26"/>
+      <pc:docMkLst>
+        <pc:docMk/>
+      </pc:docMkLst>
+      <pc:sldChg chg="addSp modSp">
+        <pc:chgData name="Christopher Aloo" userId="81d139e4-1a74-45bd-a04a-64f94c7d37c9" providerId="ADAL" clId="{3E66C125-C966-4613-A1FE-F812CCBDD351}" dt="2025-08-26T16:20:29.987" v="5" actId="14100"/>
+        <pc:sldMkLst>
+          <pc:docMk/>
+          <pc:sldMk cId="0" sldId="257"/>
+        </pc:sldMkLst>
+        <pc:picChg chg="add mod">
+          <ac:chgData name="Christopher Aloo" userId="81d139e4-1a74-45bd-a04a-64f94c7d37c9" providerId="ADAL" clId="{3E66C125-C966-4613-A1FE-F812CCBDD351}" dt="2025-08-26T16:20:29.987" v="5" actId="14100"/>
+          <ac:picMkLst>
+            <pc:docMk/>
+            <pc:sldMk cId="0" sldId="257"/>
+            <ac:picMk id="1026" creationId="{029FE07F-D926-44B7-0678-EBEDC7CA8C70}"/>
+          </ac:picMkLst>
+        </pc:picChg>
+      </pc:sldChg>
+      <pc:sldChg chg="addSp modSp">
+        <pc:chgData name="Christopher Aloo" userId="81d139e4-1a74-45bd-a04a-64f94c7d37c9" providerId="ADAL" clId="{3E66C125-C966-4613-A1FE-F812CCBDD351}" dt="2025-08-26T16:20:32.317" v="6"/>
+        <pc:sldMkLst>
+          <pc:docMk/>
+          <pc:sldMk cId="0" sldId="258"/>
+        </pc:sldMkLst>
+        <pc:picChg chg="add mod">
+          <ac:chgData name="Christopher Aloo" userId="81d139e4-1a74-45bd-a04a-64f94c7d37c9" providerId="ADAL" clId="{3E66C125-C966-4613-A1FE-F812CCBDD351}" dt="2025-08-26T16:20:32.317" v="6"/>
+          <ac:picMkLst>
+            <pc:docMk/>
+            <pc:sldMk cId="0" sldId="258"/>
+            <ac:picMk id="2" creationId="{EEFE4CA8-1D16-75DB-D0A6-CDF0DD9A1DFA}"/>
+          </ac:picMkLst>
+        </pc:picChg>
+      </pc:sldChg>
+      <pc:sldChg chg="addSp modSp">
+        <pc:chgData name="Christopher Aloo" userId="81d139e4-1a74-45bd-a04a-64f94c7d37c9" providerId="ADAL" clId="{3E66C125-C966-4613-A1FE-F812CCBDD351}" dt="2025-08-26T16:20:33.984" v="7"/>
+        <pc:sldMkLst>
+          <pc:docMk/>
+          <pc:sldMk cId="0" sldId="260"/>
+        </pc:sldMkLst>
+        <pc:picChg chg="add mod">
+          <ac:chgData name="Christopher Aloo" userId="81d139e4-1a74-45bd-a04a-64f94c7d37c9" providerId="ADAL" clId="{3E66C125-C966-4613-A1FE-F812CCBDD351}" dt="2025-08-26T16:20:33.984" v="7"/>
+          <ac:picMkLst>
+            <pc:docMk/>
+            <pc:sldMk cId="0" sldId="260"/>
+            <ac:picMk id="2" creationId="{C8E6AEA7-F4BD-A6F8-1769-AA844405DC3A}"/>
+          </ac:picMkLst>
+        </pc:picChg>
+      </pc:sldChg>
+      <pc:sldChg chg="addSp modSp">
+        <pc:chgData name="Christopher Aloo" userId="81d139e4-1a74-45bd-a04a-64f94c7d37c9" providerId="ADAL" clId="{3E66C125-C966-4613-A1FE-F812CCBDD351}" dt="2025-08-26T16:20:35.848" v="8"/>
+        <pc:sldMkLst>
+          <pc:docMk/>
+          <pc:sldMk cId="0" sldId="261"/>
+        </pc:sldMkLst>
+        <pc:picChg chg="add mod">
+          <ac:chgData name="Christopher Aloo" userId="81d139e4-1a74-45bd-a04a-64f94c7d37c9" providerId="ADAL" clId="{3E66C125-C966-4613-A1FE-F812CCBDD351}" dt="2025-08-26T16:20:35.848" v="8"/>
+          <ac:picMkLst>
+            <pc:docMk/>
+            <pc:sldMk cId="0" sldId="261"/>
+            <ac:picMk id="7" creationId="{26E8C8A7-6FDB-F786-BB53-740045C19F65}"/>
+          </ac:picMkLst>
+        </pc:picChg>
+      </pc:sldChg>
+      <pc:sldChg chg="addSp modSp">
+        <pc:chgData name="Christopher Aloo" userId="81d139e4-1a74-45bd-a04a-64f94c7d37c9" providerId="ADAL" clId="{3E66C125-C966-4613-A1FE-F812CCBDD351}" dt="2025-08-26T16:20:37.122" v="9"/>
+        <pc:sldMkLst>
+          <pc:docMk/>
+          <pc:sldMk cId="0" sldId="262"/>
+        </pc:sldMkLst>
+        <pc:picChg chg="add mod">
+          <ac:chgData name="Christopher Aloo" userId="81d139e4-1a74-45bd-a04a-64f94c7d37c9" providerId="ADAL" clId="{3E66C125-C966-4613-A1FE-F812CCBDD351}" dt="2025-08-26T16:20:37.122" v="9"/>
+          <ac:picMkLst>
+            <pc:docMk/>
+            <pc:sldMk cId="0" sldId="262"/>
+            <ac:picMk id="3" creationId="{1387D54D-332F-846D-BD42-9DA1F6944589}"/>
+          </ac:picMkLst>
+        </pc:picChg>
+      </pc:sldChg>
+      <pc:sldChg chg="addSp modSp">
+        <pc:chgData name="Christopher Aloo" userId="81d139e4-1a74-45bd-a04a-64f94c7d37c9" providerId="ADAL" clId="{3E66C125-C966-4613-A1FE-F812CCBDD351}" dt="2025-08-26T16:20:38.822" v="10"/>
+        <pc:sldMkLst>
+          <pc:docMk/>
+          <pc:sldMk cId="0" sldId="263"/>
+        </pc:sldMkLst>
+        <pc:picChg chg="add mod">
+          <ac:chgData name="Christopher Aloo" userId="81d139e4-1a74-45bd-a04a-64f94c7d37c9" providerId="ADAL" clId="{3E66C125-C966-4613-A1FE-F812CCBDD351}" dt="2025-08-26T16:20:38.822" v="10"/>
+          <ac:picMkLst>
+            <pc:docMk/>
+            <pc:sldMk cId="0" sldId="263"/>
+            <ac:picMk id="2" creationId="{92E98AFB-E4E4-47EC-9211-78E47701DAD4}"/>
+          </ac:picMkLst>
+        </pc:picChg>
+      </pc:sldChg>
+      <pc:sldChg chg="addSp modSp">
+        <pc:chgData name="Christopher Aloo" userId="81d139e4-1a74-45bd-a04a-64f94c7d37c9" providerId="ADAL" clId="{3E66C125-C966-4613-A1FE-F812CCBDD351}" dt="2025-08-26T16:20:41.410" v="12"/>
+        <pc:sldMkLst>
+          <pc:docMk/>
+          <pc:sldMk cId="0" sldId="264"/>
+        </pc:sldMkLst>
+        <pc:picChg chg="add mod">
+          <ac:chgData name="Christopher Aloo" userId="81d139e4-1a74-45bd-a04a-64f94c7d37c9" providerId="ADAL" clId="{3E66C125-C966-4613-A1FE-F812CCBDD351}" dt="2025-08-26T16:20:41.410" v="12"/>
+          <ac:picMkLst>
+            <pc:docMk/>
+            <pc:sldMk cId="0" sldId="264"/>
+            <ac:picMk id="3" creationId="{A8D3D1C0-8CDF-675C-6A44-717F4604FACE}"/>
+          </ac:picMkLst>
+        </pc:picChg>
+      </pc:sldChg>
+      <pc:sldChg chg="addSp modSp">
+        <pc:chgData name="Christopher Aloo" userId="81d139e4-1a74-45bd-a04a-64f94c7d37c9" providerId="ADAL" clId="{3E66C125-C966-4613-A1FE-F812CCBDD351}" dt="2025-08-26T16:20:42.726" v="13"/>
+        <pc:sldMkLst>
+          <pc:docMk/>
+          <pc:sldMk cId="0" sldId="265"/>
+        </pc:sldMkLst>
+        <pc:picChg chg="add mod">
+          <ac:chgData name="Christopher Aloo" userId="81d139e4-1a74-45bd-a04a-64f94c7d37c9" providerId="ADAL" clId="{3E66C125-C966-4613-A1FE-F812CCBDD351}" dt="2025-08-26T16:20:42.726" v="13"/>
+          <ac:picMkLst>
+            <pc:docMk/>
+            <pc:sldMk cId="0" sldId="265"/>
+            <ac:picMk id="2" creationId="{F5D6441E-3DA5-C2A9-C46C-03B832F7761A}"/>
+          </ac:picMkLst>
+        </pc:picChg>
+      </pc:sldChg>
+      <pc:sldChg chg="addSp modSp">
+        <pc:chgData name="Christopher Aloo" userId="81d139e4-1a74-45bd-a04a-64f94c7d37c9" providerId="ADAL" clId="{3E66C125-C966-4613-A1FE-F812CCBDD351}" dt="2025-08-26T16:20:44.344" v="14"/>
+        <pc:sldMkLst>
+          <pc:docMk/>
+          <pc:sldMk cId="1250749228" sldId="270"/>
+        </pc:sldMkLst>
+        <pc:picChg chg="add mod">
+          <ac:chgData name="Christopher Aloo" userId="81d139e4-1a74-45bd-a04a-64f94c7d37c9" providerId="ADAL" clId="{3E66C125-C966-4613-A1FE-F812CCBDD351}" dt="2025-08-26T16:20:44.344" v="14"/>
+          <ac:picMkLst>
+            <pc:docMk/>
+            <pc:sldMk cId="1250749228" sldId="270"/>
+            <ac:picMk id="2" creationId="{FC0FC3BF-D124-092D-6B84-7ABA4417A4D5}"/>
+          </ac:picMkLst>
+        </pc:picChg>
+      </pc:sldChg>
+      <pc:sldChg chg="addSp modSp">
+        <pc:chgData name="Christopher Aloo" userId="81d139e4-1a74-45bd-a04a-64f94c7d37c9" providerId="ADAL" clId="{3E66C125-C966-4613-A1FE-F812CCBDD351}" dt="2025-08-26T16:20:45.615" v="15"/>
+        <pc:sldMkLst>
+          <pc:docMk/>
+          <pc:sldMk cId="2068144280" sldId="271"/>
+        </pc:sldMkLst>
+        <pc:picChg chg="add mod">
+          <ac:chgData name="Christopher Aloo" userId="81d139e4-1a74-45bd-a04a-64f94c7d37c9" providerId="ADAL" clId="{3E66C125-C966-4613-A1FE-F812CCBDD351}" dt="2025-08-26T16:20:45.615" v="15"/>
+          <ac:picMkLst>
+            <pc:docMk/>
+            <pc:sldMk cId="2068144280" sldId="271"/>
+            <ac:picMk id="2" creationId="{BAF2F968-870F-D878-57BE-4BCBD041F789}"/>
+          </ac:picMkLst>
+        </pc:picChg>
+      </pc:sldChg>
+      <pc:sldChg chg="addSp modSp">
+        <pc:chgData name="Christopher Aloo" userId="81d139e4-1a74-45bd-a04a-64f94c7d37c9" providerId="ADAL" clId="{3E66C125-C966-4613-A1FE-F812CCBDD351}" dt="2025-08-26T16:20:46.867" v="16"/>
+        <pc:sldMkLst>
+          <pc:docMk/>
+          <pc:sldMk cId="2656503465" sldId="272"/>
+        </pc:sldMkLst>
+        <pc:picChg chg="add mod">
+          <ac:chgData name="Christopher Aloo" userId="81d139e4-1a74-45bd-a04a-64f94c7d37c9" providerId="ADAL" clId="{3E66C125-C966-4613-A1FE-F812CCBDD351}" dt="2025-08-26T16:20:46.867" v="16"/>
+          <ac:picMkLst>
+            <pc:docMk/>
+            <pc:sldMk cId="2656503465" sldId="272"/>
+            <ac:picMk id="4" creationId="{09BB5813-F2B7-7651-505A-49A25D642E7B}"/>
+          </ac:picMkLst>
+        </pc:picChg>
+      </pc:sldChg>
+      <pc:sldChg chg="addSp modSp">
+        <pc:chgData name="Christopher Aloo" userId="81d139e4-1a74-45bd-a04a-64f94c7d37c9" providerId="ADAL" clId="{3E66C125-C966-4613-A1FE-F812CCBDD351}" dt="2025-08-26T16:20:49.314" v="18"/>
+        <pc:sldMkLst>
+          <pc:docMk/>
+          <pc:sldMk cId="1627362100" sldId="274"/>
+        </pc:sldMkLst>
+        <pc:picChg chg="add mod">
+          <ac:chgData name="Christopher Aloo" userId="81d139e4-1a74-45bd-a04a-64f94c7d37c9" providerId="ADAL" clId="{3E66C125-C966-4613-A1FE-F812CCBDD351}" dt="2025-08-26T16:20:49.314" v="18"/>
+          <ac:picMkLst>
+            <pc:docMk/>
+            <pc:sldMk cId="1627362100" sldId="274"/>
+            <ac:picMk id="2" creationId="{88020654-9D96-DFD7-83F7-BD2A0A4F8CB1}"/>
+          </ac:picMkLst>
+        </pc:picChg>
+      </pc:sldChg>
+      <pc:sldChg chg="addSp modSp">
+        <pc:chgData name="Christopher Aloo" userId="81d139e4-1a74-45bd-a04a-64f94c7d37c9" providerId="ADAL" clId="{3E66C125-C966-4613-A1FE-F812CCBDD351}" dt="2025-08-26T16:20:50.429" v="19"/>
+        <pc:sldMkLst>
+          <pc:docMk/>
+          <pc:sldMk cId="3314516014" sldId="275"/>
+        </pc:sldMkLst>
+        <pc:picChg chg="add mod">
+          <ac:chgData name="Christopher Aloo" userId="81d139e4-1a74-45bd-a04a-64f94c7d37c9" providerId="ADAL" clId="{3E66C125-C966-4613-A1FE-F812CCBDD351}" dt="2025-08-26T16:20:50.429" v="19"/>
+          <ac:picMkLst>
+            <pc:docMk/>
+            <pc:sldMk cId="3314516014" sldId="275"/>
+            <ac:picMk id="2" creationId="{5C00A7DA-30E2-BD12-65FF-CBD404024554}"/>
+          </ac:picMkLst>
+        </pc:picChg>
+      </pc:sldChg>
+      <pc:sldChg chg="addSp modSp">
+        <pc:chgData name="Christopher Aloo" userId="81d139e4-1a74-45bd-a04a-64f94c7d37c9" providerId="ADAL" clId="{3E66C125-C966-4613-A1FE-F812CCBDD351}" dt="2025-08-26T16:20:51.611" v="20"/>
+        <pc:sldMkLst>
+          <pc:docMk/>
+          <pc:sldMk cId="472209862" sldId="276"/>
+        </pc:sldMkLst>
+        <pc:picChg chg="add mod">
+          <ac:chgData name="Christopher Aloo" userId="81d139e4-1a74-45bd-a04a-64f94c7d37c9" providerId="ADAL" clId="{3E66C125-C966-4613-A1FE-F812CCBDD351}" dt="2025-08-26T16:20:51.611" v="20"/>
+          <ac:picMkLst>
+            <pc:docMk/>
+            <pc:sldMk cId="472209862" sldId="276"/>
+            <ac:picMk id="2" creationId="{32A95559-0574-F9B6-3509-07EDB24554AB}"/>
+          </ac:picMkLst>
+        </pc:picChg>
+      </pc:sldChg>
+      <pc:sldChg chg="addSp modSp">
+        <pc:chgData name="Christopher Aloo" userId="81d139e4-1a74-45bd-a04a-64f94c7d37c9" providerId="ADAL" clId="{3E66C125-C966-4613-A1FE-F812CCBDD351}" dt="2025-08-26T16:20:54.198" v="22"/>
+        <pc:sldMkLst>
+          <pc:docMk/>
+          <pc:sldMk cId="970380513" sldId="277"/>
+        </pc:sldMkLst>
+        <pc:picChg chg="add mod">
+          <ac:chgData name="Christopher Aloo" userId="81d139e4-1a74-45bd-a04a-64f94c7d37c9" providerId="ADAL" clId="{3E66C125-C966-4613-A1FE-F812CCBDD351}" dt="2025-08-26T16:20:54.198" v="22"/>
+          <ac:picMkLst>
+            <pc:docMk/>
+            <pc:sldMk cId="970380513" sldId="277"/>
+            <ac:picMk id="4" creationId="{B2511DB2-7725-6B8B-AF21-67C9864E673E}"/>
+          </ac:picMkLst>
+        </pc:picChg>
+      </pc:sldChg>
+      <pc:sldChg chg="delSp del mod">
+        <pc:chgData name="Christopher Aloo" userId="81d139e4-1a74-45bd-a04a-64f94c7d37c9" providerId="ADAL" clId="{3E66C125-C966-4613-A1FE-F812CCBDD351}" dt="2025-08-26T16:19:59.281" v="1" actId="47"/>
+        <pc:sldMkLst>
+          <pc:docMk/>
+          <pc:sldMk cId="767895912" sldId="280"/>
+        </pc:sldMkLst>
+        <pc:inkChg chg="del">
+          <ac:chgData name="Christopher Aloo" userId="81d139e4-1a74-45bd-a04a-64f94c7d37c9" providerId="ADAL" clId="{3E66C125-C966-4613-A1FE-F812CCBDD351}" dt="2025-08-26T16:19:48.893" v="0" actId="478"/>
+          <ac:inkMkLst>
+            <pc:docMk/>
+            <pc:sldMk cId="767895912" sldId="280"/>
+            <ac:inkMk id="3" creationId="{8FAD0D8C-F887-BEF9-C80D-56BA08FAED7F}"/>
+          </ac:inkMkLst>
+        </pc:inkChg>
+      </pc:sldChg>
+      <pc:sldChg chg="addSp modSp">
+        <pc:chgData name="Christopher Aloo" userId="81d139e4-1a74-45bd-a04a-64f94c7d37c9" providerId="ADAL" clId="{3E66C125-C966-4613-A1FE-F812CCBDD351}" dt="2025-08-26T16:20:58.894" v="25"/>
+        <pc:sldMkLst>
+          <pc:docMk/>
+          <pc:sldMk cId="3380766645" sldId="285"/>
+        </pc:sldMkLst>
+        <pc:picChg chg="add mod">
+          <ac:chgData name="Christopher Aloo" userId="81d139e4-1a74-45bd-a04a-64f94c7d37c9" providerId="ADAL" clId="{3E66C125-C966-4613-A1FE-F812CCBDD351}" dt="2025-08-26T16:20:58.894" v="25"/>
+          <ac:picMkLst>
+            <pc:docMk/>
+            <pc:sldMk cId="3380766645" sldId="285"/>
+            <ac:picMk id="2" creationId="{FB0CC8A2-CBED-5D13-FB7C-690F84125393}"/>
+          </ac:picMkLst>
+        </pc:picChg>
+      </pc:sldChg>
+      <pc:sldChg chg="addSp modSp">
+        <pc:chgData name="Christopher Aloo" userId="81d139e4-1a74-45bd-a04a-64f94c7d37c9" providerId="ADAL" clId="{3E66C125-C966-4613-A1FE-F812CCBDD351}" dt="2025-08-26T16:20:55.693" v="23"/>
+        <pc:sldMkLst>
+          <pc:docMk/>
+          <pc:sldMk cId="1331522900" sldId="286"/>
+        </pc:sldMkLst>
+        <pc:picChg chg="add mod">
+          <ac:chgData name="Christopher Aloo" userId="81d139e4-1a74-45bd-a04a-64f94c7d37c9" providerId="ADAL" clId="{3E66C125-C966-4613-A1FE-F812CCBDD351}" dt="2025-08-26T16:20:55.693" v="23"/>
+          <ac:picMkLst>
+            <pc:docMk/>
+            <pc:sldMk cId="1331522900" sldId="286"/>
+            <ac:picMk id="2" creationId="{FC52420B-0CA7-4D80-E5E2-C35BAF8264B5}"/>
+          </ac:picMkLst>
+        </pc:picChg>
+      </pc:sldChg>
+      <pc:sldChg chg="addSp modSp">
+        <pc:chgData name="Christopher Aloo" userId="81d139e4-1a74-45bd-a04a-64f94c7d37c9" providerId="ADAL" clId="{3E66C125-C966-4613-A1FE-F812CCBDD351}" dt="2025-08-26T16:21:01.259" v="26"/>
+        <pc:sldMkLst>
+          <pc:docMk/>
+          <pc:sldMk cId="3590969146" sldId="289"/>
+        </pc:sldMkLst>
+        <pc:picChg chg="add mod">
+          <ac:chgData name="Christopher Aloo" userId="81d139e4-1a74-45bd-a04a-64f94c7d37c9" providerId="ADAL" clId="{3E66C125-C966-4613-A1FE-F812CCBDD351}" dt="2025-08-26T16:21:01.259" v="26"/>
+          <ac:picMkLst>
+            <pc:docMk/>
+            <pc:sldMk cId="3590969146" sldId="289"/>
+            <ac:picMk id="2" creationId="{311B3793-404A-0821-6CD5-3E4269B69638}"/>
+          </ac:picMkLst>
+        </pc:picChg>
+      </pc:sldChg>
+      <pc:sldChg chg="addSp modSp">
+        <pc:chgData name="Christopher Aloo" userId="81d139e4-1a74-45bd-a04a-64f94c7d37c9" providerId="ADAL" clId="{3E66C125-C966-4613-A1FE-F812CCBDD351}" dt="2025-08-26T16:20:57.272" v="24"/>
+        <pc:sldMkLst>
+          <pc:docMk/>
+          <pc:sldMk cId="2294123042" sldId="290"/>
+        </pc:sldMkLst>
+        <pc:picChg chg="add mod">
+          <ac:chgData name="Christopher Aloo" userId="81d139e4-1a74-45bd-a04a-64f94c7d37c9" providerId="ADAL" clId="{3E66C125-C966-4613-A1FE-F812CCBDD351}" dt="2025-08-26T16:20:57.272" v="24"/>
+          <ac:picMkLst>
+            <pc:docMk/>
+            <pc:sldMk cId="2294123042" sldId="290"/>
+            <ac:picMk id="9" creationId="{076E685B-687D-E0E2-8138-A75FE4F9D93E}"/>
+          </ac:picMkLst>
+        </pc:picChg>
+      </pc:sldChg>
+      <pc:sldChg chg="addSp modSp">
+        <pc:chgData name="Christopher Aloo" userId="81d139e4-1a74-45bd-a04a-64f94c7d37c9" providerId="ADAL" clId="{3E66C125-C966-4613-A1FE-F812CCBDD351}" dt="2025-08-26T16:20:52.839" v="21"/>
+        <pc:sldMkLst>
+          <pc:docMk/>
+          <pc:sldMk cId="1081022516" sldId="291"/>
+        </pc:sldMkLst>
+        <pc:picChg chg="add mod">
+          <ac:chgData name="Christopher Aloo" userId="81d139e4-1a74-45bd-a04a-64f94c7d37c9" providerId="ADAL" clId="{3E66C125-C966-4613-A1FE-F812CCBDD351}" dt="2025-08-26T16:20:52.839" v="21"/>
+          <ac:picMkLst>
+            <pc:docMk/>
+            <pc:sldMk cId="1081022516" sldId="291"/>
+            <ac:picMk id="2" creationId="{502E3283-29FA-FE89-D50A-B19F0B088D32}"/>
+          </ac:picMkLst>
+        </pc:picChg>
+      </pc:sldChg>
+      <pc:sldChg chg="addSp modSp">
+        <pc:chgData name="Christopher Aloo" userId="81d139e4-1a74-45bd-a04a-64f94c7d37c9" providerId="ADAL" clId="{3E66C125-C966-4613-A1FE-F812CCBDD351}" dt="2025-08-26T16:20:40.005" v="11"/>
+        <pc:sldMkLst>
+          <pc:docMk/>
+          <pc:sldMk cId="852693164" sldId="292"/>
+        </pc:sldMkLst>
+        <pc:picChg chg="add mod">
+          <ac:chgData name="Christopher Aloo" userId="81d139e4-1a74-45bd-a04a-64f94c7d37c9" providerId="ADAL" clId="{3E66C125-C966-4613-A1FE-F812CCBDD351}" dt="2025-08-26T16:20:40.005" v="11"/>
+          <ac:picMkLst>
+            <pc:docMk/>
+            <pc:sldMk cId="852693164" sldId="292"/>
+            <ac:picMk id="2" creationId="{C10DF0C9-4A96-9094-55FC-97F3158F23D7}"/>
+          </ac:picMkLst>
+        </pc:picChg>
+      </pc:sldChg>
+      <pc:sldChg chg="addSp modSp">
+        <pc:chgData name="Christopher Aloo" userId="81d139e4-1a74-45bd-a04a-64f94c7d37c9" providerId="ADAL" clId="{3E66C125-C966-4613-A1FE-F812CCBDD351}" dt="2025-08-26T16:20:48.131" v="17"/>
+        <pc:sldMkLst>
+          <pc:docMk/>
+          <pc:sldMk cId="3172714102" sldId="293"/>
+        </pc:sldMkLst>
+        <pc:picChg chg="add mod">
+          <ac:chgData name="Christopher Aloo" userId="81d139e4-1a74-45bd-a04a-64f94c7d37c9" providerId="ADAL" clId="{3E66C125-C966-4613-A1FE-F812CCBDD351}" dt="2025-08-26T16:20:48.131" v="17"/>
+          <ac:picMkLst>
+            <pc:docMk/>
+            <pc:sldMk cId="3172714102" sldId="293"/>
+            <ac:picMk id="2" creationId="{DF4CEE51-E2E3-3290-2337-239233628AD7}"/>
+          </ac:picMkLst>
+        </pc:picChg>
+      </pc:sldChg>
+    </pc:docChg>
+  </pc:docChgLst>
 </pc:chgInfo>
 </file>
 
 <file path=ppt/ink/ink1.xml><?xml version="1.0" encoding="utf-8"?>
-<inkml:ink xmlns:inkml="http://www.w3.org/2003/InkML">
-  <inkml:definitions>
-    <inkml:context xml:id="ctx0">
-      <inkml:inkSource xml:id="inkSrc0">
-        <inkml:traceFormat>
-          <inkml:channel name="X" type="integer" max="29376" units="cm"/>
-          <inkml:channel name="Y" type="integer" max="16524" units="cm"/>
-          <inkml:channel name="F" type="integer" max="4095" units="dev"/>
-          <inkml:channel name="T" type="integer" max="2.14748E9" units="dev"/>
-        </inkml:traceFormat>
-        <inkml:channelProperties>
-          <inkml:channelProperty channel="X" name="resolution" value="1000.20428" units="1/cm"/>
-          <inkml:channelProperty channel="Y" name="resolution" value="1000.24213" units="1/cm"/>
-          <inkml:channelProperty channel="F" name="resolution" value="0" units="1/dev"/>
-          <inkml:channelProperty channel="T" name="resolution" value="1" units="1/dev"/>
-        </inkml:channelProperties>
-      </inkml:inkSource>
-      <inkml:timestamp xml:id="ts0" timeString="2025-01-09T16:13:07.813"/>
-    </inkml:context>
-    <inkml:brush xml:id="br0">
-      <inkml:brushProperty name="width" value="0.05292" units="cm"/>
-      <inkml:brushProperty name="height" value="0.05292" units="cm"/>
-      <inkml:brushProperty name="color" value="#FF0000"/>
-    </inkml:brush>
-  </inkml:definitions>
-  <inkml:trace contextRef="#ctx0" brushRef="#br0">12025 8444 1667 0,'0'3'68'0,"17"1"-44"15,13-1-24-15,39-5 12 16,18-5 18-16,37-13 12 15,13-4 6-15,31-9 23 16,10-3 4-16,18-5 30 16,10-2 11-16,6-1-38 15,6 1-22-15,-4 5-25 16,1 7-13-16,-26 11-5 16,-8 4-2-16,-35 8-5 15,-20 2-5-15,-27 1-1 16,-22 0-1-16,-21-1-17 15,-15-2-26-15,-18 3-74 16,-12-1-100-16,-18-3-126 0,-5 0-14 16,-21-4 261-16</inkml:trace>
-</inkml:ink>
-</file>
-
-<file path=ppt/ink/ink2.xml><?xml version="1.0" encoding="utf-8"?>
 <inkml:ink xmlns:inkml="http://www.w3.org/2003/InkML">
   <inkml:definitions>
     <inkml:context xml:id="ctx0">
@@ -1373,7 +1056,7 @@
 </inkml:ink>
 </file>
 
-<file path=ppt/ink/ink3.xml><?xml version="1.0" encoding="utf-8"?>
+<file path=ppt/ink/ink2.xml><?xml version="1.0" encoding="utf-8"?>
 <inkml:ink xmlns:inkml="http://www.w3.org/2003/InkML">
   <inkml:definitions>
     <inkml:context xml:id="ctx0">
@@ -1400,7 +1083,7 @@
 </inkml:ink>
 </file>
 
-<file path=ppt/ink/ink4.xml><?xml version="1.0" encoding="utf-8"?>
+<file path=ppt/ink/ink3.xml><?xml version="1.0" encoding="utf-8"?>
 <inkml:ink xmlns:inkml="http://www.w3.org/2003/InkML">
   <inkml:definitions>
     <inkml:context xml:id="ctx0">
@@ -1427,7 +1110,7 @@
 </inkml:ink>
 </file>
 
-<file path=ppt/ink/ink5.xml><?xml version="1.0" encoding="utf-8"?>
+<file path=ppt/ink/ink4.xml><?xml version="1.0" encoding="utf-8"?>
 <inkml:ink xmlns:inkml="http://www.w3.org/2003/InkML">
   <inkml:definitions>
     <inkml:context xml:id="ctx0">
@@ -1458,7 +1141,7 @@
 </inkml:ink>
 </file>
 
-<file path=ppt/ink/ink6.xml><?xml version="1.0" encoding="utf-8"?>
+<file path=ppt/ink/ink5.xml><?xml version="1.0" encoding="utf-8"?>
 <inkml:ink xmlns:inkml="http://www.w3.org/2003/InkML">
   <inkml:definitions>
     <inkml:context xml:id="ctx0">
@@ -1549,7 +1232,7 @@
 </inkml:ink>
 </file>
 
-<file path=ppt/ink/ink7.xml><?xml version="1.0" encoding="utf-8"?>
+<file path=ppt/ink/ink6.xml><?xml version="1.0" encoding="utf-8"?>
 <inkml:ink xmlns:inkml="http://www.w3.org/2003/InkML">
   <inkml:definitions>
     <inkml:context xml:id="ctx0">
@@ -1577,7 +1260,7 @@
   </inkml:definitions>
   <inkml:trace contextRef="#ctx0" brushRef="#br0">8408 7002 1293 0,'-9'-4'37'0,"1"0"-8"15,8 4-25-15,0 0-2 16,0 0-2-16,0 0-2 15,8 5 6-15,4 3 7 0,11 5 20 16,3 4 4-16,11 8 4 16,4 4-4-16,5 6-14 15,4 4 5-15,8-1-2 16,7 0-6-16,2 2-6 16,-1 0 0-16,-4 1-3 15,-7 0 6-15,-1-1 5 16,2-3 7-16,-1-7 21 15,0-2 3-15,-8-7 18 16,-5-3-4-16,-11-3-11 16,-6-2-6-16,-5-2-24 15,-5-3-3-15,-4-1-12 16,-3-1 3-16,-5 1-6 16,-2-1 6-16,-5 4 0 15,-4 2 0-15,-7 6 6 16,-5 4 0-16,-8 7-7 0,-4 8-5 15,-12 9-6-15,-4 6 9 16,-6 9 12-16,-4 3 15 16,1 9 18-16,4 6-10 15,-1 3 19-15,-4 4 4 16,-2-2-2-16,-2 0-6 16,2-3-27-16,4-6-16 15,6-10-9-15,5-4-1 0,5-11-5 16,3-7-9-16,11-13-110 15,4-9-92-15,9-14 60 16</inkml:trace>
   <inkml:trace contextRef="#ctx0" brushRef="#br0" timeOffset="1316.87">10430 7120 1524 0,'-20'4'74'16,"-3"2"30"-16,-11 8-107 15,-5 3-6-15,-9 7 12 16,-6 4 6-16,-5 8 15 16,-4 5 9-16,-1 10 27 15,-1 5-9-15,7 3 11 16,10-2-2-16,21-13-18 15,11-8-3-15,20-8-24 16,11-4-9-16,19-2-15 16,6-1-6-16,11-6-15 15,1 0 0-15,-2-1-15 0,-3 1 1 16,-9 5 11 0,-8 4 9-16,-14 4 12 0,-8 3 9 15,-20 7 6-15,-9 3 6 16,-17 6 18-16,-7 1 12 15,-11 1 32-15,-7 1-8 16,-7-6-12-16,-2-5-12 16,-2-10-33-16,6-7-6 0,8-13-48 15,9-8-54-15,19-17-203 16,12-7-201-16,10-20 345 16</inkml:trace>
-  <inkml:trace contextRef="#ctx0" brushRef="#br0" timeOffset="1832.67">10437 7623 1072 0,'-2'21'26'15,"1"-5"1"-15,0-4 29 16,3-5 31-16,5-4 14 16,7-4 3-16,9-6 6 15,10-11 84-15,3-5-18 16,9-9-38-16,4-4-43 15,-5-5-62-15,-5-1-18 16,-6-3-6-16,-8 0-6 0,-2 2-3 16,-4-1-6-16,-8 1-33 15,-3 2-17-15,-8 2-28 16,-3 2 6-16,-7 9 19 16,-3 4 8-16,-6 13 15 15,-5 6 15-15,-3 14 9 16,2 7 6-16,-1 14 15 15,4 6 6-15,4 12 18 16,4 9 15-16,5 20 14 16,1 12-8-16,-2 15-18 15,0 4-24-15,2-6-39 16,3-11-18-16,5-27-15 16,2-17-14-16,6-32-147 15,2-10-188-15,2-22 283 16</inkml:trace>
+  <inkml:trace contextRef="#ctx0" brushRef="#br0" timeOffset="1832.66">10437 7623 1072 0,'-2'21'26'15,"1"-5"1"-15,0-4 29 16,3-5 31-16,5-4 14 16,7-4 3-16,9-6 6 15,10-11 84-15,3-5-18 16,9-9-38-16,4-4-43 15,-5-5-62-15,-5-1-18 16,-6-3-6-16,-8 0-6 0,-2 2-3 16,-4-1-6-16,-8 1-33 15,-3 2-17-15,-8 2-28 16,-3 2 6-16,-7 9 19 16,-3 4 8-16,-6 13 15 15,-5 6 15-15,-3 14 9 16,2 7 6-16,-1 14 15 15,4 6 6-15,4 12 18 16,4 9 15-16,5 20 14 16,1 12-8-16,-2 15-18 15,0 4-24-15,2-6-39 16,3-11-18-16,5-27-15 16,2-17-14-16,6-32-147 15,2-10-188-15,2-22 283 16</inkml:trace>
   <inkml:trace contextRef="#ctx0" brushRef="#br0" timeOffset="2233.17">10908 7798 2823 0,'1'23'40'15,"5"-2"-48"-15,11-8-66 16,6-7-20-16,6-12-85 16,1-8-11-16,-2-13-1 15,-2-3 71-15,-3-4 156 16,-4-2 30-16,1-1 11 16,-6 0-11-16,-1 2-48 15,-2 3-12-15,-9 6-9 16,-2 6-15-16,-7 8-18 15,-6 5-17-15,-7 11 11 16,-3 8 3-16,-1 13 33 16,-3 6 27-16,3 13 15 15,1 5 12-15,5 10 11 16,5 2-8-16,8-3-21 16,5-6-12-16,13-17-18 0,11-9-2 15,8-18-2-15,4-8-10 16,8-16-116-16,-1-9-94 15,4-13 111-15</inkml:trace>
   <inkml:trace contextRef="#ctx0" brushRef="#br0" timeOffset="2717.16">11606 7524 1543 0,'-8'33'207'16,"1"4"256"-16,2 12-424 16,5 4-30-16,1 12-3 15,1 4-3-15,1 9 3 16,-3 1-9-16,0-1 6 16,-2-2-3-16,0-11 0 15,-1-8 0-15,3-13 0 16,0-9 0-16,0-13 6 15,0-8-3-15,0-14-30 16,-3-6-9-16,0-22 3 16,-1-11 1-16,-1-24 32 0,0-10 0 15,0-11 9-15,2-3 9 16,5-3 17-16,4-1 10 16,8 3-9-16,5 4-14 15,7 18-18-15,5 9-3 16,0 20-1-16,-3 11-1 15,-2 17-3-15,-3 7-6 0,-6 18 4 16,-4 9-3-16,-10 19 0 16,-6 9 18-16,-12 10-6 15,-2 2 3-15,-5-2 0 16,0-5-2-16,2-15-3 16,1-7 0-16,5-17-124 15,1-7-104-15,8-14 120 16</inkml:trace>
   <inkml:trace contextRef="#ctx0" brushRef="#br0" timeOffset="3216.91">12979 7257 1247 0,'-29'6'0'0,"-9"4"-29"15,-6 7 15 1,-13 11 74-16,-6 4 23 15,-4 14 34-15,-1 4 68 0,8 5 119 16,3-1-20-16,12-6-115 16,11-7-62-16,17-16-59 15,14-6-28-15,20-10-29 16,11-4-5-16,11-1-15 16,4-2-6-16,2 0-1 15,0 3-6-15,2 6-5 16,-2 2 9-16,-9 8 4 15,-9 3 1-15,-16 7 30 16,-11 2 3-16,-16 3 0 16,-7-1 12-16,-8 1 15 15,-4-3 0-15,-1-5 3 16,0-4-5-16,3-7-19 16,2-6-12-16,1-11-55 0,4-5-103 15,2-14-147-15,6-6-44 16,12-13 270-16</inkml:trace>
@@ -1589,7 +1272,7 @@
   <inkml:trace contextRef="#ctx0" brushRef="#br0" timeOffset="9123.98">18471 7740 1930 0,'-34'78'185'15,"2"-4"102"-15,8-15-287 16,6-9-4-16,11-24-1 16,2-7 3-16,5-19 12 15,-5-4 3-15,3-17 9 16,2-8-5-16,6-14-2 15,1-6-6-15,1-7 0 16,1-2 5-16,5-3 7 16,4-1-1-16,10 0 0 15,6 0-10-15,14-3-10 16,6 2-2-16,9 2-6 16,2 6-5-16,0 14 1 0,-2 8 2 15,-7 18 0-15,-6 10-3 16,-16 18-30-16,-11 9-15 15,-22 19-13-15,-10 7-17 16,-22 15 46-16,-9 3 42 16,-15 8 96-16,-4-1-6 15,-2-5 36-15,-1-5 7 16,2-15-61-16,7-7-11 0,8-18-13 16,8-9-13-16,13-13-19 15,6-7-9-15,12-14-19 16,5-5-6-16,11-7-6 15,4-1-2-15,6 5-2 16,4 6 0-16,5 11 7 16,5 5 9-16,5 12 8 15,0 7 0-15,5 12 4 16,1 4-2-16,2 2-4 16,3-1-7-16,0-7-28 15,1-4-44-15,-4-8-49 16,-4-7-29-16,-6-9-28 15,-4-5 21-15,-6-13 41 16,1-3 13-16,-3-3 3 16,-1-4 65-16,0 2-7 15,-2 1 3-15,-5 0 9 0,-2 3 11 16,-8 4 24-16,-4 4 19 16,-6 6 44-16,-5 6 14 15,-7 7 19-15,-5 6 102 16,-7 11 25-16,0 4 13 15,2 7 13-15,2 2-52 16,5 1-94-16,5 0-36 16,7-3-47-16,6-3-14 0,6-8-3 15,4-4-2-15,8-11-2 16,5-4-2-16,6-10 3 16,6-5 0-16,1-6 2 15,2-4-2-15,-1-2-6 16,-4-2-1-16,-8 2 2 15,-6 1 4-15,-11 5 6 16,-6 4 3-16,-2 9 8 16,-1 3 9-16,-4 9 14 15,-2 9-3-15,-2 12-6 16,-2 8-8-16,-1 13-10 16,1 4-1-16,1 1 1 15,3-1-2-15,5-13-3 16,2-6-9-16,8-15-14 15,2-6-15-15,9-13-45 16,0-8-60-16,6-16-34 0,3-7-79 16,-1-11 30-16,0-1 42 15,-4-6 88-15,0 0 54 16,-1-5 20-16,0 0 7 16,0 3 10-16,2 2 6 15,-2 10 20-15,-1 6 9 0,-5 13 23 16,-4 9 88-16,-3 14 31 15,-4 7 5-15,-1 19 0 16,1 10-23-16,-3 22-64 16,0 10-19-16,-2 10-38 15,0 0-27-15,0-6-10 16,0-7-16-16,-3-14-79 16,2-7-45-16,-3-15-91 15,3-8 3-15,-3-12 57 16,-3-7 57-16,-7-14-22 15,-6-6-164-15,-7-7 159 16</inkml:trace>
   <inkml:trace contextRef="#ctx0" brushRef="#br0" timeOffset="9596.04">19499 7685 1063 0,'-18'-8'155'16,"4"1"160"-16,6 3 22 0,5-1-65 16,12-1-126-16,6-3-77 15,17-5-53-15,8-1-11 16,13-4-7-16,6-1-7 15,1 2-11-15,1 1 2 16,-1 4-2-16,-3 2-4 16,-4 2-6-16,-1 2-12 15,-9 2 1-15,-7 1-7 16,-9 3 12-16,-7 3 12 16,-3 5 18-16,-2 3 6 0,-2 2 3 15,0 2 9-15,-1 1-6 16,-3-2 3-16,1-4 12 15,-2-1 15-15,1-5 23 16,1-3 13-16,2-6-1 16,0-2-12-16,1-7-9 15,-1-3-8-15,-5-2-22 16,-2 0-9-16,-5-1-14 16,-5 1-6-16,-7 1-17 15,-9 4-5-15,-15 8 4 16,-5 7 3-16,-14 17 24 15,0 8 24-15,2 19 51 16,3 7 20-16,14 8-12 16,7 0-22-16,19-9-8 15,12-6-9-15,26-13-14 0,17-9-12 16,25-17-53-16,11-10-23 16,14-18-67-16,3-5-133 15,1-5-258-15,-6 0-17 16,-9 7 393-16</inkml:trace>
   <inkml:trace contextRef="#ctx0" brushRef="#br0" timeOffset="10033.04">15793 8324 2303 0,'13'1'157'0,"35"-4"66"0,27-5-244 16,56-6-65-1,27-2 10-15,36 0 53 0,16-1 17 16,24 2 6-16,7 2 1 16,16 1 8-16,-2 3 8 15,8 0-3-15,1 0-3 0,-5-3-3 16,-3-1-8-1,-17-4-5-15,-6-1-13 0,-28-6-178 16,-12-3-264-16,-28-4 230 16</inkml:trace>
-  <inkml:trace contextRef="#ctx0" brushRef="#br0" timeOffset="12983.35">6608 8506 821 0,'-16'7'32'16,"-3"-1"-212"-16,-3 1 125 15</inkml:trace>
+  <inkml:trace contextRef="#ctx0" brushRef="#br0" timeOffset="12983.34">6608 8506 821 0,'-16'7'32'16,"-3"-1"-212"-16,-3 1 125 15</inkml:trace>
   <inkml:trace contextRef="#ctx0" brushRef="#br0" timeOffset="13082.43">6440 8559 464 0,'-3'5'65'0,"3"-5"43"16,0 0-42-16,0 0-57 16,18 1-25-16,4-15-207 15,8-6 174-15</inkml:trace>
   <inkml:trace contextRef="#ctx0" brushRef="#br0" timeOffset="17433.29">11315 6880 1202 0,'0'0'23'0,"13"-2"-17"16,12 1-14-16,8-2 5 15,12-4 6-15,1-2 9 16,6-2 4-16,2 0 5 15,8-1 0-15,5 1-1 16,4-2-7-16,0 3-5 16,-3 1-6-16,-1-1 0 15,-5 0-2-15,-4 0 0 16,-2 2-47-16,-6 0-94 0,-5-1 81 16</inkml:trace>
   <inkml:trace contextRef="#ctx0" brushRef="#br0" timeOffset="20065.21">5430 9777 990 0,'-3'0'47'16,"3"0"10"-16,4 6-65 15,7-4-2-15,11-2 4 16,5 0 8-16,7-4 4 15,2-1 6-15,7-1 7 16,-1 0 4-16,5 2 3 16,4 0 1-16,9-1-2 15,9-1-4-15,12-2-3 16,5 0-5-16,7 1-5 16,3 2-2-16,-9 5-4 15,-3 0 0-15,-7 3 0 16,-3 3 1-16,4 1 13 0,3-1 5 15,-5-1 6-15,-5-2 1 16,-11-1-11-16,0-3-3 16,-4-3-9-16,0-3-1 15,0-3-6-15,-5 2-5 16,-6 1-50-16,-7 1-57 16,-14 2 62-16</inkml:trace>
@@ -18540,123 +18223,6 @@
   <p:cSld>
     <p:spTree>
       <p:nvGrpSpPr>
-        <p:cNvPr id="1" name="Shape 127">
-          <a:extLst>
-            <a:ext uri="{FF2B5EF4-FFF2-40B4-BE49-F238E27FC236}">
-              <a16:creationId xmlns:a16="http://schemas.microsoft.com/office/drawing/2014/main" id="{E625ACCE-D5DB-4A7B-5EF8-6FAA948DBC03}"/>
-            </a:ext>
-          </a:extLst>
-        </p:cNvPr>
-        <p:cNvGrpSpPr/>
-        <p:nvPr/>
-      </p:nvGrpSpPr>
-      <p:grpSpPr>
-        <a:xfrm>
-          <a:off x="0" y="0"/>
-          <a:ext cx="0" cy="0"/>
-          <a:chOff x="0" y="0"/>
-          <a:chExt cx="0" cy="0"/>
-        </a:xfrm>
-      </p:grpSpPr>
-      <p:sp>
-        <p:nvSpPr>
-          <p:cNvPr id="4" name="Title 3">
-            <a:extLst>
-              <a:ext uri="{FF2B5EF4-FFF2-40B4-BE49-F238E27FC236}">
-                <a16:creationId xmlns:a16="http://schemas.microsoft.com/office/drawing/2014/main" id="{385EC6B8-E326-2B56-DD63-22C71F7EE37A}"/>
-              </a:ext>
-            </a:extLst>
-          </p:cNvPr>
-          <p:cNvSpPr>
-            <a:spLocks noGrp="1"/>
-          </p:cNvSpPr>
-          <p:nvPr>
-            <p:ph type="title"/>
-          </p:nvPr>
-        </p:nvSpPr>
-        <p:spPr/>
-        <p:txBody>
-          <a:bodyPr>
-            <a:normAutofit fontScale="90000"/>
-          </a:bodyPr>
-          <a:lstStyle/>
-          <a:p>
-            <a:r>
-              <a:rPr lang="en-GB" dirty="0"/>
-              <a:t>Robust Scaler</a:t>
-            </a:r>
-          </a:p>
-        </p:txBody>
-      </p:sp>
-      <mc:AlternateContent xmlns:mc="http://schemas.openxmlformats.org/markup-compatibility/2006" xmlns:p14="http://schemas.microsoft.com/office/powerpoint/2010/main">
-        <mc:Choice Requires="p14">
-          <p:contentPart p14:bwMode="auto" r:id="rId3">
-            <p14:nvContentPartPr>
-              <p14:cNvPr id="5" name="Ink 4">
-                <a:extLst>
-                  <a:ext uri="{FF2B5EF4-FFF2-40B4-BE49-F238E27FC236}">
-                    <a16:creationId xmlns:a16="http://schemas.microsoft.com/office/drawing/2014/main" id="{053CACD3-EEB4-F5F3-733A-B28475968D25}"/>
-                  </a:ext>
-                </a:extLst>
-              </p14:cNvPr>
-              <p14:cNvContentPartPr/>
-              <p14:nvPr/>
-            </p14:nvContentPartPr>
-            <p14:xfrm>
-              <a:off x="743400" y="1811520"/>
-              <a:ext cx="7728120" cy="2629440"/>
-            </p14:xfrm>
-          </p:contentPart>
-        </mc:Choice>
-        <mc:Fallback xmlns="">
-          <p:pic>
-            <p:nvPicPr>
-              <p:cNvPr id="5" name="Ink 4">
-                <a:extLst>
-                  <a:ext uri="{FF2B5EF4-FFF2-40B4-BE49-F238E27FC236}">
-                    <a16:creationId xmlns:a16="http://schemas.microsoft.com/office/drawing/2014/main" id="{053CACD3-EEB4-F5F3-733A-B28475968D25}"/>
-                  </a:ext>
-                </a:extLst>
-              </p:cNvPr>
-              <p:cNvPicPr/>
-              <p:nvPr/>
-            </p:nvPicPr>
-            <p:blipFill>
-              <a:blip r:embed="rId4"/>
-              <a:stretch>
-                <a:fillRect/>
-              </a:stretch>
-            </p:blipFill>
-            <p:spPr>
-              <a:xfrm>
-                <a:off x="734040" y="1802160"/>
-                <a:ext cx="7746840" cy="2648160"/>
-              </a:xfrm>
-              <a:prstGeom prst="rect">
-                <a:avLst/>
-              </a:prstGeom>
-            </p:spPr>
-          </p:pic>
-        </mc:Fallback>
-      </mc:AlternateContent>
-    </p:spTree>
-    <p:extLst>
-      <p:ext uri="{BB962C8B-B14F-4D97-AF65-F5344CB8AC3E}">
-        <p14:creationId xmlns:p14="http://schemas.microsoft.com/office/powerpoint/2010/main" val="852693164"/>
-      </p:ext>
-    </p:extLst>
-  </p:cSld>
-  <p:clrMapOvr>
-    <a:masterClrMapping/>
-  </p:clrMapOvr>
-</p:sld>
-</file>
-
-<file path=ppt/slides/slide11.xml><?xml version="1.0" encoding="utf-8"?>
-<p:sld xmlns:a="http://schemas.openxmlformats.org/drawingml/2006/main" xmlns:r="http://schemas.openxmlformats.org/officeDocument/2006/relationships" xmlns:p="http://schemas.openxmlformats.org/presentationml/2006/main">
-  <p:cSld>
-    <p:spTree>
-      <p:nvGrpSpPr>
         <p:cNvPr id="1" name="Shape 136"/>
         <p:cNvGrpSpPr/>
         <p:nvPr/>
@@ -19076,6 +18642,53 @@
           </p:pic>
         </mc:Fallback>
       </mc:AlternateContent>
+      <p:pic>
+        <p:nvPicPr>
+          <p:cNvPr id="3" name="Picture 2">
+            <a:extLst>
+              <a:ext uri="{FF2B5EF4-FFF2-40B4-BE49-F238E27FC236}">
+                <a16:creationId xmlns:a16="http://schemas.microsoft.com/office/drawing/2014/main" id="{A8D3D1C0-8CDF-675C-6A44-717F4604FACE}"/>
+              </a:ext>
+            </a:extLst>
+          </p:cNvPr>
+          <p:cNvPicPr>
+            <a:picLocks noChangeAspect="1" noChangeArrowheads="1"/>
+          </p:cNvPicPr>
+          <p:nvPr/>
+        </p:nvPicPr>
+        <p:blipFill>
+          <a:blip r:embed="rId5">
+            <a:extLst>
+              <a:ext uri="{28A0092B-C50C-407E-A947-70E740481C1C}">
+                <a14:useLocalDpi xmlns:a14="http://schemas.microsoft.com/office/drawing/2010/main" val="0"/>
+              </a:ext>
+            </a:extLst>
+          </a:blip>
+          <a:srcRect/>
+          <a:stretch>
+            <a:fillRect/>
+          </a:stretch>
+        </p:blipFill>
+        <p:spPr bwMode="auto">
+          <a:xfrm>
+            <a:off x="8316948" y="461928"/>
+            <a:ext cx="638102" cy="638102"/>
+          </a:xfrm>
+          <a:prstGeom prst="rect">
+            <a:avLst/>
+          </a:prstGeom>
+          <a:noFill/>
+          <a:extLst>
+            <a:ext uri="{909E8E84-426E-40DD-AFC4-6F175D3DCCD1}">
+              <a14:hiddenFill xmlns:a14="http://schemas.microsoft.com/office/drawing/2010/main">
+                <a:solidFill>
+                  <a:srgbClr val="FFFFFF"/>
+                </a:solidFill>
+              </a14:hiddenFill>
+            </a:ext>
+          </a:extLst>
+        </p:spPr>
+      </p:pic>
     </p:spTree>
   </p:cSld>
   <p:clrMapOvr>
@@ -19084,7 +18697,7 @@
 </p:sld>
 </file>
 
-<file path=ppt/slides/slide12.xml><?xml version="1.0" encoding="utf-8"?>
+<file path=ppt/slides/slide11.xml><?xml version="1.0" encoding="utf-8"?>
 <p:sld xmlns:a="http://schemas.openxmlformats.org/drawingml/2006/main" xmlns:r="http://schemas.openxmlformats.org/officeDocument/2006/relationships" xmlns:p="http://schemas.openxmlformats.org/presentationml/2006/main">
   <p:cSld>
     <p:spTree>
@@ -19364,6 +18977,53 @@
           </a:p>
         </p:txBody>
       </p:sp>
+      <p:pic>
+        <p:nvPicPr>
+          <p:cNvPr id="2" name="Picture 2">
+            <a:extLst>
+              <a:ext uri="{FF2B5EF4-FFF2-40B4-BE49-F238E27FC236}">
+                <a16:creationId xmlns:a16="http://schemas.microsoft.com/office/drawing/2014/main" id="{F5D6441E-3DA5-C2A9-C46C-03B832F7761A}"/>
+              </a:ext>
+            </a:extLst>
+          </p:cNvPr>
+          <p:cNvPicPr>
+            <a:picLocks noChangeAspect="1" noChangeArrowheads="1"/>
+          </p:cNvPicPr>
+          <p:nvPr/>
+        </p:nvPicPr>
+        <p:blipFill>
+          <a:blip r:embed="rId3">
+            <a:extLst>
+              <a:ext uri="{28A0092B-C50C-407E-A947-70E740481C1C}">
+                <a14:useLocalDpi xmlns:a14="http://schemas.microsoft.com/office/drawing/2010/main" val="0"/>
+              </a:ext>
+            </a:extLst>
+          </a:blip>
+          <a:srcRect/>
+          <a:stretch>
+            <a:fillRect/>
+          </a:stretch>
+        </p:blipFill>
+        <p:spPr bwMode="auto">
+          <a:xfrm>
+            <a:off x="8316948" y="461928"/>
+            <a:ext cx="638102" cy="638102"/>
+          </a:xfrm>
+          <a:prstGeom prst="rect">
+            <a:avLst/>
+          </a:prstGeom>
+          <a:noFill/>
+          <a:extLst>
+            <a:ext uri="{909E8E84-426E-40DD-AFC4-6F175D3DCCD1}">
+              <a14:hiddenFill xmlns:a14="http://schemas.microsoft.com/office/drawing/2010/main">
+                <a:solidFill>
+                  <a:srgbClr val="FFFFFF"/>
+                </a:solidFill>
+              </a14:hiddenFill>
+            </a:ext>
+          </a:extLst>
+        </p:spPr>
+      </p:pic>
     </p:spTree>
   </p:cSld>
   <p:clrMapOvr>
@@ -19714,7 +19374,7 @@
 </p:sld>
 </file>
 
-<file path=ppt/slides/slide13.xml><?xml version="1.0" encoding="utf-8"?>
+<file path=ppt/slides/slide12.xml><?xml version="1.0" encoding="utf-8"?>
 <p:sld xmlns:a="http://schemas.openxmlformats.org/drawingml/2006/main" xmlns:r="http://schemas.openxmlformats.org/officeDocument/2006/relationships" xmlns:p="http://schemas.openxmlformats.org/presentationml/2006/main">
   <p:cSld>
     <p:spTree>
@@ -19870,7 +19530,7 @@
                 <a:tabLst/>
                 <a:defRPr/>
               </a:pPr>
-              <a:t>13</a:t>
+              <a:t>12</a:t>
             </a:fld>
             <a:endParaRPr kumimoji="0" sz="1000" b="0" i="0" u="none" strike="noStrike" kern="0" cap="none" spc="0" normalizeH="0" baseline="0" noProof="0">
               <a:ln>
@@ -19903,7 +19563,7 @@
 </p:sld>
 </file>
 
-<file path=ppt/slides/slide14.xml><?xml version="1.0" encoding="utf-8"?>
+<file path=ppt/slides/slide13.xml><?xml version="1.0" encoding="utf-8"?>
 <p:sld xmlns:a="http://schemas.openxmlformats.org/drawingml/2006/main" xmlns:r="http://schemas.openxmlformats.org/officeDocument/2006/relationships" xmlns:p="http://schemas.openxmlformats.org/presentationml/2006/main">
   <p:cSld>
     <p:spTree>
@@ -20278,6 +19938,53 @@
           </a:p>
         </p:txBody>
       </p:sp>
+      <p:pic>
+        <p:nvPicPr>
+          <p:cNvPr id="2" name="Picture 2">
+            <a:extLst>
+              <a:ext uri="{FF2B5EF4-FFF2-40B4-BE49-F238E27FC236}">
+                <a16:creationId xmlns:a16="http://schemas.microsoft.com/office/drawing/2014/main" id="{FC0FC3BF-D124-092D-6B84-7ABA4417A4D5}"/>
+              </a:ext>
+            </a:extLst>
+          </p:cNvPr>
+          <p:cNvPicPr>
+            <a:picLocks noChangeAspect="1" noChangeArrowheads="1"/>
+          </p:cNvPicPr>
+          <p:nvPr/>
+        </p:nvPicPr>
+        <p:blipFill>
+          <a:blip r:embed="rId3">
+            <a:extLst>
+              <a:ext uri="{28A0092B-C50C-407E-A947-70E740481C1C}">
+                <a14:useLocalDpi xmlns:a14="http://schemas.microsoft.com/office/drawing/2010/main" val="0"/>
+              </a:ext>
+            </a:extLst>
+          </a:blip>
+          <a:srcRect/>
+          <a:stretch>
+            <a:fillRect/>
+          </a:stretch>
+        </p:blipFill>
+        <p:spPr bwMode="auto">
+          <a:xfrm>
+            <a:off x="8316948" y="461928"/>
+            <a:ext cx="638102" cy="638102"/>
+          </a:xfrm>
+          <a:prstGeom prst="rect">
+            <a:avLst/>
+          </a:prstGeom>
+          <a:noFill/>
+          <a:extLst>
+            <a:ext uri="{909E8E84-426E-40DD-AFC4-6F175D3DCCD1}">
+              <a14:hiddenFill xmlns:a14="http://schemas.microsoft.com/office/drawing/2010/main">
+                <a:solidFill>
+                  <a:srgbClr val="FFFFFF"/>
+                </a:solidFill>
+              </a14:hiddenFill>
+            </a:ext>
+          </a:extLst>
+        </p:spPr>
+      </p:pic>
     </p:spTree>
     <p:extLst>
       <p:ext uri="{BB962C8B-B14F-4D97-AF65-F5344CB8AC3E}">
@@ -20291,7 +19998,7 @@
 </p:sld>
 </file>
 
-<file path=ppt/slides/slide15.xml><?xml version="1.0" encoding="utf-8"?>
+<file path=ppt/slides/slide14.xml><?xml version="1.0" encoding="utf-8"?>
 <p:sld xmlns:a="http://schemas.openxmlformats.org/drawingml/2006/main" xmlns:r="http://schemas.openxmlformats.org/officeDocument/2006/relationships" xmlns:p="http://schemas.openxmlformats.org/presentationml/2006/main">
   <p:cSld>
     <p:spTree>
@@ -21118,6 +20825,53 @@
           </a:graphicData>
         </a:graphic>
       </p:graphicFrame>
+      <p:pic>
+        <p:nvPicPr>
+          <p:cNvPr id="2" name="Picture 2">
+            <a:extLst>
+              <a:ext uri="{FF2B5EF4-FFF2-40B4-BE49-F238E27FC236}">
+                <a16:creationId xmlns:a16="http://schemas.microsoft.com/office/drawing/2014/main" id="{BAF2F968-870F-D878-57BE-4BCBD041F789}"/>
+              </a:ext>
+            </a:extLst>
+          </p:cNvPr>
+          <p:cNvPicPr>
+            <a:picLocks noChangeAspect="1" noChangeArrowheads="1"/>
+          </p:cNvPicPr>
+          <p:nvPr/>
+        </p:nvPicPr>
+        <p:blipFill>
+          <a:blip r:embed="rId3">
+            <a:extLst>
+              <a:ext uri="{28A0092B-C50C-407E-A947-70E740481C1C}">
+                <a14:useLocalDpi xmlns:a14="http://schemas.microsoft.com/office/drawing/2010/main" val="0"/>
+              </a:ext>
+            </a:extLst>
+          </a:blip>
+          <a:srcRect/>
+          <a:stretch>
+            <a:fillRect/>
+          </a:stretch>
+        </p:blipFill>
+        <p:spPr bwMode="auto">
+          <a:xfrm>
+            <a:off x="8316948" y="461928"/>
+            <a:ext cx="638102" cy="638102"/>
+          </a:xfrm>
+          <a:prstGeom prst="rect">
+            <a:avLst/>
+          </a:prstGeom>
+          <a:noFill/>
+          <a:extLst>
+            <a:ext uri="{909E8E84-426E-40DD-AFC4-6F175D3DCCD1}">
+              <a14:hiddenFill xmlns:a14="http://schemas.microsoft.com/office/drawing/2010/main">
+                <a:solidFill>
+                  <a:srgbClr val="FFFFFF"/>
+                </a:solidFill>
+              </a14:hiddenFill>
+            </a:ext>
+          </a:extLst>
+        </p:spPr>
+      </p:pic>
     </p:spTree>
     <p:extLst>
       <p:ext uri="{BB962C8B-B14F-4D97-AF65-F5344CB8AC3E}">
@@ -21131,7 +20885,7 @@
 </p:sld>
 </file>
 
-<file path=ppt/slides/slide16.xml><?xml version="1.0" encoding="utf-8"?>
+<file path=ppt/slides/slide15.xml><?xml version="1.0" encoding="utf-8"?>
 <p:sld xmlns:a="http://schemas.openxmlformats.org/drawingml/2006/main" xmlns:r="http://schemas.openxmlformats.org/officeDocument/2006/relationships" xmlns:p="http://schemas.openxmlformats.org/presentationml/2006/main">
   <p:cSld>
     <p:spTree>
@@ -22213,6 +21967,53 @@
           </a:fontRef>
         </p:style>
       </p:cxnSp>
+      <p:pic>
+        <p:nvPicPr>
+          <p:cNvPr id="4" name="Picture 2">
+            <a:extLst>
+              <a:ext uri="{FF2B5EF4-FFF2-40B4-BE49-F238E27FC236}">
+                <a16:creationId xmlns:a16="http://schemas.microsoft.com/office/drawing/2014/main" id="{09BB5813-F2B7-7651-505A-49A25D642E7B}"/>
+              </a:ext>
+            </a:extLst>
+          </p:cNvPr>
+          <p:cNvPicPr>
+            <a:picLocks noChangeAspect="1" noChangeArrowheads="1"/>
+          </p:cNvPicPr>
+          <p:nvPr/>
+        </p:nvPicPr>
+        <p:blipFill>
+          <a:blip r:embed="rId3">
+            <a:extLst>
+              <a:ext uri="{28A0092B-C50C-407E-A947-70E740481C1C}">
+                <a14:useLocalDpi xmlns:a14="http://schemas.microsoft.com/office/drawing/2010/main" val="0"/>
+              </a:ext>
+            </a:extLst>
+          </a:blip>
+          <a:srcRect/>
+          <a:stretch>
+            <a:fillRect/>
+          </a:stretch>
+        </p:blipFill>
+        <p:spPr bwMode="auto">
+          <a:xfrm>
+            <a:off x="8316948" y="461928"/>
+            <a:ext cx="638102" cy="638102"/>
+          </a:xfrm>
+          <a:prstGeom prst="rect">
+            <a:avLst/>
+          </a:prstGeom>
+          <a:noFill/>
+          <a:extLst>
+            <a:ext uri="{909E8E84-426E-40DD-AFC4-6F175D3DCCD1}">
+              <a14:hiddenFill xmlns:a14="http://schemas.microsoft.com/office/drawing/2010/main">
+                <a:solidFill>
+                  <a:srgbClr val="FFFFFF"/>
+                </a:solidFill>
+              </a14:hiddenFill>
+            </a:ext>
+          </a:extLst>
+        </p:spPr>
+      </p:pic>
     </p:spTree>
     <p:extLst>
       <p:ext uri="{BB962C8B-B14F-4D97-AF65-F5344CB8AC3E}">
@@ -22226,7 +22027,7 @@
 </p:sld>
 </file>
 
-<file path=ppt/slides/slide17.xml><?xml version="1.0" encoding="utf-8"?>
+<file path=ppt/slides/slide16.xml><?xml version="1.0" encoding="utf-8"?>
 <p:sld xmlns:a="http://schemas.openxmlformats.org/drawingml/2006/main" xmlns:r="http://schemas.openxmlformats.org/officeDocument/2006/relationships" xmlns:p="http://schemas.openxmlformats.org/presentationml/2006/main">
   <p:cSld>
     <p:spTree>
@@ -23766,6 +23567,53 @@
           </a:fontRef>
         </p:style>
       </p:cxnSp>
+      <p:pic>
+        <p:nvPicPr>
+          <p:cNvPr id="2" name="Picture 2">
+            <a:extLst>
+              <a:ext uri="{FF2B5EF4-FFF2-40B4-BE49-F238E27FC236}">
+                <a16:creationId xmlns:a16="http://schemas.microsoft.com/office/drawing/2014/main" id="{DF4CEE51-E2E3-3290-2337-239233628AD7}"/>
+              </a:ext>
+            </a:extLst>
+          </p:cNvPr>
+          <p:cNvPicPr>
+            <a:picLocks noChangeAspect="1" noChangeArrowheads="1"/>
+          </p:cNvPicPr>
+          <p:nvPr/>
+        </p:nvPicPr>
+        <p:blipFill>
+          <a:blip r:embed="rId3">
+            <a:extLst>
+              <a:ext uri="{28A0092B-C50C-407E-A947-70E740481C1C}">
+                <a14:useLocalDpi xmlns:a14="http://schemas.microsoft.com/office/drawing/2010/main" val="0"/>
+              </a:ext>
+            </a:extLst>
+          </a:blip>
+          <a:srcRect/>
+          <a:stretch>
+            <a:fillRect/>
+          </a:stretch>
+        </p:blipFill>
+        <p:spPr bwMode="auto">
+          <a:xfrm>
+            <a:off x="8316948" y="461928"/>
+            <a:ext cx="638102" cy="638102"/>
+          </a:xfrm>
+          <a:prstGeom prst="rect">
+            <a:avLst/>
+          </a:prstGeom>
+          <a:noFill/>
+          <a:extLst>
+            <a:ext uri="{909E8E84-426E-40DD-AFC4-6F175D3DCCD1}">
+              <a14:hiddenFill xmlns:a14="http://schemas.microsoft.com/office/drawing/2010/main">
+                <a:solidFill>
+                  <a:srgbClr val="FFFFFF"/>
+                </a:solidFill>
+              </a14:hiddenFill>
+            </a:ext>
+          </a:extLst>
+        </p:spPr>
+      </p:pic>
     </p:spTree>
     <p:extLst>
       <p:ext uri="{BB962C8B-B14F-4D97-AF65-F5344CB8AC3E}">
@@ -23779,7 +23627,7 @@
 </p:sld>
 </file>
 
-<file path=ppt/slides/slide18.xml><?xml version="1.0" encoding="utf-8"?>
+<file path=ppt/slides/slide17.xml><?xml version="1.0" encoding="utf-8"?>
 <p:sld xmlns:a="http://schemas.openxmlformats.org/drawingml/2006/main" xmlns:r="http://schemas.openxmlformats.org/officeDocument/2006/relationships" xmlns:p="http://schemas.openxmlformats.org/presentationml/2006/main">
   <p:cSld>
     <p:spTree>
@@ -24796,6 +24644,53 @@
           </a:fontRef>
         </p:style>
       </p:cxnSp>
+      <p:pic>
+        <p:nvPicPr>
+          <p:cNvPr id="2" name="Picture 2">
+            <a:extLst>
+              <a:ext uri="{FF2B5EF4-FFF2-40B4-BE49-F238E27FC236}">
+                <a16:creationId xmlns:a16="http://schemas.microsoft.com/office/drawing/2014/main" id="{88020654-9D96-DFD7-83F7-BD2A0A4F8CB1}"/>
+              </a:ext>
+            </a:extLst>
+          </p:cNvPr>
+          <p:cNvPicPr>
+            <a:picLocks noChangeAspect="1" noChangeArrowheads="1"/>
+          </p:cNvPicPr>
+          <p:nvPr/>
+        </p:nvPicPr>
+        <p:blipFill>
+          <a:blip r:embed="rId3">
+            <a:extLst>
+              <a:ext uri="{28A0092B-C50C-407E-A947-70E740481C1C}">
+                <a14:useLocalDpi xmlns:a14="http://schemas.microsoft.com/office/drawing/2010/main" val="0"/>
+              </a:ext>
+            </a:extLst>
+          </a:blip>
+          <a:srcRect/>
+          <a:stretch>
+            <a:fillRect/>
+          </a:stretch>
+        </p:blipFill>
+        <p:spPr bwMode="auto">
+          <a:xfrm>
+            <a:off x="8316948" y="461928"/>
+            <a:ext cx="638102" cy="638102"/>
+          </a:xfrm>
+          <a:prstGeom prst="rect">
+            <a:avLst/>
+          </a:prstGeom>
+          <a:noFill/>
+          <a:extLst>
+            <a:ext uri="{909E8E84-426E-40DD-AFC4-6F175D3DCCD1}">
+              <a14:hiddenFill xmlns:a14="http://schemas.microsoft.com/office/drawing/2010/main">
+                <a:solidFill>
+                  <a:srgbClr val="FFFFFF"/>
+                </a:solidFill>
+              </a14:hiddenFill>
+            </a:ext>
+          </a:extLst>
+        </p:spPr>
+      </p:pic>
     </p:spTree>
     <p:extLst>
       <p:ext uri="{BB962C8B-B14F-4D97-AF65-F5344CB8AC3E}">
@@ -24809,7 +24704,7 @@
 </p:sld>
 </file>
 
-<file path=ppt/slides/slide19.xml><?xml version="1.0" encoding="utf-8"?>
+<file path=ppt/slides/slide18.xml><?xml version="1.0" encoding="utf-8"?>
 <p:sld xmlns:a="http://schemas.openxmlformats.org/drawingml/2006/main" xmlns:r="http://schemas.openxmlformats.org/officeDocument/2006/relationships" xmlns:p="http://schemas.openxmlformats.org/presentationml/2006/main">
   <p:cSld>
     <p:spTree>
@@ -26445,6 +26340,53 @@
           </a:fontRef>
         </p:style>
       </p:cxnSp>
+      <p:pic>
+        <p:nvPicPr>
+          <p:cNvPr id="2" name="Picture 2">
+            <a:extLst>
+              <a:ext uri="{FF2B5EF4-FFF2-40B4-BE49-F238E27FC236}">
+                <a16:creationId xmlns:a16="http://schemas.microsoft.com/office/drawing/2014/main" id="{5C00A7DA-30E2-BD12-65FF-CBD404024554}"/>
+              </a:ext>
+            </a:extLst>
+          </p:cNvPr>
+          <p:cNvPicPr>
+            <a:picLocks noChangeAspect="1" noChangeArrowheads="1"/>
+          </p:cNvPicPr>
+          <p:nvPr/>
+        </p:nvPicPr>
+        <p:blipFill>
+          <a:blip r:embed="rId3">
+            <a:extLst>
+              <a:ext uri="{28A0092B-C50C-407E-A947-70E740481C1C}">
+                <a14:useLocalDpi xmlns:a14="http://schemas.microsoft.com/office/drawing/2010/main" val="0"/>
+              </a:ext>
+            </a:extLst>
+          </a:blip>
+          <a:srcRect/>
+          <a:stretch>
+            <a:fillRect/>
+          </a:stretch>
+        </p:blipFill>
+        <p:spPr bwMode="auto">
+          <a:xfrm>
+            <a:off x="8316948" y="461928"/>
+            <a:ext cx="638102" cy="638102"/>
+          </a:xfrm>
+          <a:prstGeom prst="rect">
+            <a:avLst/>
+          </a:prstGeom>
+          <a:noFill/>
+          <a:extLst>
+            <a:ext uri="{909E8E84-426E-40DD-AFC4-6F175D3DCCD1}">
+              <a14:hiddenFill xmlns:a14="http://schemas.microsoft.com/office/drawing/2010/main">
+                <a:solidFill>
+                  <a:srgbClr val="FFFFFF"/>
+                </a:solidFill>
+              </a14:hiddenFill>
+            </a:ext>
+          </a:extLst>
+        </p:spPr>
+      </p:pic>
     </p:spTree>
     <p:extLst>
       <p:ext uri="{BB962C8B-B14F-4D97-AF65-F5344CB8AC3E}">
@@ -26458,356 +26400,7 @@
 </p:sld>
 </file>
 
-<file path=ppt/slides/slide2.xml><?xml version="1.0" encoding="utf-8"?>
-<p:sld xmlns:a="http://schemas.openxmlformats.org/drawingml/2006/main" xmlns:r="http://schemas.openxmlformats.org/officeDocument/2006/relationships" xmlns:p="http://schemas.openxmlformats.org/presentationml/2006/main">
-  <p:cSld>
-    <p:spTree>
-      <p:nvGrpSpPr>
-        <p:cNvPr id="1" name=""/>
-        <p:cNvGrpSpPr/>
-        <p:nvPr/>
-      </p:nvGrpSpPr>
-      <p:grpSpPr>
-        <a:xfrm>
-          <a:off x="0" y="0"/>
-          <a:ext cx="0" cy="0"/>
-          <a:chOff x="0" y="0"/>
-          <a:chExt cx="0" cy="0"/>
-        </a:xfrm>
-      </p:grpSpPr>
-      <p:sp>
-        <p:nvSpPr>
-          <p:cNvPr id="2" name="Google Shape;67;p15">
-            <a:extLst>
-              <a:ext uri="{FF2B5EF4-FFF2-40B4-BE49-F238E27FC236}">
-                <a16:creationId xmlns:a16="http://schemas.microsoft.com/office/drawing/2014/main" id="{E6AB2555-FF89-0FFE-6F08-E03DCC42AA3D}"/>
-              </a:ext>
-            </a:extLst>
-          </p:cNvPr>
-          <p:cNvSpPr txBox="1">
-            <a:spLocks/>
-          </p:cNvSpPr>
-          <p:nvPr/>
-        </p:nvSpPr>
-        <p:spPr>
-          <a:xfrm>
-            <a:off x="517144" y="450150"/>
-            <a:ext cx="6367800" cy="4090800"/>
-          </a:xfrm>
-          <a:prstGeom prst="rect">
-            <a:avLst/>
-          </a:prstGeom>
-        </p:spPr>
-        <p:txBody>
-          <a:bodyPr spcFirstLastPara="1" wrap="square" lIns="91425" tIns="91425" rIns="91425" bIns="91425" anchor="ctr" anchorCtr="0">
-            <a:normAutofit/>
-          </a:bodyPr>
-          <a:lstStyle>
-            <a:defPPr marR="0" lvl="0" algn="l" rtl="0">
-              <a:lnSpc>
-                <a:spcPct val="100000"/>
-              </a:lnSpc>
-              <a:spcBef>
-                <a:spcPts val="0"/>
-              </a:spcBef>
-              <a:spcAft>
-                <a:spcPts val="0"/>
-              </a:spcAft>
-            </a:defPPr>
-            <a:lvl1pPr marR="0" lvl="0" algn="l" rtl="0">
-              <a:lnSpc>
-                <a:spcPct val="100000"/>
-              </a:lnSpc>
-              <a:spcBef>
-                <a:spcPts val="0"/>
-              </a:spcBef>
-              <a:spcAft>
-                <a:spcPts val="0"/>
-              </a:spcAft>
-              <a:buClr>
-                <a:srgbClr val="000000"/>
-              </a:buClr>
-              <a:buFont typeface="Arial"/>
-              <a:defRPr sz="1400" b="0" i="0" u="none" strike="noStrike" cap="none">
-                <a:solidFill>
-                  <a:srgbClr val="000000"/>
-                </a:solidFill>
-                <a:latin typeface="Arial"/>
-                <a:ea typeface="Arial"/>
-                <a:cs typeface="Arial"/>
-                <a:sym typeface="Arial"/>
-              </a:defRPr>
-            </a:lvl1pPr>
-            <a:lvl2pPr marR="0" lvl="1" algn="l" rtl="0">
-              <a:lnSpc>
-                <a:spcPct val="100000"/>
-              </a:lnSpc>
-              <a:spcBef>
-                <a:spcPts val="0"/>
-              </a:spcBef>
-              <a:spcAft>
-                <a:spcPts val="0"/>
-              </a:spcAft>
-              <a:buClr>
-                <a:srgbClr val="000000"/>
-              </a:buClr>
-              <a:buFont typeface="Arial"/>
-              <a:defRPr sz="1400" b="0" i="0" u="none" strike="noStrike" cap="none">
-                <a:solidFill>
-                  <a:srgbClr val="000000"/>
-                </a:solidFill>
-                <a:latin typeface="Arial"/>
-                <a:ea typeface="Arial"/>
-                <a:cs typeface="Arial"/>
-                <a:sym typeface="Arial"/>
-              </a:defRPr>
-            </a:lvl2pPr>
-            <a:lvl3pPr marR="0" lvl="2" algn="l" rtl="0">
-              <a:lnSpc>
-                <a:spcPct val="100000"/>
-              </a:lnSpc>
-              <a:spcBef>
-                <a:spcPts val="0"/>
-              </a:spcBef>
-              <a:spcAft>
-                <a:spcPts val="0"/>
-              </a:spcAft>
-              <a:buClr>
-                <a:srgbClr val="000000"/>
-              </a:buClr>
-              <a:buFont typeface="Arial"/>
-              <a:defRPr sz="1400" b="0" i="0" u="none" strike="noStrike" cap="none">
-                <a:solidFill>
-                  <a:srgbClr val="000000"/>
-                </a:solidFill>
-                <a:latin typeface="Arial"/>
-                <a:ea typeface="Arial"/>
-                <a:cs typeface="Arial"/>
-                <a:sym typeface="Arial"/>
-              </a:defRPr>
-            </a:lvl3pPr>
-            <a:lvl4pPr marR="0" lvl="3" algn="l" rtl="0">
-              <a:lnSpc>
-                <a:spcPct val="100000"/>
-              </a:lnSpc>
-              <a:spcBef>
-                <a:spcPts val="0"/>
-              </a:spcBef>
-              <a:spcAft>
-                <a:spcPts val="0"/>
-              </a:spcAft>
-              <a:buClr>
-                <a:srgbClr val="000000"/>
-              </a:buClr>
-              <a:buFont typeface="Arial"/>
-              <a:defRPr sz="1400" b="0" i="0" u="none" strike="noStrike" cap="none">
-                <a:solidFill>
-                  <a:srgbClr val="000000"/>
-                </a:solidFill>
-                <a:latin typeface="Arial"/>
-                <a:ea typeface="Arial"/>
-                <a:cs typeface="Arial"/>
-                <a:sym typeface="Arial"/>
-              </a:defRPr>
-            </a:lvl4pPr>
-            <a:lvl5pPr marR="0" lvl="4" algn="l" rtl="0">
-              <a:lnSpc>
-                <a:spcPct val="100000"/>
-              </a:lnSpc>
-              <a:spcBef>
-                <a:spcPts val="0"/>
-              </a:spcBef>
-              <a:spcAft>
-                <a:spcPts val="0"/>
-              </a:spcAft>
-              <a:buClr>
-                <a:srgbClr val="000000"/>
-              </a:buClr>
-              <a:buFont typeface="Arial"/>
-              <a:defRPr sz="1400" b="0" i="0" u="none" strike="noStrike" cap="none">
-                <a:solidFill>
-                  <a:srgbClr val="000000"/>
-                </a:solidFill>
-                <a:latin typeface="Arial"/>
-                <a:ea typeface="Arial"/>
-                <a:cs typeface="Arial"/>
-                <a:sym typeface="Arial"/>
-              </a:defRPr>
-            </a:lvl5pPr>
-            <a:lvl6pPr marR="0" lvl="5" algn="l" rtl="0">
-              <a:lnSpc>
-                <a:spcPct val="100000"/>
-              </a:lnSpc>
-              <a:spcBef>
-                <a:spcPts val="0"/>
-              </a:spcBef>
-              <a:spcAft>
-                <a:spcPts val="0"/>
-              </a:spcAft>
-              <a:buClr>
-                <a:srgbClr val="000000"/>
-              </a:buClr>
-              <a:buFont typeface="Arial"/>
-              <a:defRPr sz="1400" b="0" i="0" u="none" strike="noStrike" cap="none">
-                <a:solidFill>
-                  <a:srgbClr val="000000"/>
-                </a:solidFill>
-                <a:latin typeface="Arial"/>
-                <a:ea typeface="Arial"/>
-                <a:cs typeface="Arial"/>
-                <a:sym typeface="Arial"/>
-              </a:defRPr>
-            </a:lvl6pPr>
-            <a:lvl7pPr marR="0" lvl="6" algn="l" rtl="0">
-              <a:lnSpc>
-                <a:spcPct val="100000"/>
-              </a:lnSpc>
-              <a:spcBef>
-                <a:spcPts val="0"/>
-              </a:spcBef>
-              <a:spcAft>
-                <a:spcPts val="0"/>
-              </a:spcAft>
-              <a:buClr>
-                <a:srgbClr val="000000"/>
-              </a:buClr>
-              <a:buFont typeface="Arial"/>
-              <a:defRPr sz="1400" b="0" i="0" u="none" strike="noStrike" cap="none">
-                <a:solidFill>
-                  <a:srgbClr val="000000"/>
-                </a:solidFill>
-                <a:latin typeface="Arial"/>
-                <a:ea typeface="Arial"/>
-                <a:cs typeface="Arial"/>
-                <a:sym typeface="Arial"/>
-              </a:defRPr>
-            </a:lvl7pPr>
-            <a:lvl8pPr marR="0" lvl="7" algn="l" rtl="0">
-              <a:lnSpc>
-                <a:spcPct val="100000"/>
-              </a:lnSpc>
-              <a:spcBef>
-                <a:spcPts val="0"/>
-              </a:spcBef>
-              <a:spcAft>
-                <a:spcPts val="0"/>
-              </a:spcAft>
-              <a:buClr>
-                <a:srgbClr val="000000"/>
-              </a:buClr>
-              <a:buFont typeface="Arial"/>
-              <a:defRPr sz="1400" b="0" i="0" u="none" strike="noStrike" cap="none">
-                <a:solidFill>
-                  <a:srgbClr val="000000"/>
-                </a:solidFill>
-                <a:latin typeface="Arial"/>
-                <a:ea typeface="Arial"/>
-                <a:cs typeface="Arial"/>
-                <a:sym typeface="Arial"/>
-              </a:defRPr>
-            </a:lvl8pPr>
-            <a:lvl9pPr marR="0" lvl="8" algn="l" rtl="0">
-              <a:lnSpc>
-                <a:spcPct val="100000"/>
-              </a:lnSpc>
-              <a:spcBef>
-                <a:spcPts val="0"/>
-              </a:spcBef>
-              <a:spcAft>
-                <a:spcPts val="0"/>
-              </a:spcAft>
-              <a:buClr>
-                <a:srgbClr val="000000"/>
-              </a:buClr>
-              <a:buFont typeface="Arial"/>
-              <a:defRPr sz="1400" b="0" i="0" u="none" strike="noStrike" cap="none">
-                <a:solidFill>
-                  <a:srgbClr val="000000"/>
-                </a:solidFill>
-                <a:latin typeface="Arial"/>
-                <a:ea typeface="Arial"/>
-                <a:cs typeface="Arial"/>
-                <a:sym typeface="Arial"/>
-              </a:defRPr>
-            </a:lvl9pPr>
-          </a:lstStyle>
-          <a:p>
-            <a:r>
-              <a:rPr lang="en-GB" sz="4000" b="1" dirty="0">
-                <a:solidFill>
-                  <a:srgbClr val="FF0000"/>
-                </a:solidFill>
-              </a:rPr>
-              <a:t>Data Preprocessing</a:t>
-            </a:r>
-          </a:p>
-        </p:txBody>
-      </p:sp>
-      <mc:AlternateContent xmlns:mc="http://schemas.openxmlformats.org/markup-compatibility/2006" xmlns:p14="http://schemas.microsoft.com/office/powerpoint/2010/main">
-        <mc:Choice Requires="p14">
-          <p:contentPart p14:bwMode="auto" r:id="rId2">
-            <p14:nvContentPartPr>
-              <p14:cNvPr id="3" name="Ink 2">
-                <a:extLst>
-                  <a:ext uri="{FF2B5EF4-FFF2-40B4-BE49-F238E27FC236}">
-                    <a16:creationId xmlns:a16="http://schemas.microsoft.com/office/drawing/2014/main" id="{8FAD0D8C-F887-BEF9-C80D-56BA08FAED7F}"/>
-                  </a:ext>
-                </a:extLst>
-              </p14:cNvPr>
-              <p14:cNvContentPartPr/>
-              <p14:nvPr/>
-            </p14:nvContentPartPr>
-            <p14:xfrm>
-              <a:off x="4329000" y="2871360"/>
-              <a:ext cx="1087560" cy="172440"/>
-            </p14:xfrm>
-          </p:contentPart>
-        </mc:Choice>
-        <mc:Fallback xmlns="">
-          <p:pic>
-            <p:nvPicPr>
-              <p:cNvPr id="3" name="Ink 2">
-                <a:extLst>
-                  <a:ext uri="{FF2B5EF4-FFF2-40B4-BE49-F238E27FC236}">
-                    <a16:creationId xmlns:a16="http://schemas.microsoft.com/office/drawing/2014/main" id="{8FAD0D8C-F887-BEF9-C80D-56BA08FAED7F}"/>
-                  </a:ext>
-                </a:extLst>
-              </p:cNvPr>
-              <p:cNvPicPr/>
-              <p:nvPr/>
-            </p:nvPicPr>
-            <p:blipFill>
-              <a:blip r:embed="rId3"/>
-              <a:stretch>
-                <a:fillRect/>
-              </a:stretch>
-            </p:blipFill>
-            <p:spPr>
-              <a:xfrm>
-                <a:off x="4319640" y="2862000"/>
-                <a:ext cx="1106280" cy="191160"/>
-              </a:xfrm>
-              <a:prstGeom prst="rect">
-                <a:avLst/>
-              </a:prstGeom>
-            </p:spPr>
-          </p:pic>
-        </mc:Fallback>
-      </mc:AlternateContent>
-    </p:spTree>
-    <p:extLst>
-      <p:ext uri="{BB962C8B-B14F-4D97-AF65-F5344CB8AC3E}">
-        <p14:creationId xmlns:p14="http://schemas.microsoft.com/office/powerpoint/2010/main" val="767895912"/>
-      </p:ext>
-    </p:extLst>
-  </p:cSld>
-  <p:clrMapOvr>
-    <a:masterClrMapping/>
-  </p:clrMapOvr>
-</p:sld>
-</file>
-
-<file path=ppt/slides/slide20.xml><?xml version="1.0" encoding="utf-8"?>
+<file path=ppt/slides/slide19.xml><?xml version="1.0" encoding="utf-8"?>
 <p:sld xmlns:a="http://schemas.openxmlformats.org/drawingml/2006/main" xmlns:r="http://schemas.openxmlformats.org/officeDocument/2006/relationships" xmlns:p="http://schemas.openxmlformats.org/presentationml/2006/main">
   <p:cSld>
     <p:spTree>
@@ -26931,6 +26524,53 @@
           </a:p>
         </p:txBody>
       </p:sp>
+      <p:pic>
+        <p:nvPicPr>
+          <p:cNvPr id="2" name="Picture 2">
+            <a:extLst>
+              <a:ext uri="{FF2B5EF4-FFF2-40B4-BE49-F238E27FC236}">
+                <a16:creationId xmlns:a16="http://schemas.microsoft.com/office/drawing/2014/main" id="{32A95559-0574-F9B6-3509-07EDB24554AB}"/>
+              </a:ext>
+            </a:extLst>
+          </p:cNvPr>
+          <p:cNvPicPr>
+            <a:picLocks noChangeAspect="1" noChangeArrowheads="1"/>
+          </p:cNvPicPr>
+          <p:nvPr/>
+        </p:nvPicPr>
+        <p:blipFill>
+          <a:blip r:embed="rId3">
+            <a:extLst>
+              <a:ext uri="{28A0092B-C50C-407E-A947-70E740481C1C}">
+                <a14:useLocalDpi xmlns:a14="http://schemas.microsoft.com/office/drawing/2010/main" val="0"/>
+              </a:ext>
+            </a:extLst>
+          </a:blip>
+          <a:srcRect/>
+          <a:stretch>
+            <a:fillRect/>
+          </a:stretch>
+        </p:blipFill>
+        <p:spPr bwMode="auto">
+          <a:xfrm>
+            <a:off x="8316948" y="461928"/>
+            <a:ext cx="638102" cy="638102"/>
+          </a:xfrm>
+          <a:prstGeom prst="rect">
+            <a:avLst/>
+          </a:prstGeom>
+          <a:noFill/>
+          <a:extLst>
+            <a:ext uri="{909E8E84-426E-40DD-AFC4-6F175D3DCCD1}">
+              <a14:hiddenFill xmlns:a14="http://schemas.microsoft.com/office/drawing/2010/main">
+                <a:solidFill>
+                  <a:srgbClr val="FFFFFF"/>
+                </a:solidFill>
+              </a14:hiddenFill>
+            </a:ext>
+          </a:extLst>
+        </p:spPr>
+      </p:pic>
     </p:spTree>
     <p:extLst>
       <p:ext uri="{BB962C8B-B14F-4D97-AF65-F5344CB8AC3E}">
@@ -26944,7 +26584,670 @@
 </p:sld>
 </file>
 
-<file path=ppt/slides/slide21.xml><?xml version="1.0" encoding="utf-8"?>
+<file path=ppt/slides/slide2.xml><?xml version="1.0" encoding="utf-8"?>
+<p:sld xmlns:a="http://schemas.openxmlformats.org/drawingml/2006/main" xmlns:r="http://schemas.openxmlformats.org/officeDocument/2006/relationships" xmlns:p="http://schemas.openxmlformats.org/presentationml/2006/main">
+  <p:cSld>
+    <p:spTree>
+      <p:nvGrpSpPr>
+        <p:cNvPr id="1" name="Shape 90"/>
+        <p:cNvGrpSpPr/>
+        <p:nvPr/>
+      </p:nvGrpSpPr>
+      <p:grpSpPr>
+        <a:xfrm>
+          <a:off x="0" y="0"/>
+          <a:ext cx="0" cy="0"/>
+          <a:chOff x="0" y="0"/>
+          <a:chExt cx="0" cy="0"/>
+        </a:xfrm>
+      </p:grpSpPr>
+      <p:sp>
+        <p:nvSpPr>
+          <p:cNvPr id="91" name="Google Shape;91;p14"/>
+          <p:cNvSpPr txBox="1">
+            <a:spLocks noGrp="1"/>
+          </p:cNvSpPr>
+          <p:nvPr>
+            <p:ph type="title"/>
+          </p:nvPr>
+        </p:nvSpPr>
+        <p:spPr>
+          <a:xfrm>
+            <a:off x="729450" y="1318650"/>
+            <a:ext cx="7688700" cy="535200"/>
+          </a:xfrm>
+          <a:prstGeom prst="rect">
+            <a:avLst/>
+          </a:prstGeom>
+        </p:spPr>
+        <p:txBody>
+          <a:bodyPr spcFirstLastPara="1" wrap="square" lIns="91425" tIns="91425" rIns="91425" bIns="91425" anchor="t" anchorCtr="0">
+            <a:normAutofit fontScale="90000"/>
+          </a:bodyPr>
+          <a:lstStyle/>
+          <a:p>
+            <a:pPr marL="0" lvl="0" indent="0" algn="l" rtl="0">
+              <a:spcBef>
+                <a:spcPts val="0"/>
+              </a:spcBef>
+              <a:spcAft>
+                <a:spcPts val="0"/>
+              </a:spcAft>
+              <a:buNone/>
+            </a:pPr>
+            <a:r>
+              <a:rPr lang="en" dirty="0"/>
+              <a:t>What are features in ML and Why FE is important</a:t>
+            </a:r>
+            <a:endParaRPr dirty="0"/>
+          </a:p>
+        </p:txBody>
+      </p:sp>
+      <p:pic>
+        <p:nvPicPr>
+          <p:cNvPr id="92" name="Google Shape;92;p14"/>
+          <p:cNvPicPr preferRelativeResize="0"/>
+          <p:nvPr/>
+        </p:nvPicPr>
+        <p:blipFill>
+          <a:blip r:embed="rId3">
+            <a:alphaModFix/>
+            <a:duotone>
+              <a:prstClr val="black"/>
+              <a:schemeClr val="accent3">
+                <a:tint val="45000"/>
+                <a:satMod val="400000"/>
+              </a:schemeClr>
+            </a:duotone>
+          </a:blip>
+          <a:stretch>
+            <a:fillRect/>
+          </a:stretch>
+        </p:blipFill>
+        <p:spPr>
+          <a:xfrm>
+            <a:off x="934245" y="2161627"/>
+            <a:ext cx="6834248" cy="1706988"/>
+          </a:xfrm>
+          <a:prstGeom prst="rect">
+            <a:avLst/>
+          </a:prstGeom>
+          <a:noFill/>
+          <a:ln>
+            <a:noFill/>
+          </a:ln>
+        </p:spPr>
+      </p:pic>
+      <p:sp>
+        <p:nvSpPr>
+          <p:cNvPr id="2" name="TextBox 1">
+            <a:extLst>
+              <a:ext uri="{FF2B5EF4-FFF2-40B4-BE49-F238E27FC236}">
+                <a16:creationId xmlns:a16="http://schemas.microsoft.com/office/drawing/2014/main" id="{B4E5E664-1807-0D89-4965-F85B5FE2B0F4}"/>
+              </a:ext>
+            </a:extLst>
+          </p:cNvPr>
+          <p:cNvSpPr txBox="1"/>
+          <p:nvPr/>
+        </p:nvSpPr>
+        <p:spPr>
+          <a:xfrm>
+            <a:off x="725850" y="1853850"/>
+            <a:ext cx="7688700" cy="307777"/>
+          </a:xfrm>
+          <a:prstGeom prst="rect">
+            <a:avLst/>
+          </a:prstGeom>
+          <a:noFill/>
+        </p:spPr>
+        <p:txBody>
+          <a:bodyPr wrap="square" rtlCol="0">
+            <a:spAutoFit/>
+          </a:bodyPr>
+          <a:lstStyle/>
+          <a:p>
+            <a:r>
+              <a:rPr lang="en-GB" b="1" u="sng" dirty="0">
+                <a:solidFill>
+                  <a:schemeClr val="tx1"/>
+                </a:solidFill>
+              </a:rPr>
+              <a:t>Data Preprocessing </a:t>
+            </a:r>
+            <a:r>
+              <a:rPr lang="en-GB" dirty="0"/>
+              <a:t>is essentially making your data into format useable by ML algorithms</a:t>
+            </a:r>
+          </a:p>
+        </p:txBody>
+      </p:sp>
+      <p:sp>
+        <p:nvSpPr>
+          <p:cNvPr id="3" name="TextBox 2">
+            <a:extLst>
+              <a:ext uri="{FF2B5EF4-FFF2-40B4-BE49-F238E27FC236}">
+                <a16:creationId xmlns:a16="http://schemas.microsoft.com/office/drawing/2014/main" id="{B863A126-671B-4711-3BA3-3282C0DF0C53}"/>
+              </a:ext>
+            </a:extLst>
+          </p:cNvPr>
+          <p:cNvSpPr txBox="1"/>
+          <p:nvPr/>
+        </p:nvSpPr>
+        <p:spPr>
+          <a:xfrm>
+            <a:off x="784464" y="3999592"/>
+            <a:ext cx="7851535" cy="523220"/>
+          </a:xfrm>
+          <a:prstGeom prst="rect">
+            <a:avLst/>
+          </a:prstGeom>
+          <a:noFill/>
+        </p:spPr>
+        <p:txBody>
+          <a:bodyPr wrap="square" rtlCol="0">
+            <a:spAutoFit/>
+          </a:bodyPr>
+          <a:lstStyle/>
+          <a:p>
+            <a:r>
+              <a:rPr lang="en-GB" b="1" u="sng" dirty="0">
+                <a:solidFill>
+                  <a:schemeClr val="tx1"/>
+                </a:solidFill>
+              </a:rPr>
+              <a:t>Feature Engineering</a:t>
+            </a:r>
+            <a:r>
+              <a:rPr lang="en-GB" dirty="0"/>
+              <a:t>, however, involves using already existing variables to create new ones. </a:t>
+            </a:r>
+          </a:p>
+          <a:p>
+            <a:r>
+              <a:rPr lang="en-GB" dirty="0"/>
+              <a:t>This is a process that relies heavily on domain knowledge and thorough exploration of one’s data.  </a:t>
+            </a:r>
+          </a:p>
+        </p:txBody>
+      </p:sp>
+      <p:pic>
+        <p:nvPicPr>
+          <p:cNvPr id="1026" name="Picture 2">
+            <a:extLst>
+              <a:ext uri="{FF2B5EF4-FFF2-40B4-BE49-F238E27FC236}">
+                <a16:creationId xmlns:a16="http://schemas.microsoft.com/office/drawing/2014/main" id="{029FE07F-D926-44B7-0678-EBEDC7CA8C70}"/>
+              </a:ext>
+            </a:extLst>
+          </p:cNvPr>
+          <p:cNvPicPr>
+            <a:picLocks noChangeAspect="1" noChangeArrowheads="1"/>
+          </p:cNvPicPr>
+          <p:nvPr/>
+        </p:nvPicPr>
+        <p:blipFill>
+          <a:blip r:embed="rId4">
+            <a:extLst>
+              <a:ext uri="{28A0092B-C50C-407E-A947-70E740481C1C}">
+                <a14:useLocalDpi xmlns:a14="http://schemas.microsoft.com/office/drawing/2010/main" val="0"/>
+              </a:ext>
+            </a:extLst>
+          </a:blip>
+          <a:srcRect/>
+          <a:stretch>
+            <a:fillRect/>
+          </a:stretch>
+        </p:blipFill>
+        <p:spPr bwMode="auto">
+          <a:xfrm>
+            <a:off x="8316948" y="461928"/>
+            <a:ext cx="638102" cy="638102"/>
+          </a:xfrm>
+          <a:prstGeom prst="rect">
+            <a:avLst/>
+          </a:prstGeom>
+          <a:noFill/>
+          <a:extLst>
+            <a:ext uri="{909E8E84-426E-40DD-AFC4-6F175D3DCCD1}">
+              <a14:hiddenFill xmlns:a14="http://schemas.microsoft.com/office/drawing/2010/main">
+                <a:solidFill>
+                  <a:srgbClr val="FFFFFF"/>
+                </a:solidFill>
+              </a14:hiddenFill>
+            </a:ext>
+          </a:extLst>
+        </p:spPr>
+      </p:pic>
+    </p:spTree>
+  </p:cSld>
+  <p:clrMapOvr>
+    <a:masterClrMapping/>
+  </p:clrMapOvr>
+  <p:timing>
+    <p:tnLst>
+      <p:par>
+        <p:cTn id="1" dur="indefinite" restart="never" nodeType="tmRoot">
+          <p:childTnLst>
+            <p:seq concurrent="1" nextAc="seek">
+              <p:cTn id="2" dur="indefinite" nodeType="mainSeq">
+                <p:childTnLst>
+                  <p:par>
+                    <p:cTn id="3" fill="hold">
+                      <p:stCondLst>
+                        <p:cond delay="indefinite"/>
+                      </p:stCondLst>
+                      <p:childTnLst>
+                        <p:par>
+                          <p:cTn id="4" fill="hold">
+                            <p:stCondLst>
+                              <p:cond delay="0"/>
+                            </p:stCondLst>
+                            <p:childTnLst>
+                              <p:par>
+                                <p:cTn id="5" presetID="2" presetClass="entr" presetSubtype="4" fill="hold" grpId="0" nodeType="clickEffect">
+                                  <p:stCondLst>
+                                    <p:cond delay="0"/>
+                                  </p:stCondLst>
+                                  <p:childTnLst>
+                                    <p:set>
+                                      <p:cBhvr>
+                                        <p:cTn id="6" dur="1" fill="hold">
+                                          <p:stCondLst>
+                                            <p:cond delay="0"/>
+                                          </p:stCondLst>
+                                        </p:cTn>
+                                        <p:tgtEl>
+                                          <p:spTgt spid="2"/>
+                                        </p:tgtEl>
+                                        <p:attrNameLst>
+                                          <p:attrName>style.visibility</p:attrName>
+                                        </p:attrNameLst>
+                                      </p:cBhvr>
+                                      <p:to>
+                                        <p:strVal val="visible"/>
+                                      </p:to>
+                                    </p:set>
+                                    <p:anim calcmode="lin" valueType="num">
+                                      <p:cBhvr additive="base">
+                                        <p:cTn id="7" dur="500" fill="hold"/>
+                                        <p:tgtEl>
+                                          <p:spTgt spid="2"/>
+                                        </p:tgtEl>
+                                        <p:attrNameLst>
+                                          <p:attrName>ppt_x</p:attrName>
+                                        </p:attrNameLst>
+                                      </p:cBhvr>
+                                      <p:tavLst>
+                                        <p:tav tm="0">
+                                          <p:val>
+                                            <p:strVal val="#ppt_x"/>
+                                          </p:val>
+                                        </p:tav>
+                                        <p:tav tm="100000">
+                                          <p:val>
+                                            <p:strVal val="#ppt_x"/>
+                                          </p:val>
+                                        </p:tav>
+                                      </p:tavLst>
+                                    </p:anim>
+                                    <p:anim calcmode="lin" valueType="num">
+                                      <p:cBhvr additive="base">
+                                        <p:cTn id="8" dur="500" fill="hold"/>
+                                        <p:tgtEl>
+                                          <p:spTgt spid="2"/>
+                                        </p:tgtEl>
+                                        <p:attrNameLst>
+                                          <p:attrName>ppt_y</p:attrName>
+                                        </p:attrNameLst>
+                                      </p:cBhvr>
+                                      <p:tavLst>
+                                        <p:tav tm="0">
+                                          <p:val>
+                                            <p:strVal val="1+#ppt_h/2"/>
+                                          </p:val>
+                                        </p:tav>
+                                        <p:tav tm="100000">
+                                          <p:val>
+                                            <p:strVal val="#ppt_y"/>
+                                          </p:val>
+                                        </p:tav>
+                                      </p:tavLst>
+                                    </p:anim>
+                                  </p:childTnLst>
+                                </p:cTn>
+                              </p:par>
+                            </p:childTnLst>
+                          </p:cTn>
+                        </p:par>
+                      </p:childTnLst>
+                    </p:cTn>
+                  </p:par>
+                  <p:par>
+                    <p:cTn id="9" fill="hold">
+                      <p:stCondLst>
+                        <p:cond delay="indefinite"/>
+                      </p:stCondLst>
+                      <p:childTnLst>
+                        <p:par>
+                          <p:cTn id="10" fill="hold">
+                            <p:stCondLst>
+                              <p:cond delay="0"/>
+                            </p:stCondLst>
+                            <p:childTnLst>
+                              <p:par>
+                                <p:cTn id="11" presetID="2" presetClass="entr" presetSubtype="4" fill="hold" nodeType="clickEffect">
+                                  <p:stCondLst>
+                                    <p:cond delay="0"/>
+                                  </p:stCondLst>
+                                  <p:childTnLst>
+                                    <p:set>
+                                      <p:cBhvr>
+                                        <p:cTn id="12" dur="1" fill="hold">
+                                          <p:stCondLst>
+                                            <p:cond delay="0"/>
+                                          </p:stCondLst>
+                                        </p:cTn>
+                                        <p:tgtEl>
+                                          <p:spTgt spid="92"/>
+                                        </p:tgtEl>
+                                        <p:attrNameLst>
+                                          <p:attrName>style.visibility</p:attrName>
+                                        </p:attrNameLst>
+                                      </p:cBhvr>
+                                      <p:to>
+                                        <p:strVal val="visible"/>
+                                      </p:to>
+                                    </p:set>
+                                    <p:anim calcmode="lin" valueType="num">
+                                      <p:cBhvr additive="base">
+                                        <p:cTn id="13" dur="500" fill="hold"/>
+                                        <p:tgtEl>
+                                          <p:spTgt spid="92"/>
+                                        </p:tgtEl>
+                                        <p:attrNameLst>
+                                          <p:attrName>ppt_x</p:attrName>
+                                        </p:attrNameLst>
+                                      </p:cBhvr>
+                                      <p:tavLst>
+                                        <p:tav tm="0">
+                                          <p:val>
+                                            <p:strVal val="#ppt_x"/>
+                                          </p:val>
+                                        </p:tav>
+                                        <p:tav tm="100000">
+                                          <p:val>
+                                            <p:strVal val="#ppt_x"/>
+                                          </p:val>
+                                        </p:tav>
+                                      </p:tavLst>
+                                    </p:anim>
+                                    <p:anim calcmode="lin" valueType="num">
+                                      <p:cBhvr additive="base">
+                                        <p:cTn id="14" dur="500" fill="hold"/>
+                                        <p:tgtEl>
+                                          <p:spTgt spid="92"/>
+                                        </p:tgtEl>
+                                        <p:attrNameLst>
+                                          <p:attrName>ppt_y</p:attrName>
+                                        </p:attrNameLst>
+                                      </p:cBhvr>
+                                      <p:tavLst>
+                                        <p:tav tm="0">
+                                          <p:val>
+                                            <p:strVal val="1+#ppt_h/2"/>
+                                          </p:val>
+                                        </p:tav>
+                                        <p:tav tm="100000">
+                                          <p:val>
+                                            <p:strVal val="#ppt_y"/>
+                                          </p:val>
+                                        </p:tav>
+                                      </p:tavLst>
+                                    </p:anim>
+                                  </p:childTnLst>
+                                </p:cTn>
+                              </p:par>
+                            </p:childTnLst>
+                          </p:cTn>
+                        </p:par>
+                      </p:childTnLst>
+                    </p:cTn>
+                  </p:par>
+                  <p:par>
+                    <p:cTn id="15" fill="hold">
+                      <p:stCondLst>
+                        <p:cond delay="indefinite"/>
+                      </p:stCondLst>
+                      <p:childTnLst>
+                        <p:par>
+                          <p:cTn id="16" fill="hold">
+                            <p:stCondLst>
+                              <p:cond delay="0"/>
+                            </p:stCondLst>
+                            <p:childTnLst>
+                              <p:par>
+                                <p:cTn id="17" presetID="2" presetClass="entr" presetSubtype="4" fill="hold" grpId="0" nodeType="clickEffect">
+                                  <p:stCondLst>
+                                    <p:cond delay="0"/>
+                                  </p:stCondLst>
+                                  <p:childTnLst>
+                                    <p:set>
+                                      <p:cBhvr>
+                                        <p:cTn id="18" dur="1" fill="hold">
+                                          <p:stCondLst>
+                                            <p:cond delay="0"/>
+                                          </p:stCondLst>
+                                        </p:cTn>
+                                        <p:tgtEl>
+                                          <p:spTgt spid="3">
+                                            <p:txEl>
+                                              <p:pRg st="0" end="0"/>
+                                            </p:txEl>
+                                          </p:spTgt>
+                                        </p:tgtEl>
+                                        <p:attrNameLst>
+                                          <p:attrName>style.visibility</p:attrName>
+                                        </p:attrNameLst>
+                                      </p:cBhvr>
+                                      <p:to>
+                                        <p:strVal val="visible"/>
+                                      </p:to>
+                                    </p:set>
+                                    <p:anim calcmode="lin" valueType="num">
+                                      <p:cBhvr additive="base">
+                                        <p:cTn id="19" dur="500" fill="hold"/>
+                                        <p:tgtEl>
+                                          <p:spTgt spid="3">
+                                            <p:txEl>
+                                              <p:pRg st="0" end="0"/>
+                                            </p:txEl>
+                                          </p:spTgt>
+                                        </p:tgtEl>
+                                        <p:attrNameLst>
+                                          <p:attrName>ppt_x</p:attrName>
+                                        </p:attrNameLst>
+                                      </p:cBhvr>
+                                      <p:tavLst>
+                                        <p:tav tm="0">
+                                          <p:val>
+                                            <p:strVal val="#ppt_x"/>
+                                          </p:val>
+                                        </p:tav>
+                                        <p:tav tm="100000">
+                                          <p:val>
+                                            <p:strVal val="#ppt_x"/>
+                                          </p:val>
+                                        </p:tav>
+                                      </p:tavLst>
+                                    </p:anim>
+                                    <p:anim calcmode="lin" valueType="num">
+                                      <p:cBhvr additive="base">
+                                        <p:cTn id="20" dur="500" fill="hold"/>
+                                        <p:tgtEl>
+                                          <p:spTgt spid="3">
+                                            <p:txEl>
+                                              <p:pRg st="0" end="0"/>
+                                            </p:txEl>
+                                          </p:spTgt>
+                                        </p:tgtEl>
+                                        <p:attrNameLst>
+                                          <p:attrName>ppt_y</p:attrName>
+                                        </p:attrNameLst>
+                                      </p:cBhvr>
+                                      <p:tavLst>
+                                        <p:tav tm="0">
+                                          <p:val>
+                                            <p:strVal val="1+#ppt_h/2"/>
+                                          </p:val>
+                                        </p:tav>
+                                        <p:tav tm="100000">
+                                          <p:val>
+                                            <p:strVal val="#ppt_y"/>
+                                          </p:val>
+                                        </p:tav>
+                                      </p:tavLst>
+                                    </p:anim>
+                                  </p:childTnLst>
+                                </p:cTn>
+                              </p:par>
+                            </p:childTnLst>
+                          </p:cTn>
+                        </p:par>
+                      </p:childTnLst>
+                    </p:cTn>
+                  </p:par>
+                  <p:par>
+                    <p:cTn id="21" fill="hold">
+                      <p:stCondLst>
+                        <p:cond delay="indefinite"/>
+                      </p:stCondLst>
+                      <p:childTnLst>
+                        <p:par>
+                          <p:cTn id="22" fill="hold">
+                            <p:stCondLst>
+                              <p:cond delay="0"/>
+                            </p:stCondLst>
+                            <p:childTnLst>
+                              <p:par>
+                                <p:cTn id="23" presetID="2" presetClass="entr" presetSubtype="4" fill="hold" grpId="0" nodeType="clickEffect">
+                                  <p:stCondLst>
+                                    <p:cond delay="0"/>
+                                  </p:stCondLst>
+                                  <p:childTnLst>
+                                    <p:set>
+                                      <p:cBhvr>
+                                        <p:cTn id="24" dur="1" fill="hold">
+                                          <p:stCondLst>
+                                            <p:cond delay="0"/>
+                                          </p:stCondLst>
+                                        </p:cTn>
+                                        <p:tgtEl>
+                                          <p:spTgt spid="3">
+                                            <p:txEl>
+                                              <p:pRg st="1" end="1"/>
+                                            </p:txEl>
+                                          </p:spTgt>
+                                        </p:tgtEl>
+                                        <p:attrNameLst>
+                                          <p:attrName>style.visibility</p:attrName>
+                                        </p:attrNameLst>
+                                      </p:cBhvr>
+                                      <p:to>
+                                        <p:strVal val="visible"/>
+                                      </p:to>
+                                    </p:set>
+                                    <p:anim calcmode="lin" valueType="num">
+                                      <p:cBhvr additive="base">
+                                        <p:cTn id="25" dur="500" fill="hold"/>
+                                        <p:tgtEl>
+                                          <p:spTgt spid="3">
+                                            <p:txEl>
+                                              <p:pRg st="1" end="1"/>
+                                            </p:txEl>
+                                          </p:spTgt>
+                                        </p:tgtEl>
+                                        <p:attrNameLst>
+                                          <p:attrName>ppt_x</p:attrName>
+                                        </p:attrNameLst>
+                                      </p:cBhvr>
+                                      <p:tavLst>
+                                        <p:tav tm="0">
+                                          <p:val>
+                                            <p:strVal val="#ppt_x"/>
+                                          </p:val>
+                                        </p:tav>
+                                        <p:tav tm="100000">
+                                          <p:val>
+                                            <p:strVal val="#ppt_x"/>
+                                          </p:val>
+                                        </p:tav>
+                                      </p:tavLst>
+                                    </p:anim>
+                                    <p:anim calcmode="lin" valueType="num">
+                                      <p:cBhvr additive="base">
+                                        <p:cTn id="26" dur="500" fill="hold"/>
+                                        <p:tgtEl>
+                                          <p:spTgt spid="3">
+                                            <p:txEl>
+                                              <p:pRg st="1" end="1"/>
+                                            </p:txEl>
+                                          </p:spTgt>
+                                        </p:tgtEl>
+                                        <p:attrNameLst>
+                                          <p:attrName>ppt_y</p:attrName>
+                                        </p:attrNameLst>
+                                      </p:cBhvr>
+                                      <p:tavLst>
+                                        <p:tav tm="0">
+                                          <p:val>
+                                            <p:strVal val="1+#ppt_h/2"/>
+                                          </p:val>
+                                        </p:tav>
+                                        <p:tav tm="100000">
+                                          <p:val>
+                                            <p:strVal val="#ppt_y"/>
+                                          </p:val>
+                                        </p:tav>
+                                      </p:tavLst>
+                                    </p:anim>
+                                  </p:childTnLst>
+                                </p:cTn>
+                              </p:par>
+                            </p:childTnLst>
+                          </p:cTn>
+                        </p:par>
+                      </p:childTnLst>
+                    </p:cTn>
+                  </p:par>
+                </p:childTnLst>
+              </p:cTn>
+              <p:prevCondLst>
+                <p:cond evt="onPrev" delay="0">
+                  <p:tgtEl>
+                    <p:sldTgt/>
+                  </p:tgtEl>
+                </p:cond>
+              </p:prevCondLst>
+              <p:nextCondLst>
+                <p:cond evt="onNext" delay="0">
+                  <p:tgtEl>
+                    <p:sldTgt/>
+                  </p:tgtEl>
+                </p:cond>
+              </p:nextCondLst>
+            </p:seq>
+          </p:childTnLst>
+        </p:cTn>
+      </p:par>
+    </p:tnLst>
+    <p:bldLst>
+      <p:bldP spid="2" grpId="0"/>
+      <p:bldP spid="3" grpId="0" build="p"/>
+    </p:bldLst>
+  </p:timing>
+</p:sld>
+</file>
+
+<file path=ppt/slides/slide20.xml><?xml version="1.0" encoding="utf-8"?>
 <p:sld xmlns:a="http://schemas.openxmlformats.org/drawingml/2006/main" xmlns:r="http://schemas.openxmlformats.org/officeDocument/2006/relationships" xmlns:p="http://schemas.openxmlformats.org/presentationml/2006/main">
   <p:cSld>
     <p:spTree>
@@ -27068,6 +27371,53 @@
           </a:p>
         </p:txBody>
       </p:sp>
+      <p:pic>
+        <p:nvPicPr>
+          <p:cNvPr id="2" name="Picture 2">
+            <a:extLst>
+              <a:ext uri="{FF2B5EF4-FFF2-40B4-BE49-F238E27FC236}">
+                <a16:creationId xmlns:a16="http://schemas.microsoft.com/office/drawing/2014/main" id="{502E3283-29FA-FE89-D50A-B19F0B088D32}"/>
+              </a:ext>
+            </a:extLst>
+          </p:cNvPr>
+          <p:cNvPicPr>
+            <a:picLocks noChangeAspect="1" noChangeArrowheads="1"/>
+          </p:cNvPicPr>
+          <p:nvPr/>
+        </p:nvPicPr>
+        <p:blipFill>
+          <a:blip r:embed="rId3">
+            <a:extLst>
+              <a:ext uri="{28A0092B-C50C-407E-A947-70E740481C1C}">
+                <a14:useLocalDpi xmlns:a14="http://schemas.microsoft.com/office/drawing/2010/main" val="0"/>
+              </a:ext>
+            </a:extLst>
+          </a:blip>
+          <a:srcRect/>
+          <a:stretch>
+            <a:fillRect/>
+          </a:stretch>
+        </p:blipFill>
+        <p:spPr bwMode="auto">
+          <a:xfrm>
+            <a:off x="8316948" y="461928"/>
+            <a:ext cx="638102" cy="638102"/>
+          </a:xfrm>
+          <a:prstGeom prst="rect">
+            <a:avLst/>
+          </a:prstGeom>
+          <a:noFill/>
+          <a:extLst>
+            <a:ext uri="{909E8E84-426E-40DD-AFC4-6F175D3DCCD1}">
+              <a14:hiddenFill xmlns:a14="http://schemas.microsoft.com/office/drawing/2010/main">
+                <a:solidFill>
+                  <a:srgbClr val="FFFFFF"/>
+                </a:solidFill>
+              </a14:hiddenFill>
+            </a:ext>
+          </a:extLst>
+        </p:spPr>
+      </p:pic>
     </p:spTree>
     <p:extLst>
       <p:ext uri="{BB962C8B-B14F-4D97-AF65-F5344CB8AC3E}">
@@ -27081,7 +27431,7 @@
 </p:sld>
 </file>
 
-<file path=ppt/slides/slide22.xml><?xml version="1.0" encoding="utf-8"?>
+<file path=ppt/slides/slide21.xml><?xml version="1.0" encoding="utf-8"?>
 <p:sld xmlns:a="http://schemas.openxmlformats.org/drawingml/2006/main" xmlns:r="http://schemas.openxmlformats.org/officeDocument/2006/relationships" xmlns:p="http://schemas.openxmlformats.org/presentationml/2006/main">
   <p:cSld>
     <p:spTree>
@@ -27237,7 +27587,7 @@
                 <a:tabLst/>
                 <a:defRPr/>
               </a:pPr>
-              <a:t>22</a:t>
+              <a:t>21</a:t>
             </a:fld>
             <a:endParaRPr kumimoji="0" sz="1000" b="0" i="0" u="none" strike="noStrike" kern="0" cap="none" spc="0" normalizeH="0" baseline="0" noProof="0">
               <a:ln>
@@ -27270,7 +27620,7 @@
 </p:sld>
 </file>
 
-<file path=ppt/slides/slide23.xml><?xml version="1.0" encoding="utf-8"?>
+<file path=ppt/slides/slide22.xml><?xml version="1.0" encoding="utf-8"?>
 <p:sld xmlns:a="http://schemas.openxmlformats.org/drawingml/2006/main" xmlns:r="http://schemas.openxmlformats.org/officeDocument/2006/relationships" xmlns:p="http://schemas.openxmlformats.org/presentationml/2006/main">
   <p:cSld>
     <p:spTree>
@@ -27479,6 +27829,53 @@
           </a:p>
         </p:txBody>
       </p:sp>
+      <p:pic>
+        <p:nvPicPr>
+          <p:cNvPr id="4" name="Picture 2">
+            <a:extLst>
+              <a:ext uri="{FF2B5EF4-FFF2-40B4-BE49-F238E27FC236}">
+                <a16:creationId xmlns:a16="http://schemas.microsoft.com/office/drawing/2014/main" id="{B2511DB2-7725-6B8B-AF21-67C9864E673E}"/>
+              </a:ext>
+            </a:extLst>
+          </p:cNvPr>
+          <p:cNvPicPr>
+            <a:picLocks noChangeAspect="1" noChangeArrowheads="1"/>
+          </p:cNvPicPr>
+          <p:nvPr/>
+        </p:nvPicPr>
+        <p:blipFill>
+          <a:blip r:embed="rId3">
+            <a:extLst>
+              <a:ext uri="{28A0092B-C50C-407E-A947-70E740481C1C}">
+                <a14:useLocalDpi xmlns:a14="http://schemas.microsoft.com/office/drawing/2010/main" val="0"/>
+              </a:ext>
+            </a:extLst>
+          </a:blip>
+          <a:srcRect/>
+          <a:stretch>
+            <a:fillRect/>
+          </a:stretch>
+        </p:blipFill>
+        <p:spPr bwMode="auto">
+          <a:xfrm>
+            <a:off x="8316948" y="461928"/>
+            <a:ext cx="638102" cy="638102"/>
+          </a:xfrm>
+          <a:prstGeom prst="rect">
+            <a:avLst/>
+          </a:prstGeom>
+          <a:noFill/>
+          <a:extLst>
+            <a:ext uri="{909E8E84-426E-40DD-AFC4-6F175D3DCCD1}">
+              <a14:hiddenFill xmlns:a14="http://schemas.microsoft.com/office/drawing/2010/main">
+                <a:solidFill>
+                  <a:srgbClr val="FFFFFF"/>
+                </a:solidFill>
+              </a14:hiddenFill>
+            </a:ext>
+          </a:extLst>
+        </p:spPr>
+      </p:pic>
     </p:spTree>
     <p:extLst>
       <p:ext uri="{BB962C8B-B14F-4D97-AF65-F5344CB8AC3E}">
@@ -27762,7 +28159,7 @@
 </p:sld>
 </file>
 
-<file path=ppt/slides/slide24.xml><?xml version="1.0" encoding="utf-8"?>
+<file path=ppt/slides/slide23.xml><?xml version="1.0" encoding="utf-8"?>
 <p:sld xmlns:a="http://schemas.openxmlformats.org/drawingml/2006/main" xmlns:r="http://schemas.openxmlformats.org/officeDocument/2006/relationships" xmlns:p="http://schemas.openxmlformats.org/presentationml/2006/main">
   <p:cSld>
     <p:spTree>
@@ -29277,6 +29674,53 @@
           </a:graphicData>
         </a:graphic>
       </p:graphicFrame>
+      <p:pic>
+        <p:nvPicPr>
+          <p:cNvPr id="2" name="Picture 2">
+            <a:extLst>
+              <a:ext uri="{FF2B5EF4-FFF2-40B4-BE49-F238E27FC236}">
+                <a16:creationId xmlns:a16="http://schemas.microsoft.com/office/drawing/2014/main" id="{FC52420B-0CA7-4D80-E5E2-C35BAF8264B5}"/>
+              </a:ext>
+            </a:extLst>
+          </p:cNvPr>
+          <p:cNvPicPr>
+            <a:picLocks noChangeAspect="1" noChangeArrowheads="1"/>
+          </p:cNvPicPr>
+          <p:nvPr/>
+        </p:nvPicPr>
+        <p:blipFill>
+          <a:blip r:embed="rId3">
+            <a:extLst>
+              <a:ext uri="{28A0092B-C50C-407E-A947-70E740481C1C}">
+                <a14:useLocalDpi xmlns:a14="http://schemas.microsoft.com/office/drawing/2010/main" val="0"/>
+              </a:ext>
+            </a:extLst>
+          </a:blip>
+          <a:srcRect/>
+          <a:stretch>
+            <a:fillRect/>
+          </a:stretch>
+        </p:blipFill>
+        <p:spPr bwMode="auto">
+          <a:xfrm>
+            <a:off x="8316948" y="461928"/>
+            <a:ext cx="638102" cy="638102"/>
+          </a:xfrm>
+          <a:prstGeom prst="rect">
+            <a:avLst/>
+          </a:prstGeom>
+          <a:noFill/>
+          <a:extLst>
+            <a:ext uri="{909E8E84-426E-40DD-AFC4-6F175D3DCCD1}">
+              <a14:hiddenFill xmlns:a14="http://schemas.microsoft.com/office/drawing/2010/main">
+                <a:solidFill>
+                  <a:srgbClr val="FFFFFF"/>
+                </a:solidFill>
+              </a14:hiddenFill>
+            </a:ext>
+          </a:extLst>
+        </p:spPr>
+      </p:pic>
     </p:spTree>
     <p:extLst>
       <p:ext uri="{BB962C8B-B14F-4D97-AF65-F5344CB8AC3E}">
@@ -29290,7 +29734,7 @@
 </p:sld>
 </file>
 
-<file path=ppt/slides/slide25.xml><?xml version="1.0" encoding="utf-8"?>
+<file path=ppt/slides/slide24.xml><?xml version="1.0" encoding="utf-8"?>
 <p:sld xmlns:a="http://schemas.openxmlformats.org/drawingml/2006/main" xmlns:r="http://schemas.openxmlformats.org/officeDocument/2006/relationships" xmlns:p="http://schemas.openxmlformats.org/presentationml/2006/main">
   <p:cSld>
     <p:spTree>
@@ -29446,7 +29890,7 @@
                 <a:tabLst/>
                 <a:defRPr/>
               </a:pPr>
-              <a:t>25</a:t>
+              <a:t>24</a:t>
             </a:fld>
             <a:endParaRPr kumimoji="0" sz="1000" b="0" i="0" u="none" strike="noStrike" kern="0" cap="none" spc="0" normalizeH="0" baseline="0" noProof="0">
               <a:ln>
@@ -29479,7 +29923,7 @@
 </p:sld>
 </file>
 
-<file path=ppt/slides/slide26.xml><?xml version="1.0" encoding="utf-8"?>
+<file path=ppt/slides/slide25.xml><?xml version="1.0" encoding="utf-8"?>
 <p:sld xmlns:a="http://schemas.openxmlformats.org/drawingml/2006/main" xmlns:r="http://schemas.openxmlformats.org/officeDocument/2006/relationships" xmlns:p="http://schemas.openxmlformats.org/presentationml/2006/main">
   <p:cSld>
     <p:spTree>
@@ -30545,6 +30989,53 @@
           </a:p>
         </p:txBody>
       </p:sp>
+      <p:pic>
+        <p:nvPicPr>
+          <p:cNvPr id="2" name="Picture 2">
+            <a:extLst>
+              <a:ext uri="{FF2B5EF4-FFF2-40B4-BE49-F238E27FC236}">
+                <a16:creationId xmlns:a16="http://schemas.microsoft.com/office/drawing/2014/main" id="{FB0CC8A2-CBED-5D13-FB7C-690F84125393}"/>
+              </a:ext>
+            </a:extLst>
+          </p:cNvPr>
+          <p:cNvPicPr>
+            <a:picLocks noChangeAspect="1" noChangeArrowheads="1"/>
+          </p:cNvPicPr>
+          <p:nvPr/>
+        </p:nvPicPr>
+        <p:blipFill>
+          <a:blip r:embed="rId5">
+            <a:extLst>
+              <a:ext uri="{28A0092B-C50C-407E-A947-70E740481C1C}">
+                <a14:useLocalDpi xmlns:a14="http://schemas.microsoft.com/office/drawing/2010/main" val="0"/>
+              </a:ext>
+            </a:extLst>
+          </a:blip>
+          <a:srcRect/>
+          <a:stretch>
+            <a:fillRect/>
+          </a:stretch>
+        </p:blipFill>
+        <p:spPr bwMode="auto">
+          <a:xfrm>
+            <a:off x="8316948" y="461928"/>
+            <a:ext cx="638102" cy="638102"/>
+          </a:xfrm>
+          <a:prstGeom prst="rect">
+            <a:avLst/>
+          </a:prstGeom>
+          <a:noFill/>
+          <a:extLst>
+            <a:ext uri="{909E8E84-426E-40DD-AFC4-6F175D3DCCD1}">
+              <a14:hiddenFill xmlns:a14="http://schemas.microsoft.com/office/drawing/2010/main">
+                <a:solidFill>
+                  <a:srgbClr val="FFFFFF"/>
+                </a:solidFill>
+              </a14:hiddenFill>
+            </a:ext>
+          </a:extLst>
+        </p:spPr>
+      </p:pic>
     </p:spTree>
     <p:extLst>
       <p:ext uri="{BB962C8B-B14F-4D97-AF65-F5344CB8AC3E}">
@@ -31122,7 +31613,7 @@
 </p:sld>
 </file>
 
-<file path=ppt/slides/slide27.xml><?xml version="1.0" encoding="utf-8"?>
+<file path=ppt/slides/slide26.xml><?xml version="1.0" encoding="utf-8"?>
 <p:sld xmlns:a="http://schemas.openxmlformats.org/drawingml/2006/main" xmlns:r="http://schemas.openxmlformats.org/officeDocument/2006/relationships" xmlns:p="http://schemas.openxmlformats.org/presentationml/2006/main">
   <p:cSld>
     <p:spTree>
@@ -31455,6 +31946,53 @@
           </a:p>
         </p:txBody>
       </p:sp>
+      <p:pic>
+        <p:nvPicPr>
+          <p:cNvPr id="9" name="Picture 2">
+            <a:extLst>
+              <a:ext uri="{FF2B5EF4-FFF2-40B4-BE49-F238E27FC236}">
+                <a16:creationId xmlns:a16="http://schemas.microsoft.com/office/drawing/2014/main" id="{076E685B-687D-E0E2-8138-A75FE4F9D93E}"/>
+              </a:ext>
+            </a:extLst>
+          </p:cNvPr>
+          <p:cNvPicPr>
+            <a:picLocks noChangeAspect="1" noChangeArrowheads="1"/>
+          </p:cNvPicPr>
+          <p:nvPr/>
+        </p:nvPicPr>
+        <p:blipFill>
+          <a:blip r:embed="rId3">
+            <a:extLst>
+              <a:ext uri="{28A0092B-C50C-407E-A947-70E740481C1C}">
+                <a14:useLocalDpi xmlns:a14="http://schemas.microsoft.com/office/drawing/2010/main" val="0"/>
+              </a:ext>
+            </a:extLst>
+          </a:blip>
+          <a:srcRect/>
+          <a:stretch>
+            <a:fillRect/>
+          </a:stretch>
+        </p:blipFill>
+        <p:spPr bwMode="auto">
+          <a:xfrm>
+            <a:off x="8316948" y="461928"/>
+            <a:ext cx="638102" cy="638102"/>
+          </a:xfrm>
+          <a:prstGeom prst="rect">
+            <a:avLst/>
+          </a:prstGeom>
+          <a:noFill/>
+          <a:extLst>
+            <a:ext uri="{909E8E84-426E-40DD-AFC4-6F175D3DCCD1}">
+              <a14:hiddenFill xmlns:a14="http://schemas.microsoft.com/office/drawing/2010/main">
+                <a:solidFill>
+                  <a:srgbClr val="FFFFFF"/>
+                </a:solidFill>
+              </a14:hiddenFill>
+            </a:ext>
+          </a:extLst>
+        </p:spPr>
+      </p:pic>
     </p:spTree>
     <p:extLst>
       <p:ext uri="{BB962C8B-B14F-4D97-AF65-F5344CB8AC3E}">
@@ -32144,7 +32682,7 @@
 </p:sld>
 </file>
 
-<file path=ppt/slides/slide28.xml><?xml version="1.0" encoding="utf-8"?>
+<file path=ppt/slides/slide27.xml><?xml version="1.0" encoding="utf-8"?>
 <p:sld xmlns:a="http://schemas.openxmlformats.org/drawingml/2006/main" xmlns:r="http://schemas.openxmlformats.org/officeDocument/2006/relationships" xmlns:p="http://schemas.openxmlformats.org/presentationml/2006/main">
   <p:cSld>
     <p:spTree>
@@ -32448,7 +32986,7 @@
 </p:sld>
 </file>
 
-<file path=ppt/slides/slide29.xml><?xml version="1.0" encoding="utf-8"?>
+<file path=ppt/slides/slide28.xml><?xml version="1.0" encoding="utf-8"?>
 <p:sld xmlns:a="http://schemas.openxmlformats.org/drawingml/2006/main" xmlns:r="http://schemas.openxmlformats.org/officeDocument/2006/relationships" xmlns:p="http://schemas.openxmlformats.org/presentationml/2006/main">
   <p:cSld>
     <p:spTree>
@@ -32704,6 +33242,53 @@
           </a:p>
         </p:txBody>
       </p:sp>
+      <p:pic>
+        <p:nvPicPr>
+          <p:cNvPr id="2" name="Picture 2">
+            <a:extLst>
+              <a:ext uri="{FF2B5EF4-FFF2-40B4-BE49-F238E27FC236}">
+                <a16:creationId xmlns:a16="http://schemas.microsoft.com/office/drawing/2014/main" id="{311B3793-404A-0821-6CD5-3E4269B69638}"/>
+              </a:ext>
+            </a:extLst>
+          </p:cNvPr>
+          <p:cNvPicPr>
+            <a:picLocks noChangeAspect="1" noChangeArrowheads="1"/>
+          </p:cNvPicPr>
+          <p:nvPr/>
+        </p:nvPicPr>
+        <p:blipFill>
+          <a:blip r:embed="rId4">
+            <a:extLst>
+              <a:ext uri="{28A0092B-C50C-407E-A947-70E740481C1C}">
+                <a14:useLocalDpi xmlns:a14="http://schemas.microsoft.com/office/drawing/2010/main" val="0"/>
+              </a:ext>
+            </a:extLst>
+          </a:blip>
+          <a:srcRect/>
+          <a:stretch>
+            <a:fillRect/>
+          </a:stretch>
+        </p:blipFill>
+        <p:spPr bwMode="auto">
+          <a:xfrm>
+            <a:off x="8316948" y="461928"/>
+            <a:ext cx="638102" cy="638102"/>
+          </a:xfrm>
+          <a:prstGeom prst="rect">
+            <a:avLst/>
+          </a:prstGeom>
+          <a:noFill/>
+          <a:extLst>
+            <a:ext uri="{909E8E84-426E-40DD-AFC4-6F175D3DCCD1}">
+              <a14:hiddenFill xmlns:a14="http://schemas.microsoft.com/office/drawing/2010/main">
+                <a:solidFill>
+                  <a:srgbClr val="FFFFFF"/>
+                </a:solidFill>
+              </a14:hiddenFill>
+            </a:ext>
+          </a:extLst>
+        </p:spPr>
+      </p:pic>
     </p:spTree>
     <p:extLst>
       <p:ext uri="{BB962C8B-B14F-4D97-AF65-F5344CB8AC3E}">
@@ -33116,623 +33701,7 @@
 </p:sld>
 </file>
 
-<file path=ppt/slides/slide3.xml><?xml version="1.0" encoding="utf-8"?>
-<p:sld xmlns:a="http://schemas.openxmlformats.org/drawingml/2006/main" xmlns:r="http://schemas.openxmlformats.org/officeDocument/2006/relationships" xmlns:p="http://schemas.openxmlformats.org/presentationml/2006/main">
-  <p:cSld>
-    <p:spTree>
-      <p:nvGrpSpPr>
-        <p:cNvPr id="1" name="Shape 90"/>
-        <p:cNvGrpSpPr/>
-        <p:nvPr/>
-      </p:nvGrpSpPr>
-      <p:grpSpPr>
-        <a:xfrm>
-          <a:off x="0" y="0"/>
-          <a:ext cx="0" cy="0"/>
-          <a:chOff x="0" y="0"/>
-          <a:chExt cx="0" cy="0"/>
-        </a:xfrm>
-      </p:grpSpPr>
-      <p:sp>
-        <p:nvSpPr>
-          <p:cNvPr id="91" name="Google Shape;91;p14"/>
-          <p:cNvSpPr txBox="1">
-            <a:spLocks noGrp="1"/>
-          </p:cNvSpPr>
-          <p:nvPr>
-            <p:ph type="title"/>
-          </p:nvPr>
-        </p:nvSpPr>
-        <p:spPr>
-          <a:xfrm>
-            <a:off x="729450" y="1318650"/>
-            <a:ext cx="7688700" cy="535200"/>
-          </a:xfrm>
-          <a:prstGeom prst="rect">
-            <a:avLst/>
-          </a:prstGeom>
-        </p:spPr>
-        <p:txBody>
-          <a:bodyPr spcFirstLastPara="1" wrap="square" lIns="91425" tIns="91425" rIns="91425" bIns="91425" anchor="t" anchorCtr="0">
-            <a:normAutofit fontScale="90000"/>
-          </a:bodyPr>
-          <a:lstStyle/>
-          <a:p>
-            <a:pPr marL="0" lvl="0" indent="0" algn="l" rtl="0">
-              <a:spcBef>
-                <a:spcPts val="0"/>
-              </a:spcBef>
-              <a:spcAft>
-                <a:spcPts val="0"/>
-              </a:spcAft>
-              <a:buNone/>
-            </a:pPr>
-            <a:r>
-              <a:rPr lang="en" dirty="0"/>
-              <a:t>What are features in ML and Why FE is important</a:t>
-            </a:r>
-            <a:endParaRPr dirty="0"/>
-          </a:p>
-        </p:txBody>
-      </p:sp>
-      <p:pic>
-        <p:nvPicPr>
-          <p:cNvPr id="92" name="Google Shape;92;p14"/>
-          <p:cNvPicPr preferRelativeResize="0"/>
-          <p:nvPr/>
-        </p:nvPicPr>
-        <p:blipFill>
-          <a:blip r:embed="rId3">
-            <a:alphaModFix/>
-            <a:duotone>
-              <a:prstClr val="black"/>
-              <a:schemeClr val="accent3">
-                <a:tint val="45000"/>
-                <a:satMod val="400000"/>
-              </a:schemeClr>
-            </a:duotone>
-          </a:blip>
-          <a:stretch>
-            <a:fillRect/>
-          </a:stretch>
-        </p:blipFill>
-        <p:spPr>
-          <a:xfrm>
-            <a:off x="934245" y="2161627"/>
-            <a:ext cx="6834248" cy="1706988"/>
-          </a:xfrm>
-          <a:prstGeom prst="rect">
-            <a:avLst/>
-          </a:prstGeom>
-          <a:noFill/>
-          <a:ln>
-            <a:noFill/>
-          </a:ln>
-        </p:spPr>
-      </p:pic>
-      <p:sp>
-        <p:nvSpPr>
-          <p:cNvPr id="2" name="TextBox 1">
-            <a:extLst>
-              <a:ext uri="{FF2B5EF4-FFF2-40B4-BE49-F238E27FC236}">
-                <a16:creationId xmlns:a16="http://schemas.microsoft.com/office/drawing/2014/main" id="{B4E5E664-1807-0D89-4965-F85B5FE2B0F4}"/>
-              </a:ext>
-            </a:extLst>
-          </p:cNvPr>
-          <p:cNvSpPr txBox="1"/>
-          <p:nvPr/>
-        </p:nvSpPr>
-        <p:spPr>
-          <a:xfrm>
-            <a:off x="725850" y="1853850"/>
-            <a:ext cx="7688700" cy="307777"/>
-          </a:xfrm>
-          <a:prstGeom prst="rect">
-            <a:avLst/>
-          </a:prstGeom>
-          <a:noFill/>
-        </p:spPr>
-        <p:txBody>
-          <a:bodyPr wrap="square" rtlCol="0">
-            <a:spAutoFit/>
-          </a:bodyPr>
-          <a:lstStyle/>
-          <a:p>
-            <a:r>
-              <a:rPr lang="en-GB" b="1" u="sng" dirty="0">
-                <a:solidFill>
-                  <a:schemeClr val="tx1"/>
-                </a:solidFill>
-              </a:rPr>
-              <a:t>Data Preprocessing </a:t>
-            </a:r>
-            <a:r>
-              <a:rPr lang="en-GB" dirty="0"/>
-              <a:t>is essentially making your data into format useable by ML algorithms</a:t>
-            </a:r>
-          </a:p>
-        </p:txBody>
-      </p:sp>
-      <p:sp>
-        <p:nvSpPr>
-          <p:cNvPr id="3" name="TextBox 2">
-            <a:extLst>
-              <a:ext uri="{FF2B5EF4-FFF2-40B4-BE49-F238E27FC236}">
-                <a16:creationId xmlns:a16="http://schemas.microsoft.com/office/drawing/2014/main" id="{B863A126-671B-4711-3BA3-3282C0DF0C53}"/>
-              </a:ext>
-            </a:extLst>
-          </p:cNvPr>
-          <p:cNvSpPr txBox="1"/>
-          <p:nvPr/>
-        </p:nvSpPr>
-        <p:spPr>
-          <a:xfrm>
-            <a:off x="784464" y="3999592"/>
-            <a:ext cx="7851535" cy="523220"/>
-          </a:xfrm>
-          <a:prstGeom prst="rect">
-            <a:avLst/>
-          </a:prstGeom>
-          <a:noFill/>
-        </p:spPr>
-        <p:txBody>
-          <a:bodyPr wrap="square" rtlCol="0">
-            <a:spAutoFit/>
-          </a:bodyPr>
-          <a:lstStyle/>
-          <a:p>
-            <a:r>
-              <a:rPr lang="en-GB" b="1" u="sng" dirty="0">
-                <a:solidFill>
-                  <a:schemeClr val="tx1"/>
-                </a:solidFill>
-              </a:rPr>
-              <a:t>Feature Engineering</a:t>
-            </a:r>
-            <a:r>
-              <a:rPr lang="en-GB" dirty="0"/>
-              <a:t>, however, involves using already existing variables to create new ones. </a:t>
-            </a:r>
-          </a:p>
-          <a:p>
-            <a:r>
-              <a:rPr lang="en-GB" dirty="0"/>
-              <a:t>This is a process that relies heavily on domain knowledge and thorough exploration of one’s data.  </a:t>
-            </a:r>
-          </a:p>
-        </p:txBody>
-      </p:sp>
-    </p:spTree>
-  </p:cSld>
-  <p:clrMapOvr>
-    <a:masterClrMapping/>
-  </p:clrMapOvr>
-  <p:timing>
-    <p:tnLst>
-      <p:par>
-        <p:cTn id="1" dur="indefinite" restart="never" nodeType="tmRoot">
-          <p:childTnLst>
-            <p:seq concurrent="1" nextAc="seek">
-              <p:cTn id="2" dur="indefinite" nodeType="mainSeq">
-                <p:childTnLst>
-                  <p:par>
-                    <p:cTn id="3" fill="hold">
-                      <p:stCondLst>
-                        <p:cond delay="indefinite"/>
-                      </p:stCondLst>
-                      <p:childTnLst>
-                        <p:par>
-                          <p:cTn id="4" fill="hold">
-                            <p:stCondLst>
-                              <p:cond delay="0"/>
-                            </p:stCondLst>
-                            <p:childTnLst>
-                              <p:par>
-                                <p:cTn id="5" presetID="2" presetClass="entr" presetSubtype="4" fill="hold" grpId="0" nodeType="clickEffect">
-                                  <p:stCondLst>
-                                    <p:cond delay="0"/>
-                                  </p:stCondLst>
-                                  <p:childTnLst>
-                                    <p:set>
-                                      <p:cBhvr>
-                                        <p:cTn id="6" dur="1" fill="hold">
-                                          <p:stCondLst>
-                                            <p:cond delay="0"/>
-                                          </p:stCondLst>
-                                        </p:cTn>
-                                        <p:tgtEl>
-                                          <p:spTgt spid="2"/>
-                                        </p:tgtEl>
-                                        <p:attrNameLst>
-                                          <p:attrName>style.visibility</p:attrName>
-                                        </p:attrNameLst>
-                                      </p:cBhvr>
-                                      <p:to>
-                                        <p:strVal val="visible"/>
-                                      </p:to>
-                                    </p:set>
-                                    <p:anim calcmode="lin" valueType="num">
-                                      <p:cBhvr additive="base">
-                                        <p:cTn id="7" dur="500" fill="hold"/>
-                                        <p:tgtEl>
-                                          <p:spTgt spid="2"/>
-                                        </p:tgtEl>
-                                        <p:attrNameLst>
-                                          <p:attrName>ppt_x</p:attrName>
-                                        </p:attrNameLst>
-                                      </p:cBhvr>
-                                      <p:tavLst>
-                                        <p:tav tm="0">
-                                          <p:val>
-                                            <p:strVal val="#ppt_x"/>
-                                          </p:val>
-                                        </p:tav>
-                                        <p:tav tm="100000">
-                                          <p:val>
-                                            <p:strVal val="#ppt_x"/>
-                                          </p:val>
-                                        </p:tav>
-                                      </p:tavLst>
-                                    </p:anim>
-                                    <p:anim calcmode="lin" valueType="num">
-                                      <p:cBhvr additive="base">
-                                        <p:cTn id="8" dur="500" fill="hold"/>
-                                        <p:tgtEl>
-                                          <p:spTgt spid="2"/>
-                                        </p:tgtEl>
-                                        <p:attrNameLst>
-                                          <p:attrName>ppt_y</p:attrName>
-                                        </p:attrNameLst>
-                                      </p:cBhvr>
-                                      <p:tavLst>
-                                        <p:tav tm="0">
-                                          <p:val>
-                                            <p:strVal val="1+#ppt_h/2"/>
-                                          </p:val>
-                                        </p:tav>
-                                        <p:tav tm="100000">
-                                          <p:val>
-                                            <p:strVal val="#ppt_y"/>
-                                          </p:val>
-                                        </p:tav>
-                                      </p:tavLst>
-                                    </p:anim>
-                                  </p:childTnLst>
-                                </p:cTn>
-                              </p:par>
-                            </p:childTnLst>
-                          </p:cTn>
-                        </p:par>
-                      </p:childTnLst>
-                    </p:cTn>
-                  </p:par>
-                  <p:par>
-                    <p:cTn id="9" fill="hold">
-                      <p:stCondLst>
-                        <p:cond delay="indefinite"/>
-                      </p:stCondLst>
-                      <p:childTnLst>
-                        <p:par>
-                          <p:cTn id="10" fill="hold">
-                            <p:stCondLst>
-                              <p:cond delay="0"/>
-                            </p:stCondLst>
-                            <p:childTnLst>
-                              <p:par>
-                                <p:cTn id="11" presetID="2" presetClass="entr" presetSubtype="4" fill="hold" nodeType="clickEffect">
-                                  <p:stCondLst>
-                                    <p:cond delay="0"/>
-                                  </p:stCondLst>
-                                  <p:childTnLst>
-                                    <p:set>
-                                      <p:cBhvr>
-                                        <p:cTn id="12" dur="1" fill="hold">
-                                          <p:stCondLst>
-                                            <p:cond delay="0"/>
-                                          </p:stCondLst>
-                                        </p:cTn>
-                                        <p:tgtEl>
-                                          <p:spTgt spid="92"/>
-                                        </p:tgtEl>
-                                        <p:attrNameLst>
-                                          <p:attrName>style.visibility</p:attrName>
-                                        </p:attrNameLst>
-                                      </p:cBhvr>
-                                      <p:to>
-                                        <p:strVal val="visible"/>
-                                      </p:to>
-                                    </p:set>
-                                    <p:anim calcmode="lin" valueType="num">
-                                      <p:cBhvr additive="base">
-                                        <p:cTn id="13" dur="500" fill="hold"/>
-                                        <p:tgtEl>
-                                          <p:spTgt spid="92"/>
-                                        </p:tgtEl>
-                                        <p:attrNameLst>
-                                          <p:attrName>ppt_x</p:attrName>
-                                        </p:attrNameLst>
-                                      </p:cBhvr>
-                                      <p:tavLst>
-                                        <p:tav tm="0">
-                                          <p:val>
-                                            <p:strVal val="#ppt_x"/>
-                                          </p:val>
-                                        </p:tav>
-                                        <p:tav tm="100000">
-                                          <p:val>
-                                            <p:strVal val="#ppt_x"/>
-                                          </p:val>
-                                        </p:tav>
-                                      </p:tavLst>
-                                    </p:anim>
-                                    <p:anim calcmode="lin" valueType="num">
-                                      <p:cBhvr additive="base">
-                                        <p:cTn id="14" dur="500" fill="hold"/>
-                                        <p:tgtEl>
-                                          <p:spTgt spid="92"/>
-                                        </p:tgtEl>
-                                        <p:attrNameLst>
-                                          <p:attrName>ppt_y</p:attrName>
-                                        </p:attrNameLst>
-                                      </p:cBhvr>
-                                      <p:tavLst>
-                                        <p:tav tm="0">
-                                          <p:val>
-                                            <p:strVal val="1+#ppt_h/2"/>
-                                          </p:val>
-                                        </p:tav>
-                                        <p:tav tm="100000">
-                                          <p:val>
-                                            <p:strVal val="#ppt_y"/>
-                                          </p:val>
-                                        </p:tav>
-                                      </p:tavLst>
-                                    </p:anim>
-                                  </p:childTnLst>
-                                </p:cTn>
-                              </p:par>
-                            </p:childTnLst>
-                          </p:cTn>
-                        </p:par>
-                      </p:childTnLst>
-                    </p:cTn>
-                  </p:par>
-                  <p:par>
-                    <p:cTn id="15" fill="hold">
-                      <p:stCondLst>
-                        <p:cond delay="indefinite"/>
-                      </p:stCondLst>
-                      <p:childTnLst>
-                        <p:par>
-                          <p:cTn id="16" fill="hold">
-                            <p:stCondLst>
-                              <p:cond delay="0"/>
-                            </p:stCondLst>
-                            <p:childTnLst>
-                              <p:par>
-                                <p:cTn id="17" presetID="2" presetClass="entr" presetSubtype="4" fill="hold" grpId="0" nodeType="clickEffect">
-                                  <p:stCondLst>
-                                    <p:cond delay="0"/>
-                                  </p:stCondLst>
-                                  <p:childTnLst>
-                                    <p:set>
-                                      <p:cBhvr>
-                                        <p:cTn id="18" dur="1" fill="hold">
-                                          <p:stCondLst>
-                                            <p:cond delay="0"/>
-                                          </p:stCondLst>
-                                        </p:cTn>
-                                        <p:tgtEl>
-                                          <p:spTgt spid="3">
-                                            <p:txEl>
-                                              <p:pRg st="0" end="0"/>
-                                            </p:txEl>
-                                          </p:spTgt>
-                                        </p:tgtEl>
-                                        <p:attrNameLst>
-                                          <p:attrName>style.visibility</p:attrName>
-                                        </p:attrNameLst>
-                                      </p:cBhvr>
-                                      <p:to>
-                                        <p:strVal val="visible"/>
-                                      </p:to>
-                                    </p:set>
-                                    <p:anim calcmode="lin" valueType="num">
-                                      <p:cBhvr additive="base">
-                                        <p:cTn id="19" dur="500" fill="hold"/>
-                                        <p:tgtEl>
-                                          <p:spTgt spid="3">
-                                            <p:txEl>
-                                              <p:pRg st="0" end="0"/>
-                                            </p:txEl>
-                                          </p:spTgt>
-                                        </p:tgtEl>
-                                        <p:attrNameLst>
-                                          <p:attrName>ppt_x</p:attrName>
-                                        </p:attrNameLst>
-                                      </p:cBhvr>
-                                      <p:tavLst>
-                                        <p:tav tm="0">
-                                          <p:val>
-                                            <p:strVal val="#ppt_x"/>
-                                          </p:val>
-                                        </p:tav>
-                                        <p:tav tm="100000">
-                                          <p:val>
-                                            <p:strVal val="#ppt_x"/>
-                                          </p:val>
-                                        </p:tav>
-                                      </p:tavLst>
-                                    </p:anim>
-                                    <p:anim calcmode="lin" valueType="num">
-                                      <p:cBhvr additive="base">
-                                        <p:cTn id="20" dur="500" fill="hold"/>
-                                        <p:tgtEl>
-                                          <p:spTgt spid="3">
-                                            <p:txEl>
-                                              <p:pRg st="0" end="0"/>
-                                            </p:txEl>
-                                          </p:spTgt>
-                                        </p:tgtEl>
-                                        <p:attrNameLst>
-                                          <p:attrName>ppt_y</p:attrName>
-                                        </p:attrNameLst>
-                                      </p:cBhvr>
-                                      <p:tavLst>
-                                        <p:tav tm="0">
-                                          <p:val>
-                                            <p:strVal val="1+#ppt_h/2"/>
-                                          </p:val>
-                                        </p:tav>
-                                        <p:tav tm="100000">
-                                          <p:val>
-                                            <p:strVal val="#ppt_y"/>
-                                          </p:val>
-                                        </p:tav>
-                                      </p:tavLst>
-                                    </p:anim>
-                                  </p:childTnLst>
-                                </p:cTn>
-                              </p:par>
-                            </p:childTnLst>
-                          </p:cTn>
-                        </p:par>
-                      </p:childTnLst>
-                    </p:cTn>
-                  </p:par>
-                  <p:par>
-                    <p:cTn id="21" fill="hold">
-                      <p:stCondLst>
-                        <p:cond delay="indefinite"/>
-                      </p:stCondLst>
-                      <p:childTnLst>
-                        <p:par>
-                          <p:cTn id="22" fill="hold">
-                            <p:stCondLst>
-                              <p:cond delay="0"/>
-                            </p:stCondLst>
-                            <p:childTnLst>
-                              <p:par>
-                                <p:cTn id="23" presetID="2" presetClass="entr" presetSubtype="4" fill="hold" grpId="0" nodeType="clickEffect">
-                                  <p:stCondLst>
-                                    <p:cond delay="0"/>
-                                  </p:stCondLst>
-                                  <p:childTnLst>
-                                    <p:set>
-                                      <p:cBhvr>
-                                        <p:cTn id="24" dur="1" fill="hold">
-                                          <p:stCondLst>
-                                            <p:cond delay="0"/>
-                                          </p:stCondLst>
-                                        </p:cTn>
-                                        <p:tgtEl>
-                                          <p:spTgt spid="3">
-                                            <p:txEl>
-                                              <p:pRg st="1" end="1"/>
-                                            </p:txEl>
-                                          </p:spTgt>
-                                        </p:tgtEl>
-                                        <p:attrNameLst>
-                                          <p:attrName>style.visibility</p:attrName>
-                                        </p:attrNameLst>
-                                      </p:cBhvr>
-                                      <p:to>
-                                        <p:strVal val="visible"/>
-                                      </p:to>
-                                    </p:set>
-                                    <p:anim calcmode="lin" valueType="num">
-                                      <p:cBhvr additive="base">
-                                        <p:cTn id="25" dur="500" fill="hold"/>
-                                        <p:tgtEl>
-                                          <p:spTgt spid="3">
-                                            <p:txEl>
-                                              <p:pRg st="1" end="1"/>
-                                            </p:txEl>
-                                          </p:spTgt>
-                                        </p:tgtEl>
-                                        <p:attrNameLst>
-                                          <p:attrName>ppt_x</p:attrName>
-                                        </p:attrNameLst>
-                                      </p:cBhvr>
-                                      <p:tavLst>
-                                        <p:tav tm="0">
-                                          <p:val>
-                                            <p:strVal val="#ppt_x"/>
-                                          </p:val>
-                                        </p:tav>
-                                        <p:tav tm="100000">
-                                          <p:val>
-                                            <p:strVal val="#ppt_x"/>
-                                          </p:val>
-                                        </p:tav>
-                                      </p:tavLst>
-                                    </p:anim>
-                                    <p:anim calcmode="lin" valueType="num">
-                                      <p:cBhvr additive="base">
-                                        <p:cTn id="26" dur="500" fill="hold"/>
-                                        <p:tgtEl>
-                                          <p:spTgt spid="3">
-                                            <p:txEl>
-                                              <p:pRg st="1" end="1"/>
-                                            </p:txEl>
-                                          </p:spTgt>
-                                        </p:tgtEl>
-                                        <p:attrNameLst>
-                                          <p:attrName>ppt_y</p:attrName>
-                                        </p:attrNameLst>
-                                      </p:cBhvr>
-                                      <p:tavLst>
-                                        <p:tav tm="0">
-                                          <p:val>
-                                            <p:strVal val="1+#ppt_h/2"/>
-                                          </p:val>
-                                        </p:tav>
-                                        <p:tav tm="100000">
-                                          <p:val>
-                                            <p:strVal val="#ppt_y"/>
-                                          </p:val>
-                                        </p:tav>
-                                      </p:tavLst>
-                                    </p:anim>
-                                  </p:childTnLst>
-                                </p:cTn>
-                              </p:par>
-                            </p:childTnLst>
-                          </p:cTn>
-                        </p:par>
-                      </p:childTnLst>
-                    </p:cTn>
-                  </p:par>
-                </p:childTnLst>
-              </p:cTn>
-              <p:prevCondLst>
-                <p:cond evt="onPrev" delay="0">
-                  <p:tgtEl>
-                    <p:sldTgt/>
-                  </p:tgtEl>
-                </p:cond>
-              </p:prevCondLst>
-              <p:nextCondLst>
-                <p:cond evt="onNext" delay="0">
-                  <p:tgtEl>
-                    <p:sldTgt/>
-                  </p:tgtEl>
-                </p:cond>
-              </p:nextCondLst>
-            </p:seq>
-          </p:childTnLst>
-        </p:cTn>
-      </p:par>
-    </p:tnLst>
-    <p:bldLst>
-      <p:bldP spid="2" grpId="0"/>
-      <p:bldP spid="3" grpId="0" build="p"/>
-    </p:bldLst>
-  </p:timing>
-</p:sld>
-</file>
-
-<file path=ppt/slides/slide30.xml><?xml version="1.0" encoding="utf-8"?>
+<file path=ppt/slides/slide29.xml><?xml version="1.0" encoding="utf-8"?>
 <p:sld xmlns:a="http://schemas.openxmlformats.org/drawingml/2006/main" xmlns:r="http://schemas.openxmlformats.org/officeDocument/2006/relationships" xmlns:p="http://schemas.openxmlformats.org/presentationml/2006/main">
   <p:cSld>
     <p:spTree>
@@ -33919,7 +33888,7 @@
                 <a:tabLst/>
                 <a:defRPr/>
               </a:pPr>
-              <a:t>30</a:t>
+              <a:t>29</a:t>
             </a:fld>
             <a:endParaRPr kumimoji="0" sz="1000" b="0" i="0" u="none" strike="noStrike" kern="0" cap="none" spc="0" normalizeH="0" baseline="0" noProof="0">
               <a:ln>
@@ -33952,311 +33921,7 @@
 </p:sld>
 </file>
 
-<file path=ppt/slides/slide31.xml><?xml version="1.0" encoding="utf-8"?>
-<p:sld xmlns:a="http://schemas.openxmlformats.org/drawingml/2006/main" xmlns:r="http://schemas.openxmlformats.org/officeDocument/2006/relationships" xmlns:p="http://schemas.openxmlformats.org/presentationml/2006/main">
-  <p:cSld>
-    <p:spTree>
-      <p:nvGrpSpPr>
-        <p:cNvPr id="1" name="">
-          <a:extLst>
-            <a:ext uri="{FF2B5EF4-FFF2-40B4-BE49-F238E27FC236}">
-              <a16:creationId xmlns:a16="http://schemas.microsoft.com/office/drawing/2014/main" id="{8B98145F-CF69-3E26-DDA7-FD06D9BD9F0B}"/>
-            </a:ext>
-          </a:extLst>
-        </p:cNvPr>
-        <p:cNvGrpSpPr/>
-        <p:nvPr/>
-      </p:nvGrpSpPr>
-      <p:grpSpPr>
-        <a:xfrm>
-          <a:off x="0" y="0"/>
-          <a:ext cx="0" cy="0"/>
-          <a:chOff x="0" y="0"/>
-          <a:chExt cx="0" cy="0"/>
-        </a:xfrm>
-      </p:grpSpPr>
-      <p:sp>
-        <p:nvSpPr>
-          <p:cNvPr id="2" name="Google Shape;67;p15">
-            <a:extLst>
-              <a:ext uri="{FF2B5EF4-FFF2-40B4-BE49-F238E27FC236}">
-                <a16:creationId xmlns:a16="http://schemas.microsoft.com/office/drawing/2014/main" id="{46C7B286-289D-4229-9F71-E59C474B7C0B}"/>
-              </a:ext>
-            </a:extLst>
-          </p:cNvPr>
-          <p:cNvSpPr txBox="1">
-            <a:spLocks/>
-          </p:cNvSpPr>
-          <p:nvPr/>
-        </p:nvSpPr>
-        <p:spPr>
-          <a:xfrm>
-            <a:off x="517144" y="450150"/>
-            <a:ext cx="6367800" cy="4090800"/>
-          </a:xfrm>
-          <a:prstGeom prst="rect">
-            <a:avLst/>
-          </a:prstGeom>
-        </p:spPr>
-        <p:txBody>
-          <a:bodyPr spcFirstLastPara="1" wrap="square" lIns="91425" tIns="91425" rIns="91425" bIns="91425" anchor="ctr" anchorCtr="0">
-            <a:normAutofit/>
-          </a:bodyPr>
-          <a:lstStyle>
-            <a:defPPr marR="0" lvl="0" algn="l" rtl="0">
-              <a:lnSpc>
-                <a:spcPct val="100000"/>
-              </a:lnSpc>
-              <a:spcBef>
-                <a:spcPts val="0"/>
-              </a:spcBef>
-              <a:spcAft>
-                <a:spcPts val="0"/>
-              </a:spcAft>
-            </a:defPPr>
-            <a:lvl1pPr marR="0" lvl="0" algn="l" rtl="0">
-              <a:lnSpc>
-                <a:spcPct val="100000"/>
-              </a:lnSpc>
-              <a:spcBef>
-                <a:spcPts val="0"/>
-              </a:spcBef>
-              <a:spcAft>
-                <a:spcPts val="0"/>
-              </a:spcAft>
-              <a:buClr>
-                <a:srgbClr val="000000"/>
-              </a:buClr>
-              <a:buFont typeface="Arial"/>
-              <a:defRPr sz="1400" b="0" i="0" u="none" strike="noStrike" cap="none">
-                <a:solidFill>
-                  <a:srgbClr val="000000"/>
-                </a:solidFill>
-                <a:latin typeface="Arial"/>
-                <a:ea typeface="Arial"/>
-                <a:cs typeface="Arial"/>
-                <a:sym typeface="Arial"/>
-              </a:defRPr>
-            </a:lvl1pPr>
-            <a:lvl2pPr marR="0" lvl="1" algn="l" rtl="0">
-              <a:lnSpc>
-                <a:spcPct val="100000"/>
-              </a:lnSpc>
-              <a:spcBef>
-                <a:spcPts val="0"/>
-              </a:spcBef>
-              <a:spcAft>
-                <a:spcPts val="0"/>
-              </a:spcAft>
-              <a:buClr>
-                <a:srgbClr val="000000"/>
-              </a:buClr>
-              <a:buFont typeface="Arial"/>
-              <a:defRPr sz="1400" b="0" i="0" u="none" strike="noStrike" cap="none">
-                <a:solidFill>
-                  <a:srgbClr val="000000"/>
-                </a:solidFill>
-                <a:latin typeface="Arial"/>
-                <a:ea typeface="Arial"/>
-                <a:cs typeface="Arial"/>
-                <a:sym typeface="Arial"/>
-              </a:defRPr>
-            </a:lvl2pPr>
-            <a:lvl3pPr marR="0" lvl="2" algn="l" rtl="0">
-              <a:lnSpc>
-                <a:spcPct val="100000"/>
-              </a:lnSpc>
-              <a:spcBef>
-                <a:spcPts val="0"/>
-              </a:spcBef>
-              <a:spcAft>
-                <a:spcPts val="0"/>
-              </a:spcAft>
-              <a:buClr>
-                <a:srgbClr val="000000"/>
-              </a:buClr>
-              <a:buFont typeface="Arial"/>
-              <a:defRPr sz="1400" b="0" i="0" u="none" strike="noStrike" cap="none">
-                <a:solidFill>
-                  <a:srgbClr val="000000"/>
-                </a:solidFill>
-                <a:latin typeface="Arial"/>
-                <a:ea typeface="Arial"/>
-                <a:cs typeface="Arial"/>
-                <a:sym typeface="Arial"/>
-              </a:defRPr>
-            </a:lvl3pPr>
-            <a:lvl4pPr marR="0" lvl="3" algn="l" rtl="0">
-              <a:lnSpc>
-                <a:spcPct val="100000"/>
-              </a:lnSpc>
-              <a:spcBef>
-                <a:spcPts val="0"/>
-              </a:spcBef>
-              <a:spcAft>
-                <a:spcPts val="0"/>
-              </a:spcAft>
-              <a:buClr>
-                <a:srgbClr val="000000"/>
-              </a:buClr>
-              <a:buFont typeface="Arial"/>
-              <a:defRPr sz="1400" b="0" i="0" u="none" strike="noStrike" cap="none">
-                <a:solidFill>
-                  <a:srgbClr val="000000"/>
-                </a:solidFill>
-                <a:latin typeface="Arial"/>
-                <a:ea typeface="Arial"/>
-                <a:cs typeface="Arial"/>
-                <a:sym typeface="Arial"/>
-              </a:defRPr>
-            </a:lvl4pPr>
-            <a:lvl5pPr marR="0" lvl="4" algn="l" rtl="0">
-              <a:lnSpc>
-                <a:spcPct val="100000"/>
-              </a:lnSpc>
-              <a:spcBef>
-                <a:spcPts val="0"/>
-              </a:spcBef>
-              <a:spcAft>
-                <a:spcPts val="0"/>
-              </a:spcAft>
-              <a:buClr>
-                <a:srgbClr val="000000"/>
-              </a:buClr>
-              <a:buFont typeface="Arial"/>
-              <a:defRPr sz="1400" b="0" i="0" u="none" strike="noStrike" cap="none">
-                <a:solidFill>
-                  <a:srgbClr val="000000"/>
-                </a:solidFill>
-                <a:latin typeface="Arial"/>
-                <a:ea typeface="Arial"/>
-                <a:cs typeface="Arial"/>
-                <a:sym typeface="Arial"/>
-              </a:defRPr>
-            </a:lvl5pPr>
-            <a:lvl6pPr marR="0" lvl="5" algn="l" rtl="0">
-              <a:lnSpc>
-                <a:spcPct val="100000"/>
-              </a:lnSpc>
-              <a:spcBef>
-                <a:spcPts val="0"/>
-              </a:spcBef>
-              <a:spcAft>
-                <a:spcPts val="0"/>
-              </a:spcAft>
-              <a:buClr>
-                <a:srgbClr val="000000"/>
-              </a:buClr>
-              <a:buFont typeface="Arial"/>
-              <a:defRPr sz="1400" b="0" i="0" u="none" strike="noStrike" cap="none">
-                <a:solidFill>
-                  <a:srgbClr val="000000"/>
-                </a:solidFill>
-                <a:latin typeface="Arial"/>
-                <a:ea typeface="Arial"/>
-                <a:cs typeface="Arial"/>
-                <a:sym typeface="Arial"/>
-              </a:defRPr>
-            </a:lvl6pPr>
-            <a:lvl7pPr marR="0" lvl="6" algn="l" rtl="0">
-              <a:lnSpc>
-                <a:spcPct val="100000"/>
-              </a:lnSpc>
-              <a:spcBef>
-                <a:spcPts val="0"/>
-              </a:spcBef>
-              <a:spcAft>
-                <a:spcPts val="0"/>
-              </a:spcAft>
-              <a:buClr>
-                <a:srgbClr val="000000"/>
-              </a:buClr>
-              <a:buFont typeface="Arial"/>
-              <a:defRPr sz="1400" b="0" i="0" u="none" strike="noStrike" cap="none">
-                <a:solidFill>
-                  <a:srgbClr val="000000"/>
-                </a:solidFill>
-                <a:latin typeface="Arial"/>
-                <a:ea typeface="Arial"/>
-                <a:cs typeface="Arial"/>
-                <a:sym typeface="Arial"/>
-              </a:defRPr>
-            </a:lvl7pPr>
-            <a:lvl8pPr marR="0" lvl="7" algn="l" rtl="0">
-              <a:lnSpc>
-                <a:spcPct val="100000"/>
-              </a:lnSpc>
-              <a:spcBef>
-                <a:spcPts val="0"/>
-              </a:spcBef>
-              <a:spcAft>
-                <a:spcPts val="0"/>
-              </a:spcAft>
-              <a:buClr>
-                <a:srgbClr val="000000"/>
-              </a:buClr>
-              <a:buFont typeface="Arial"/>
-              <a:defRPr sz="1400" b="0" i="0" u="none" strike="noStrike" cap="none">
-                <a:solidFill>
-                  <a:srgbClr val="000000"/>
-                </a:solidFill>
-                <a:latin typeface="Arial"/>
-                <a:ea typeface="Arial"/>
-                <a:cs typeface="Arial"/>
-                <a:sym typeface="Arial"/>
-              </a:defRPr>
-            </a:lvl8pPr>
-            <a:lvl9pPr marR="0" lvl="8" algn="l" rtl="0">
-              <a:lnSpc>
-                <a:spcPct val="100000"/>
-              </a:lnSpc>
-              <a:spcBef>
-                <a:spcPts val="0"/>
-              </a:spcBef>
-              <a:spcAft>
-                <a:spcPts val="0"/>
-              </a:spcAft>
-              <a:buClr>
-                <a:srgbClr val="000000"/>
-              </a:buClr>
-              <a:buFont typeface="Arial"/>
-              <a:defRPr sz="1400" b="0" i="0" u="none" strike="noStrike" cap="none">
-                <a:solidFill>
-                  <a:srgbClr val="000000"/>
-                </a:solidFill>
-                <a:latin typeface="Arial"/>
-                <a:ea typeface="Arial"/>
-                <a:cs typeface="Arial"/>
-                <a:sym typeface="Arial"/>
-              </a:defRPr>
-            </a:lvl9pPr>
-          </a:lstStyle>
-          <a:p>
-            <a:r>
-              <a:rPr lang="en-GB" sz="4000" b="1" dirty="0">
-                <a:solidFill>
-                  <a:srgbClr val="FF0000"/>
-                </a:solidFill>
-              </a:rPr>
-              <a:t>End…</a:t>
-            </a:r>
-          </a:p>
-        </p:txBody>
-      </p:sp>
-    </p:spTree>
-    <p:extLst>
-      <p:ext uri="{BB962C8B-B14F-4D97-AF65-F5344CB8AC3E}">
-        <p14:creationId xmlns:p14="http://schemas.microsoft.com/office/powerpoint/2010/main" val="583822461"/>
-      </p:ext>
-    </p:extLst>
-  </p:cSld>
-  <p:clrMapOvr>
-    <a:masterClrMapping/>
-  </p:clrMapOvr>
-</p:sld>
-</file>
-
-<file path=ppt/slides/slide4.xml><?xml version="1.0" encoding="utf-8"?>
+<file path=ppt/slides/slide3.xml><?xml version="1.0" encoding="utf-8"?>
 <p:sld xmlns:a="http://schemas.openxmlformats.org/drawingml/2006/main" xmlns:r="http://schemas.openxmlformats.org/officeDocument/2006/relationships" xmlns:p="http://schemas.openxmlformats.org/presentationml/2006/main">
   <p:cSld>
     <p:spTree>
@@ -34618,6 +34283,53 @@
           </a:p>
         </p:txBody>
       </p:sp>
+      <p:pic>
+        <p:nvPicPr>
+          <p:cNvPr id="2" name="Picture 2">
+            <a:extLst>
+              <a:ext uri="{FF2B5EF4-FFF2-40B4-BE49-F238E27FC236}">
+                <a16:creationId xmlns:a16="http://schemas.microsoft.com/office/drawing/2014/main" id="{EEFE4CA8-1D16-75DB-D0A6-CDF0DD9A1DFA}"/>
+              </a:ext>
+            </a:extLst>
+          </p:cNvPr>
+          <p:cNvPicPr>
+            <a:picLocks noChangeAspect="1" noChangeArrowheads="1"/>
+          </p:cNvPicPr>
+          <p:nvPr/>
+        </p:nvPicPr>
+        <p:blipFill>
+          <a:blip r:embed="rId3">
+            <a:extLst>
+              <a:ext uri="{28A0092B-C50C-407E-A947-70E740481C1C}">
+                <a14:useLocalDpi xmlns:a14="http://schemas.microsoft.com/office/drawing/2010/main" val="0"/>
+              </a:ext>
+            </a:extLst>
+          </a:blip>
+          <a:srcRect/>
+          <a:stretch>
+            <a:fillRect/>
+          </a:stretch>
+        </p:blipFill>
+        <p:spPr bwMode="auto">
+          <a:xfrm>
+            <a:off x="8316948" y="461928"/>
+            <a:ext cx="638102" cy="638102"/>
+          </a:xfrm>
+          <a:prstGeom prst="rect">
+            <a:avLst/>
+          </a:prstGeom>
+          <a:noFill/>
+          <a:extLst>
+            <a:ext uri="{909E8E84-426E-40DD-AFC4-6F175D3DCCD1}">
+              <a14:hiddenFill xmlns:a14="http://schemas.microsoft.com/office/drawing/2010/main">
+                <a:solidFill>
+                  <a:srgbClr val="FFFFFF"/>
+                </a:solidFill>
+              </a14:hiddenFill>
+            </a:ext>
+          </a:extLst>
+        </p:spPr>
+      </p:pic>
     </p:spTree>
   </p:cSld>
   <p:clrMapOvr>
@@ -35380,7 +35092,311 @@
 </p:sld>
 </file>
 
-<file path=ppt/slides/slide5.xml><?xml version="1.0" encoding="utf-8"?>
+<file path=ppt/slides/slide30.xml><?xml version="1.0" encoding="utf-8"?>
+<p:sld xmlns:a="http://schemas.openxmlformats.org/drawingml/2006/main" xmlns:r="http://schemas.openxmlformats.org/officeDocument/2006/relationships" xmlns:p="http://schemas.openxmlformats.org/presentationml/2006/main">
+  <p:cSld>
+    <p:spTree>
+      <p:nvGrpSpPr>
+        <p:cNvPr id="1" name="">
+          <a:extLst>
+            <a:ext uri="{FF2B5EF4-FFF2-40B4-BE49-F238E27FC236}">
+              <a16:creationId xmlns:a16="http://schemas.microsoft.com/office/drawing/2014/main" id="{8B98145F-CF69-3E26-DDA7-FD06D9BD9F0B}"/>
+            </a:ext>
+          </a:extLst>
+        </p:cNvPr>
+        <p:cNvGrpSpPr/>
+        <p:nvPr/>
+      </p:nvGrpSpPr>
+      <p:grpSpPr>
+        <a:xfrm>
+          <a:off x="0" y="0"/>
+          <a:ext cx="0" cy="0"/>
+          <a:chOff x="0" y="0"/>
+          <a:chExt cx="0" cy="0"/>
+        </a:xfrm>
+      </p:grpSpPr>
+      <p:sp>
+        <p:nvSpPr>
+          <p:cNvPr id="2" name="Google Shape;67;p15">
+            <a:extLst>
+              <a:ext uri="{FF2B5EF4-FFF2-40B4-BE49-F238E27FC236}">
+                <a16:creationId xmlns:a16="http://schemas.microsoft.com/office/drawing/2014/main" id="{46C7B286-289D-4229-9F71-E59C474B7C0B}"/>
+              </a:ext>
+            </a:extLst>
+          </p:cNvPr>
+          <p:cNvSpPr txBox="1">
+            <a:spLocks/>
+          </p:cNvSpPr>
+          <p:nvPr/>
+        </p:nvSpPr>
+        <p:spPr>
+          <a:xfrm>
+            <a:off x="517144" y="450150"/>
+            <a:ext cx="6367800" cy="4090800"/>
+          </a:xfrm>
+          <a:prstGeom prst="rect">
+            <a:avLst/>
+          </a:prstGeom>
+        </p:spPr>
+        <p:txBody>
+          <a:bodyPr spcFirstLastPara="1" wrap="square" lIns="91425" tIns="91425" rIns="91425" bIns="91425" anchor="ctr" anchorCtr="0">
+            <a:normAutofit/>
+          </a:bodyPr>
+          <a:lstStyle>
+            <a:defPPr marR="0" lvl="0" algn="l" rtl="0">
+              <a:lnSpc>
+                <a:spcPct val="100000"/>
+              </a:lnSpc>
+              <a:spcBef>
+                <a:spcPts val="0"/>
+              </a:spcBef>
+              <a:spcAft>
+                <a:spcPts val="0"/>
+              </a:spcAft>
+            </a:defPPr>
+            <a:lvl1pPr marR="0" lvl="0" algn="l" rtl="0">
+              <a:lnSpc>
+                <a:spcPct val="100000"/>
+              </a:lnSpc>
+              <a:spcBef>
+                <a:spcPts val="0"/>
+              </a:spcBef>
+              <a:spcAft>
+                <a:spcPts val="0"/>
+              </a:spcAft>
+              <a:buClr>
+                <a:srgbClr val="000000"/>
+              </a:buClr>
+              <a:buFont typeface="Arial"/>
+              <a:defRPr sz="1400" b="0" i="0" u="none" strike="noStrike" cap="none">
+                <a:solidFill>
+                  <a:srgbClr val="000000"/>
+                </a:solidFill>
+                <a:latin typeface="Arial"/>
+                <a:ea typeface="Arial"/>
+                <a:cs typeface="Arial"/>
+                <a:sym typeface="Arial"/>
+              </a:defRPr>
+            </a:lvl1pPr>
+            <a:lvl2pPr marR="0" lvl="1" algn="l" rtl="0">
+              <a:lnSpc>
+                <a:spcPct val="100000"/>
+              </a:lnSpc>
+              <a:spcBef>
+                <a:spcPts val="0"/>
+              </a:spcBef>
+              <a:spcAft>
+                <a:spcPts val="0"/>
+              </a:spcAft>
+              <a:buClr>
+                <a:srgbClr val="000000"/>
+              </a:buClr>
+              <a:buFont typeface="Arial"/>
+              <a:defRPr sz="1400" b="0" i="0" u="none" strike="noStrike" cap="none">
+                <a:solidFill>
+                  <a:srgbClr val="000000"/>
+                </a:solidFill>
+                <a:latin typeface="Arial"/>
+                <a:ea typeface="Arial"/>
+                <a:cs typeface="Arial"/>
+                <a:sym typeface="Arial"/>
+              </a:defRPr>
+            </a:lvl2pPr>
+            <a:lvl3pPr marR="0" lvl="2" algn="l" rtl="0">
+              <a:lnSpc>
+                <a:spcPct val="100000"/>
+              </a:lnSpc>
+              <a:spcBef>
+                <a:spcPts val="0"/>
+              </a:spcBef>
+              <a:spcAft>
+                <a:spcPts val="0"/>
+              </a:spcAft>
+              <a:buClr>
+                <a:srgbClr val="000000"/>
+              </a:buClr>
+              <a:buFont typeface="Arial"/>
+              <a:defRPr sz="1400" b="0" i="0" u="none" strike="noStrike" cap="none">
+                <a:solidFill>
+                  <a:srgbClr val="000000"/>
+                </a:solidFill>
+                <a:latin typeface="Arial"/>
+                <a:ea typeface="Arial"/>
+                <a:cs typeface="Arial"/>
+                <a:sym typeface="Arial"/>
+              </a:defRPr>
+            </a:lvl3pPr>
+            <a:lvl4pPr marR="0" lvl="3" algn="l" rtl="0">
+              <a:lnSpc>
+                <a:spcPct val="100000"/>
+              </a:lnSpc>
+              <a:spcBef>
+                <a:spcPts val="0"/>
+              </a:spcBef>
+              <a:spcAft>
+                <a:spcPts val="0"/>
+              </a:spcAft>
+              <a:buClr>
+                <a:srgbClr val="000000"/>
+              </a:buClr>
+              <a:buFont typeface="Arial"/>
+              <a:defRPr sz="1400" b="0" i="0" u="none" strike="noStrike" cap="none">
+                <a:solidFill>
+                  <a:srgbClr val="000000"/>
+                </a:solidFill>
+                <a:latin typeface="Arial"/>
+                <a:ea typeface="Arial"/>
+                <a:cs typeface="Arial"/>
+                <a:sym typeface="Arial"/>
+              </a:defRPr>
+            </a:lvl4pPr>
+            <a:lvl5pPr marR="0" lvl="4" algn="l" rtl="0">
+              <a:lnSpc>
+                <a:spcPct val="100000"/>
+              </a:lnSpc>
+              <a:spcBef>
+                <a:spcPts val="0"/>
+              </a:spcBef>
+              <a:spcAft>
+                <a:spcPts val="0"/>
+              </a:spcAft>
+              <a:buClr>
+                <a:srgbClr val="000000"/>
+              </a:buClr>
+              <a:buFont typeface="Arial"/>
+              <a:defRPr sz="1400" b="0" i="0" u="none" strike="noStrike" cap="none">
+                <a:solidFill>
+                  <a:srgbClr val="000000"/>
+                </a:solidFill>
+                <a:latin typeface="Arial"/>
+                <a:ea typeface="Arial"/>
+                <a:cs typeface="Arial"/>
+                <a:sym typeface="Arial"/>
+              </a:defRPr>
+            </a:lvl5pPr>
+            <a:lvl6pPr marR="0" lvl="5" algn="l" rtl="0">
+              <a:lnSpc>
+                <a:spcPct val="100000"/>
+              </a:lnSpc>
+              <a:spcBef>
+                <a:spcPts val="0"/>
+              </a:spcBef>
+              <a:spcAft>
+                <a:spcPts val="0"/>
+              </a:spcAft>
+              <a:buClr>
+                <a:srgbClr val="000000"/>
+              </a:buClr>
+              <a:buFont typeface="Arial"/>
+              <a:defRPr sz="1400" b="0" i="0" u="none" strike="noStrike" cap="none">
+                <a:solidFill>
+                  <a:srgbClr val="000000"/>
+                </a:solidFill>
+                <a:latin typeface="Arial"/>
+                <a:ea typeface="Arial"/>
+                <a:cs typeface="Arial"/>
+                <a:sym typeface="Arial"/>
+              </a:defRPr>
+            </a:lvl6pPr>
+            <a:lvl7pPr marR="0" lvl="6" algn="l" rtl="0">
+              <a:lnSpc>
+                <a:spcPct val="100000"/>
+              </a:lnSpc>
+              <a:spcBef>
+                <a:spcPts val="0"/>
+              </a:spcBef>
+              <a:spcAft>
+                <a:spcPts val="0"/>
+              </a:spcAft>
+              <a:buClr>
+                <a:srgbClr val="000000"/>
+              </a:buClr>
+              <a:buFont typeface="Arial"/>
+              <a:defRPr sz="1400" b="0" i="0" u="none" strike="noStrike" cap="none">
+                <a:solidFill>
+                  <a:srgbClr val="000000"/>
+                </a:solidFill>
+                <a:latin typeface="Arial"/>
+                <a:ea typeface="Arial"/>
+                <a:cs typeface="Arial"/>
+                <a:sym typeface="Arial"/>
+              </a:defRPr>
+            </a:lvl7pPr>
+            <a:lvl8pPr marR="0" lvl="7" algn="l" rtl="0">
+              <a:lnSpc>
+                <a:spcPct val="100000"/>
+              </a:lnSpc>
+              <a:spcBef>
+                <a:spcPts val="0"/>
+              </a:spcBef>
+              <a:spcAft>
+                <a:spcPts val="0"/>
+              </a:spcAft>
+              <a:buClr>
+                <a:srgbClr val="000000"/>
+              </a:buClr>
+              <a:buFont typeface="Arial"/>
+              <a:defRPr sz="1400" b="0" i="0" u="none" strike="noStrike" cap="none">
+                <a:solidFill>
+                  <a:srgbClr val="000000"/>
+                </a:solidFill>
+                <a:latin typeface="Arial"/>
+                <a:ea typeface="Arial"/>
+                <a:cs typeface="Arial"/>
+                <a:sym typeface="Arial"/>
+              </a:defRPr>
+            </a:lvl8pPr>
+            <a:lvl9pPr marR="0" lvl="8" algn="l" rtl="0">
+              <a:lnSpc>
+                <a:spcPct val="100000"/>
+              </a:lnSpc>
+              <a:spcBef>
+                <a:spcPts val="0"/>
+              </a:spcBef>
+              <a:spcAft>
+                <a:spcPts val="0"/>
+              </a:spcAft>
+              <a:buClr>
+                <a:srgbClr val="000000"/>
+              </a:buClr>
+              <a:buFont typeface="Arial"/>
+              <a:defRPr sz="1400" b="0" i="0" u="none" strike="noStrike" cap="none">
+                <a:solidFill>
+                  <a:srgbClr val="000000"/>
+                </a:solidFill>
+                <a:latin typeface="Arial"/>
+                <a:ea typeface="Arial"/>
+                <a:cs typeface="Arial"/>
+                <a:sym typeface="Arial"/>
+              </a:defRPr>
+            </a:lvl9pPr>
+          </a:lstStyle>
+          <a:p>
+            <a:r>
+              <a:rPr lang="en-GB" sz="4000" b="1" dirty="0">
+                <a:solidFill>
+                  <a:srgbClr val="FF0000"/>
+                </a:solidFill>
+              </a:rPr>
+              <a:t>End…</a:t>
+            </a:r>
+          </a:p>
+        </p:txBody>
+      </p:sp>
+    </p:spTree>
+    <p:extLst>
+      <p:ext uri="{BB962C8B-B14F-4D97-AF65-F5344CB8AC3E}">
+        <p14:creationId xmlns:p14="http://schemas.microsoft.com/office/powerpoint/2010/main" val="583822461"/>
+      </p:ext>
+    </p:extLst>
+  </p:cSld>
+  <p:clrMapOvr>
+    <a:masterClrMapping/>
+  </p:clrMapOvr>
+</p:sld>
+</file>
+
+<file path=ppt/slides/slide4.xml><?xml version="1.0" encoding="utf-8"?>
 <p:sld xmlns:a="http://schemas.openxmlformats.org/drawingml/2006/main" xmlns:r="http://schemas.openxmlformats.org/officeDocument/2006/relationships" xmlns:p="http://schemas.openxmlformats.org/presentationml/2006/main">
   <p:cSld>
     <p:spTree>
@@ -35536,7 +35552,7 @@
                 <a:tabLst/>
                 <a:defRPr/>
               </a:pPr>
-              <a:t>5</a:t>
+              <a:t>4</a:t>
             </a:fld>
             <a:endParaRPr kumimoji="0" sz="1000" b="0" i="0" u="none" strike="noStrike" kern="0" cap="none" spc="0" normalizeH="0" baseline="0" noProof="0">
               <a:ln>
@@ -35620,7 +35636,7 @@
 </p:sld>
 </file>
 
-<file path=ppt/slides/slide6.xml><?xml version="1.0" encoding="utf-8"?>
+<file path=ppt/slides/slide5.xml><?xml version="1.0" encoding="utf-8"?>
 <p:sld xmlns:a="http://schemas.openxmlformats.org/drawingml/2006/main" xmlns:r="http://schemas.openxmlformats.org/officeDocument/2006/relationships" xmlns:p="http://schemas.openxmlformats.org/presentationml/2006/main">
   <p:cSld>
     <p:spTree>
@@ -35994,6 +36010,53 @@
           </a:p>
         </p:txBody>
       </p:sp>
+      <p:pic>
+        <p:nvPicPr>
+          <p:cNvPr id="2" name="Picture 2">
+            <a:extLst>
+              <a:ext uri="{FF2B5EF4-FFF2-40B4-BE49-F238E27FC236}">
+                <a16:creationId xmlns:a16="http://schemas.microsoft.com/office/drawing/2014/main" id="{C8E6AEA7-F4BD-A6F8-1769-AA844405DC3A}"/>
+              </a:ext>
+            </a:extLst>
+          </p:cNvPr>
+          <p:cNvPicPr>
+            <a:picLocks noChangeAspect="1" noChangeArrowheads="1"/>
+          </p:cNvPicPr>
+          <p:nvPr/>
+        </p:nvPicPr>
+        <p:blipFill>
+          <a:blip r:embed="rId3">
+            <a:extLst>
+              <a:ext uri="{28A0092B-C50C-407E-A947-70E740481C1C}">
+                <a14:useLocalDpi xmlns:a14="http://schemas.microsoft.com/office/drawing/2010/main" val="0"/>
+              </a:ext>
+            </a:extLst>
+          </a:blip>
+          <a:srcRect/>
+          <a:stretch>
+            <a:fillRect/>
+          </a:stretch>
+        </p:blipFill>
+        <p:spPr bwMode="auto">
+          <a:xfrm>
+            <a:off x="8316948" y="461928"/>
+            <a:ext cx="638102" cy="638102"/>
+          </a:xfrm>
+          <a:prstGeom prst="rect">
+            <a:avLst/>
+          </a:prstGeom>
+          <a:noFill/>
+          <a:extLst>
+            <a:ext uri="{909E8E84-426E-40DD-AFC4-6F175D3DCCD1}">
+              <a14:hiddenFill xmlns:a14="http://schemas.microsoft.com/office/drawing/2010/main">
+                <a:solidFill>
+                  <a:srgbClr val="FFFFFF"/>
+                </a:solidFill>
+              </a14:hiddenFill>
+            </a:ext>
+          </a:extLst>
+        </p:spPr>
+      </p:pic>
     </p:spTree>
   </p:cSld>
   <p:clrMapOvr>
@@ -36702,7 +36765,7 @@
 </p:sld>
 </file>
 
-<file path=ppt/slides/slide7.xml><?xml version="1.0" encoding="utf-8"?>
+<file path=ppt/slides/slide6.xml><?xml version="1.0" encoding="utf-8"?>
 <p:sld xmlns:a="http://schemas.openxmlformats.org/drawingml/2006/main" xmlns:r="http://schemas.openxmlformats.org/officeDocument/2006/relationships" xmlns:p="http://schemas.openxmlformats.org/presentationml/2006/main">
   <p:cSld>
     <p:spTree>
@@ -37099,8 +37162,8 @@
             <a:chExt cx="230040" cy="392040"/>
           </a:xfrm>
         </p:grpSpPr>
-        <mc:AlternateContent xmlns:mc="http://schemas.openxmlformats.org/markup-compatibility/2006">
-          <mc:Choice xmlns:p14="http://schemas.microsoft.com/office/powerpoint/2010/main" Requires="p14">
+        <mc:AlternateContent xmlns:mc="http://schemas.openxmlformats.org/markup-compatibility/2006" xmlns:p14="http://schemas.microsoft.com/office/powerpoint/2010/main">
+          <mc:Choice Requires="p14">
             <p:contentPart p14:bwMode="auto" r:id="rId4">
               <p14:nvContentPartPr>
                 <p14:cNvPr id="2" name="Ink 1">
@@ -37119,7 +37182,7 @@
               </p14:xfrm>
             </p:contentPart>
           </mc:Choice>
-          <mc:Fallback>
+          <mc:Fallback xmlns="">
             <p:pic>
               <p:nvPicPr>
                 <p:cNvPr id="2" name="Ink 1">
@@ -37150,8 +37213,8 @@
             </p:pic>
           </mc:Fallback>
         </mc:AlternateContent>
-        <mc:AlternateContent xmlns:mc="http://schemas.openxmlformats.org/markup-compatibility/2006">
-          <mc:Choice xmlns:p14="http://schemas.microsoft.com/office/powerpoint/2010/main" Requires="p14">
+        <mc:AlternateContent xmlns:mc="http://schemas.openxmlformats.org/markup-compatibility/2006" xmlns:p14="http://schemas.microsoft.com/office/powerpoint/2010/main">
+          <mc:Choice Requires="p14">
             <p:contentPart p14:bwMode="auto" r:id="rId6">
               <p14:nvContentPartPr>
                 <p14:cNvPr id="5" name="Ink 4">
@@ -37170,7 +37233,7 @@
               </p14:xfrm>
             </p:contentPart>
           </mc:Choice>
-          <mc:Fallback>
+          <mc:Fallback xmlns="">
             <p:pic>
               <p:nvPicPr>
                 <p:cNvPr id="5" name="Ink 4">
@@ -37202,6 +37265,53 @@
           </mc:Fallback>
         </mc:AlternateContent>
       </p:grpSp>
+      <p:pic>
+        <p:nvPicPr>
+          <p:cNvPr id="7" name="Picture 2">
+            <a:extLst>
+              <a:ext uri="{FF2B5EF4-FFF2-40B4-BE49-F238E27FC236}">
+                <a16:creationId xmlns:a16="http://schemas.microsoft.com/office/drawing/2014/main" id="{26E8C8A7-6FDB-F786-BB53-740045C19F65}"/>
+              </a:ext>
+            </a:extLst>
+          </p:cNvPr>
+          <p:cNvPicPr>
+            <a:picLocks noChangeAspect="1" noChangeArrowheads="1"/>
+          </p:cNvPicPr>
+          <p:nvPr/>
+        </p:nvPicPr>
+        <p:blipFill>
+          <a:blip r:embed="rId8">
+            <a:extLst>
+              <a:ext uri="{28A0092B-C50C-407E-A947-70E740481C1C}">
+                <a14:useLocalDpi xmlns:a14="http://schemas.microsoft.com/office/drawing/2010/main" val="0"/>
+              </a:ext>
+            </a:extLst>
+          </a:blip>
+          <a:srcRect/>
+          <a:stretch>
+            <a:fillRect/>
+          </a:stretch>
+        </p:blipFill>
+        <p:spPr bwMode="auto">
+          <a:xfrm>
+            <a:off x="8316948" y="461928"/>
+            <a:ext cx="638102" cy="638102"/>
+          </a:xfrm>
+          <a:prstGeom prst="rect">
+            <a:avLst/>
+          </a:prstGeom>
+          <a:noFill/>
+          <a:extLst>
+            <a:ext uri="{909E8E84-426E-40DD-AFC4-6F175D3DCCD1}">
+              <a14:hiddenFill xmlns:a14="http://schemas.microsoft.com/office/drawing/2010/main">
+                <a:solidFill>
+                  <a:srgbClr val="FFFFFF"/>
+                </a:solidFill>
+              </a14:hiddenFill>
+            </a:ext>
+          </a:extLst>
+        </p:spPr>
+      </p:pic>
     </p:spTree>
   </p:cSld>
   <p:clrMapOvr>
@@ -37621,7 +37731,7 @@
 </p:sld>
 </file>
 
-<file path=ppt/slides/slide8.xml><?xml version="1.0" encoding="utf-8"?>
+<file path=ppt/slides/slide7.xml><?xml version="1.0" encoding="utf-8"?>
 <p:sld xmlns:a="http://schemas.openxmlformats.org/drawingml/2006/main" xmlns:r="http://schemas.openxmlformats.org/officeDocument/2006/relationships" xmlns:p="http://schemas.openxmlformats.org/presentationml/2006/main">
   <p:cSld>
     <p:spTree>
@@ -37848,6 +37958,53 @@
           </p:pic>
         </mc:Fallback>
       </mc:AlternateContent>
+      <p:pic>
+        <p:nvPicPr>
+          <p:cNvPr id="3" name="Picture 2">
+            <a:extLst>
+              <a:ext uri="{FF2B5EF4-FFF2-40B4-BE49-F238E27FC236}">
+                <a16:creationId xmlns:a16="http://schemas.microsoft.com/office/drawing/2014/main" id="{1387D54D-332F-846D-BD42-9DA1F6944589}"/>
+              </a:ext>
+            </a:extLst>
+          </p:cNvPr>
+          <p:cNvPicPr>
+            <a:picLocks noChangeAspect="1" noChangeArrowheads="1"/>
+          </p:cNvPicPr>
+          <p:nvPr/>
+        </p:nvPicPr>
+        <p:blipFill>
+          <a:blip r:embed="rId6">
+            <a:extLst>
+              <a:ext uri="{28A0092B-C50C-407E-A947-70E740481C1C}">
+                <a14:useLocalDpi xmlns:a14="http://schemas.microsoft.com/office/drawing/2010/main" val="0"/>
+              </a:ext>
+            </a:extLst>
+          </a:blip>
+          <a:srcRect/>
+          <a:stretch>
+            <a:fillRect/>
+          </a:stretch>
+        </p:blipFill>
+        <p:spPr bwMode="auto">
+          <a:xfrm>
+            <a:off x="8316948" y="461928"/>
+            <a:ext cx="638102" cy="638102"/>
+          </a:xfrm>
+          <a:prstGeom prst="rect">
+            <a:avLst/>
+          </a:prstGeom>
+          <a:noFill/>
+          <a:extLst>
+            <a:ext uri="{909E8E84-426E-40DD-AFC4-6F175D3DCCD1}">
+              <a14:hiddenFill xmlns:a14="http://schemas.microsoft.com/office/drawing/2010/main">
+                <a:solidFill>
+                  <a:srgbClr val="FFFFFF"/>
+                </a:solidFill>
+              </a14:hiddenFill>
+            </a:ext>
+          </a:extLst>
+        </p:spPr>
+      </p:pic>
     </p:spTree>
   </p:cSld>
   <p:clrMapOvr>
@@ -37856,7 +38013,7 @@
 </p:sld>
 </file>
 
-<file path=ppt/slides/slide9.xml><?xml version="1.0" encoding="utf-8"?>
+<file path=ppt/slides/slide8.xml><?xml version="1.0" encoding="utf-8"?>
 <p:sld xmlns:a="http://schemas.openxmlformats.org/drawingml/2006/main" xmlns:r="http://schemas.openxmlformats.org/officeDocument/2006/relationships" xmlns:p="http://schemas.openxmlformats.org/presentationml/2006/main">
   <p:cSld>
     <p:spTree>
@@ -38072,7 +38229,218 @@
           </a:p>
         </p:txBody>
       </p:sp>
+      <p:pic>
+        <p:nvPicPr>
+          <p:cNvPr id="2" name="Picture 2">
+            <a:extLst>
+              <a:ext uri="{FF2B5EF4-FFF2-40B4-BE49-F238E27FC236}">
+                <a16:creationId xmlns:a16="http://schemas.microsoft.com/office/drawing/2014/main" id="{92E98AFB-E4E4-47EC-9211-78E47701DAD4}"/>
+              </a:ext>
+            </a:extLst>
+          </p:cNvPr>
+          <p:cNvPicPr>
+            <a:picLocks noChangeAspect="1" noChangeArrowheads="1"/>
+          </p:cNvPicPr>
+          <p:nvPr/>
+        </p:nvPicPr>
+        <p:blipFill>
+          <a:blip r:embed="rId4">
+            <a:extLst>
+              <a:ext uri="{28A0092B-C50C-407E-A947-70E740481C1C}">
+                <a14:useLocalDpi xmlns:a14="http://schemas.microsoft.com/office/drawing/2010/main" val="0"/>
+              </a:ext>
+            </a:extLst>
+          </a:blip>
+          <a:srcRect/>
+          <a:stretch>
+            <a:fillRect/>
+          </a:stretch>
+        </p:blipFill>
+        <p:spPr bwMode="auto">
+          <a:xfrm>
+            <a:off x="8316948" y="461928"/>
+            <a:ext cx="638102" cy="638102"/>
+          </a:xfrm>
+          <a:prstGeom prst="rect">
+            <a:avLst/>
+          </a:prstGeom>
+          <a:noFill/>
+          <a:extLst>
+            <a:ext uri="{909E8E84-426E-40DD-AFC4-6F175D3DCCD1}">
+              <a14:hiddenFill xmlns:a14="http://schemas.microsoft.com/office/drawing/2010/main">
+                <a:solidFill>
+                  <a:srgbClr val="FFFFFF"/>
+                </a:solidFill>
+              </a14:hiddenFill>
+            </a:ext>
+          </a:extLst>
+        </p:spPr>
+      </p:pic>
     </p:spTree>
+  </p:cSld>
+  <p:clrMapOvr>
+    <a:masterClrMapping/>
+  </p:clrMapOvr>
+</p:sld>
+</file>
+
+<file path=ppt/slides/slide9.xml><?xml version="1.0" encoding="utf-8"?>
+<p:sld xmlns:a="http://schemas.openxmlformats.org/drawingml/2006/main" xmlns:r="http://schemas.openxmlformats.org/officeDocument/2006/relationships" xmlns:p="http://schemas.openxmlformats.org/presentationml/2006/main">
+  <p:cSld>
+    <p:spTree>
+      <p:nvGrpSpPr>
+        <p:cNvPr id="1" name="Shape 127">
+          <a:extLst>
+            <a:ext uri="{FF2B5EF4-FFF2-40B4-BE49-F238E27FC236}">
+              <a16:creationId xmlns:a16="http://schemas.microsoft.com/office/drawing/2014/main" id="{E625ACCE-D5DB-4A7B-5EF8-6FAA948DBC03}"/>
+            </a:ext>
+          </a:extLst>
+        </p:cNvPr>
+        <p:cNvGrpSpPr/>
+        <p:nvPr/>
+      </p:nvGrpSpPr>
+      <p:grpSpPr>
+        <a:xfrm>
+          <a:off x="0" y="0"/>
+          <a:ext cx="0" cy="0"/>
+          <a:chOff x="0" y="0"/>
+          <a:chExt cx="0" cy="0"/>
+        </a:xfrm>
+      </p:grpSpPr>
+      <p:sp>
+        <p:nvSpPr>
+          <p:cNvPr id="4" name="Title 3">
+            <a:extLst>
+              <a:ext uri="{FF2B5EF4-FFF2-40B4-BE49-F238E27FC236}">
+                <a16:creationId xmlns:a16="http://schemas.microsoft.com/office/drawing/2014/main" id="{385EC6B8-E326-2B56-DD63-22C71F7EE37A}"/>
+              </a:ext>
+            </a:extLst>
+          </p:cNvPr>
+          <p:cNvSpPr>
+            <a:spLocks noGrp="1"/>
+          </p:cNvSpPr>
+          <p:nvPr>
+            <p:ph type="title"/>
+          </p:nvPr>
+        </p:nvSpPr>
+        <p:spPr/>
+        <p:txBody>
+          <a:bodyPr>
+            <a:normAutofit fontScale="90000"/>
+          </a:bodyPr>
+          <a:lstStyle/>
+          <a:p>
+            <a:r>
+              <a:rPr lang="en-GB" dirty="0"/>
+              <a:t>Robust Scaler</a:t>
+            </a:r>
+          </a:p>
+        </p:txBody>
+      </p:sp>
+      <mc:AlternateContent xmlns:mc="http://schemas.openxmlformats.org/markup-compatibility/2006" xmlns:p14="http://schemas.microsoft.com/office/powerpoint/2010/main">
+        <mc:Choice Requires="p14">
+          <p:contentPart p14:bwMode="auto" r:id="rId3">
+            <p14:nvContentPartPr>
+              <p14:cNvPr id="5" name="Ink 4">
+                <a:extLst>
+                  <a:ext uri="{FF2B5EF4-FFF2-40B4-BE49-F238E27FC236}">
+                    <a16:creationId xmlns:a16="http://schemas.microsoft.com/office/drawing/2014/main" id="{053CACD3-EEB4-F5F3-733A-B28475968D25}"/>
+                  </a:ext>
+                </a:extLst>
+              </p14:cNvPr>
+              <p14:cNvContentPartPr/>
+              <p14:nvPr/>
+            </p14:nvContentPartPr>
+            <p14:xfrm>
+              <a:off x="743400" y="1811520"/>
+              <a:ext cx="7728120" cy="2629440"/>
+            </p14:xfrm>
+          </p:contentPart>
+        </mc:Choice>
+        <mc:Fallback xmlns="">
+          <p:pic>
+            <p:nvPicPr>
+              <p:cNvPr id="5" name="Ink 4">
+                <a:extLst>
+                  <a:ext uri="{FF2B5EF4-FFF2-40B4-BE49-F238E27FC236}">
+                    <a16:creationId xmlns:a16="http://schemas.microsoft.com/office/drawing/2014/main" id="{053CACD3-EEB4-F5F3-733A-B28475968D25}"/>
+                  </a:ext>
+                </a:extLst>
+              </p:cNvPr>
+              <p:cNvPicPr/>
+              <p:nvPr/>
+            </p:nvPicPr>
+            <p:blipFill>
+              <a:blip r:embed="rId4"/>
+              <a:stretch>
+                <a:fillRect/>
+              </a:stretch>
+            </p:blipFill>
+            <p:spPr>
+              <a:xfrm>
+                <a:off x="734040" y="1802160"/>
+                <a:ext cx="7746840" cy="2648160"/>
+              </a:xfrm>
+              <a:prstGeom prst="rect">
+                <a:avLst/>
+              </a:prstGeom>
+            </p:spPr>
+          </p:pic>
+        </mc:Fallback>
+      </mc:AlternateContent>
+      <p:pic>
+        <p:nvPicPr>
+          <p:cNvPr id="2" name="Picture 2">
+            <a:extLst>
+              <a:ext uri="{FF2B5EF4-FFF2-40B4-BE49-F238E27FC236}">
+                <a16:creationId xmlns:a16="http://schemas.microsoft.com/office/drawing/2014/main" id="{C10DF0C9-4A96-9094-55FC-97F3158F23D7}"/>
+              </a:ext>
+            </a:extLst>
+          </p:cNvPr>
+          <p:cNvPicPr>
+            <a:picLocks noChangeAspect="1" noChangeArrowheads="1"/>
+          </p:cNvPicPr>
+          <p:nvPr/>
+        </p:nvPicPr>
+        <p:blipFill>
+          <a:blip r:embed="rId5">
+            <a:extLst>
+              <a:ext uri="{28A0092B-C50C-407E-A947-70E740481C1C}">
+                <a14:useLocalDpi xmlns:a14="http://schemas.microsoft.com/office/drawing/2010/main" val="0"/>
+              </a:ext>
+            </a:extLst>
+          </a:blip>
+          <a:srcRect/>
+          <a:stretch>
+            <a:fillRect/>
+          </a:stretch>
+        </p:blipFill>
+        <p:spPr bwMode="auto">
+          <a:xfrm>
+            <a:off x="8316948" y="461928"/>
+            <a:ext cx="638102" cy="638102"/>
+          </a:xfrm>
+          <a:prstGeom prst="rect">
+            <a:avLst/>
+          </a:prstGeom>
+          <a:noFill/>
+          <a:extLst>
+            <a:ext uri="{909E8E84-426E-40DD-AFC4-6F175D3DCCD1}">
+              <a14:hiddenFill xmlns:a14="http://schemas.microsoft.com/office/drawing/2010/main">
+                <a:solidFill>
+                  <a:srgbClr val="FFFFFF"/>
+                </a:solidFill>
+              </a14:hiddenFill>
+            </a:ext>
+          </a:extLst>
+        </p:spPr>
+      </p:pic>
+    </p:spTree>
+    <p:extLst>
+      <p:ext uri="{BB962C8B-B14F-4D97-AF65-F5344CB8AC3E}">
+        <p14:creationId xmlns:p14="http://schemas.microsoft.com/office/powerpoint/2010/main" val="852693164"/>
+      </p:ext>
+    </p:extLst>
   </p:cSld>
   <p:clrMapOvr>
     <a:masterClrMapping/>
